--- a/pdf/02_Unity语法基础_MonoBehaviour与常用对象.pptx
+++ b/pdf/02_Unity语法基础_MonoBehaviour与常用对象.pptx
@@ -1,26 +1,26 @@
 
 <file path=ppt/presentation.xml><?xml version="1.0" encoding="utf-8"?>
-<p:presentation xmlns:a="http://schemas.openxmlformats.org/drawingml/2006/main" xmlns:r="http://schemas.openxmlformats.org/officeDocument/2006/relationships" xmlns:p="http://schemas.openxmlformats.org/presentationml/2006/main" saveSubsetFonts="1" autoCompressPictures="0">
+<p:presentation xmlns:a="http://schemas.openxmlformats.org/drawingml/2006/main" xmlns:r="http://schemas.openxmlformats.org/officeDocument/2006/relationships" xmlns:p="http://schemas.openxmlformats.org/presentationml/2006/main" autoCompressPictures="0">
   <p:sldMasterIdLst>
     <p:sldMasterId id="2147483648" r:id="rId1"/>
   </p:sldMasterIdLst>
   <p:notesMasterIdLst>
-    <p:notesMasterId r:id="rId20"/>
+    <p:notesMasterId r:id="rId4"/>
   </p:notesMasterIdLst>
   <p:sldIdLst>
-    <p:sldId id="256" r:id="rId7"/>
-    <p:sldId id="257" r:id="rId8"/>
-    <p:sldId id="258" r:id="rId9"/>
-    <p:sldId id="259" r:id="rId10"/>
-    <p:sldId id="260" r:id="rId11"/>
-    <p:sldId id="261" r:id="rId12"/>
-    <p:sldId id="262" r:id="rId13"/>
-    <p:sldId id="263" r:id="rId14"/>
-    <p:sldId id="264" r:id="rId15"/>
-    <p:sldId id="265" r:id="rId16"/>
-    <p:sldId id="266" r:id="rId17"/>
-    <p:sldId id="267" r:id="rId18"/>
-    <p:sldId id="268" r:id="rId19"/>
+    <p:sldId id="256" r:id="rId3"/>
+    <p:sldId id="257" r:id="rId5"/>
+    <p:sldId id="258" r:id="rId6"/>
+    <p:sldId id="259" r:id="rId7"/>
+    <p:sldId id="260" r:id="rId8"/>
+    <p:sldId id="261" r:id="rId9"/>
+    <p:sldId id="262" r:id="rId10"/>
+    <p:sldId id="263" r:id="rId11"/>
+    <p:sldId id="264" r:id="rId12"/>
+    <p:sldId id="265" r:id="rId13"/>
+    <p:sldId id="266" r:id="rId14"/>
+    <p:sldId id="267" r:id="rId15"/>
+    <p:sldId id="268" r:id="rId16"/>
   </p:sldIdLst>
   <p:sldSz cx="12192000" cy="6858000" type="screen4x3"/>
   <p:notesSz cx="6858000" cy="9144000"/>
@@ -119,12 +119,33 @@
       </a:defRPr>
     </a:lvl9pPr>
   </p:defaultTextStyle>
+  <p:extLst>
+    <p:ext uri="{EFAFB233-063F-42B5-8137-9DF3F51BA10A}">
+      <p15:sldGuideLst xmlns:p15="http://schemas.microsoft.com/office/powerpoint/2012/main">
+        <p15:guide id="1" orient="horz" pos="2154" userDrawn="1">
+          <p15:clr>
+            <a:srgbClr val="A4A3A4"/>
+          </p15:clr>
+        </p15:guide>
+        <p15:guide id="2" pos="2880" userDrawn="1">
+          <p15:clr>
+            <a:srgbClr val="A4A3A4"/>
+          </p15:clr>
+        </p15:guide>
+      </p15:sldGuideLst>
+    </p:ext>
+  </p:extLst>
 </p:presentation>
 </file>
 
 <file path=ppt/notesMasters/notesMaster1.xml><?xml version="1.0" encoding="utf-8"?>
 <p:notesMaster xmlns:a="http://schemas.openxmlformats.org/drawingml/2006/main" xmlns:r="http://schemas.openxmlformats.org/officeDocument/2006/relationships" xmlns:p="http://schemas.openxmlformats.org/presentationml/2006/main">
   <p:cSld>
+    <p:bg>
+      <p:bgRef idx="1001">
+        <a:schemeClr val="bg1"/>
+      </p:bgRef>
+    </p:bg>
     <p:spTree>
       <p:nvGrpSpPr>
         <p:cNvPr id="1" name=""/>
@@ -300,7 +321,7 @@
   <p:hf/>
   <p:notesStyle>
     <a:lvl1pPr marL="0" algn="l">
-      <a:defRPr sz="1200" lang="en-US"/>
+      <a:defRPr lang="en-US" sz="1200"/>
     </a:lvl1pPr>
   </p:notesStyle>
 </p:notesMaster>
@@ -354,6 +375,7 @@
               <a:rPr lang="zh-CN" dirty="0"/>
               <a:t>这一单元关注 Unity 脚本真正进入场景后的工作方式。我们会把 MonoBehaviour、生命周期、Transform、GameObject 与 CharacterController 串成一条可运行的角色控制链。</a:t>
             </a:r>
+            <a:endParaRPr lang="zh-CN" dirty="0"/>
           </a:p>
         </p:txBody>
       </p:sp>
@@ -413,6 +435,7 @@
               <a:rPr lang="zh-CN" dirty="0"/>
               <a:t>CharacterController 提供受碰撞约束的脚本控制移动，但 Move 不会自动施加重力。理解胶囊尺寸、坡度、台阶、贴地状态以及 Move 与 SimpleMove 的参数差异，是稳定移动的前提。</a:t>
             </a:r>
+            <a:endParaRPr lang="zh-CN" dirty="0"/>
           </a:p>
         </p:txBody>
       </p:sp>
@@ -472,6 +495,7 @@
               <a:rPr lang="zh-CN" dirty="0"/>
               <a:t>一个完整移动帧要依次读取输入、限制斜向速度、平滑转向、处理贴地和跳跃、积分重力，再合成速度调用 Move。Move 返回的 CollisionFlags 还能帮助修正撞到顶部后的竖直速度。</a:t>
             </a:r>
+            <a:endParaRPr lang="zh-CN" dirty="0"/>
           </a:p>
         </p:txBody>
       </p:sp>
@@ -531,6 +555,7 @@
               <a:rPr lang="zh-CN" dirty="0"/>
               <a:t>CharacterController 更强调玩家控制的确定性，Rigidbody 更强调动力学响应。先决定玩法需要可控性还是物理交互，不要让两套系统在同一个角色根节点上争夺移动权。</a:t>
             </a:r>
+            <a:endParaRPr lang="zh-CN" dirty="0"/>
           </a:p>
         </p:txBody>
       </p:sp>
@@ -590,6 +615,7 @@
               <a:rPr lang="zh-CN" dirty="0"/>
               <a:t>最小场景闭环是角色在 Update 中完成移动，摄像机在 LateUpdate 中读取角色的新位置并跟随。通过 Inspector 连接 target，再逐项验证移动、跳跃、碰撞和镜头稳定性，就完成了从脚本到场景运行的全过程。</a:t>
             </a:r>
+            <a:endParaRPr lang="zh-CN" dirty="0"/>
           </a:p>
         </p:txBody>
       </p:sp>
@@ -649,6 +675,7 @@
               <a:rPr lang="zh-CN" dirty="0"/>
               <a:t>学习路线从脚本身份开始，经过生命周期和常用对象，最后落到角色移动与摄像机跟随。每个知识点都围绕两个问题：当前代码操作哪个对象，它应该在什么时机执行。</a:t>
             </a:r>
+            <a:endParaRPr lang="zh-CN" dirty="0"/>
           </a:p>
         </p:txBody>
       </p:sp>
@@ -708,6 +735,7 @@
               <a:rPr lang="zh-CN" dirty="0"/>
               <a:t>GameObject 本身是组件容器，Transform 是每个对象都具备的基础能力。自定义 MonoBehaviour 只有挂载到对象上才会运行，因此文件名、类名和对象上的组件关系必须保持清晰。</a:t>
             </a:r>
+            <a:endParaRPr lang="zh-CN" dirty="0"/>
           </a:p>
         </p:txBody>
       </p:sp>
@@ -767,6 +795,7 @@
               <a:rPr lang="zh-CN" dirty="0"/>
               <a:t>生命周期函数由 Unity 在固定时机调用，从 Awake、OnEnable、Start 进入运行循环，再到 OnDisable 与 OnDestroy。对象重新启用时 OnEnable 会再次执行，而同一实例的 Start 通常只执行一次。</a:t>
             </a:r>
+            <a:endParaRPr lang="zh-CN" dirty="0"/>
           </a:p>
         </p:txBody>
       </p:sp>
@@ -826,6 +855,7 @@
               <a:rPr lang="zh-CN" dirty="0"/>
               <a:t>选择 生命周期函数时，先判断任务依赖谁、发生几次、持续多久。自身组件引用放在 Awake，事件订阅与取消成对放在 OnEnable 和 OnDisable，跨对象启动则使用明确流程而不是猜测 Awake 顺序。</a:t>
             </a:r>
+            <a:endParaRPr lang="zh-CN" dirty="0"/>
           </a:p>
         </p:txBody>
       </p:sp>
@@ -885,6 +915,7 @@
               <a:rPr lang="zh-CN" dirty="0"/>
               <a:t>Update 处理输入和普通逻辑，FixedUpdate 面向 Rigidbody 的物理时间步，LateUpdate 适合摄像机等收尾行为。连续变化需要使用 Time.deltaTime，一次性触发的创建或切换则不需要。</a:t>
             </a:r>
+            <a:endParaRPr lang="zh-CN" dirty="0"/>
           </a:p>
         </p:txBody>
       </p:sp>
@@ -944,6 +975,7 @@
               <a:rPr lang="zh-CN" dirty="0"/>
               <a:t>Transform 同时保存世界与局部空间数据，也保存父子层级。移动和旋转时要分清 Space.Self 与 Space.World，坐标点和方向向量也必须使用各自对应的转换函数。</a:t>
             </a:r>
+            <a:endParaRPr lang="zh-CN" dirty="0"/>
           </a:p>
         </p:txBody>
       </p:sp>
@@ -1003,6 +1035,7 @@
               <a:rPr lang="zh-CN" dirty="0"/>
               <a:t>gameObject 用于访问对象身份和激活状态，GetComponent 系列用于获取对象能力。稳定引用应优先通过 Inspector、创建时传入或初始化缓存建立，避免在每帧中反复按名称查找。</a:t>
             </a:r>
+            <a:endParaRPr lang="zh-CN" dirty="0"/>
           </a:p>
         </p:txBody>
       </p:sp>
@@ -1062,6 +1095,7 @@
               <a:rPr lang="zh-CN" dirty="0"/>
               <a:t>对象的完整寿命包含引用、创建、交互和销毁四段。Instantiate 与 AddComponent 都可以动态增加内容，但固定配置更适合提前放进 Prefab；销毁前后还要注意引用失效和清理逻辑。</a:t>
             </a:r>
+            <a:endParaRPr lang="zh-CN" dirty="0"/>
           </a:p>
         </p:txBody>
       </p:sp>
@@ -1073,8 +1107,8 @@
 </p:notes>
 </file>
 
-<file path=ppt/slideLayouts/slideLayout12.xml><?xml version="1.0" encoding="utf-8"?>
-<p:sldLayout xmlns:a="http://schemas.openxmlformats.org/drawingml/2006/main" xmlns:p="http://schemas.openxmlformats.org/presentationml/2006/main" xmlns:p14="http://schemas.microsoft.com/office/powerpoint/2010/main" type="cust" preserve="1" showMasterSp="1">
+<file path=ppt/slideLayouts/slideLayout1.xml><?xml version="1.0" encoding="utf-8"?>
+<p:sldLayout xmlns:a="http://schemas.openxmlformats.org/drawingml/2006/main" xmlns:r="http://schemas.openxmlformats.org/officeDocument/2006/relationships" xmlns:p="http://schemas.openxmlformats.org/presentationml/2006/main" preserve="1">
   <p:cSld name="Cover">
     <p:bg>
       <p:bgPr>
@@ -1099,11 +1133,6 @@
         </a:xfrm>
       </p:grpSpPr>
     </p:spTree>
-    <p:extLst>
-      <p:ext uri="{BB962C8B-B14F-4D97-AF65-F5344CB8AC3E}">
-        <p14:creationId val="1212999818"/>
-      </p:ext>
-    </p:extLst>
   </p:cSld>
   <p:clrMapOvr>
     <a:masterClrMapping/>
@@ -1111,8 +1140,8 @@
 </p:sldLayout>
 </file>
 
-<file path=ppt/slideLayouts/slideLayout13.xml><?xml version="1.0" encoding="utf-8"?>
-<p:sldLayout xmlns:a="http://schemas.openxmlformats.org/drawingml/2006/main" xmlns:p="http://schemas.openxmlformats.org/presentationml/2006/main" xmlns:p14="http://schemas.microsoft.com/office/powerpoint/2010/main" type="cust" preserve="1" showMasterSp="1">
+<file path=ppt/slideLayouts/slideLayout2.xml><?xml version="1.0" encoding="utf-8"?>
+<p:sldLayout xmlns:a="http://schemas.openxmlformats.org/drawingml/2006/main" xmlns:r="http://schemas.openxmlformats.org/officeDocument/2006/relationships" xmlns:p="http://schemas.openxmlformats.org/presentationml/2006/main" preserve="1">
   <p:cSld name="Agenda">
     <p:spTree>
       <p:nvGrpSpPr>
@@ -1129,11 +1158,6 @@
         </a:xfrm>
       </p:grpSpPr>
     </p:spTree>
-    <p:extLst>
-      <p:ext uri="{BB962C8B-B14F-4D97-AF65-F5344CB8AC3E}">
-        <p14:creationId val="1212999818"/>
-      </p:ext>
-    </p:extLst>
   </p:cSld>
   <p:clrMapOvr>
     <a:masterClrMapping/>
@@ -1141,8 +1165,8 @@
 </p:sldLayout>
 </file>
 
-<file path=ppt/slideLayouts/slideLayout14.xml><?xml version="1.0" encoding="utf-8"?>
-<p:sldLayout xmlns:a="http://schemas.openxmlformats.org/drawingml/2006/main" xmlns:p="http://schemas.openxmlformats.org/presentationml/2006/main" xmlns:p14="http://schemas.microsoft.com/office/powerpoint/2010/main" type="cust" preserve="1" showMasterSp="1">
+<file path=ppt/slideLayouts/slideLayout3.xml><?xml version="1.0" encoding="utf-8"?>
+<p:sldLayout xmlns:a="http://schemas.openxmlformats.org/drawingml/2006/main" xmlns:r="http://schemas.openxmlformats.org/officeDocument/2006/relationships" xmlns:p="http://schemas.openxmlformats.org/presentationml/2006/main" preserve="1">
   <p:cSld name="Content">
     <p:spTree>
       <p:nvGrpSpPr>
@@ -1159,11 +1183,6 @@
         </a:xfrm>
       </p:grpSpPr>
     </p:spTree>
-    <p:extLst>
-      <p:ext uri="{BB962C8B-B14F-4D97-AF65-F5344CB8AC3E}">
-        <p14:creationId val="1212999818"/>
-      </p:ext>
-    </p:extLst>
   </p:cSld>
   <p:clrMapOvr>
     <a:masterClrMapping/>
@@ -1171,8 +1190,8 @@
 </p:sldLayout>
 </file>
 
-<file path=ppt/slideLayouts/slideLayout15.xml><?xml version="1.0" encoding="utf-8"?>
-<p:sldLayout xmlns:a="http://schemas.openxmlformats.org/drawingml/2006/main" xmlns:p="http://schemas.openxmlformats.org/presentationml/2006/main" xmlns:p14="http://schemas.microsoft.com/office/powerpoint/2010/main" type="cust" preserve="1" showMasterSp="1">
+<file path=ppt/slideLayouts/slideLayout4.xml><?xml version="1.0" encoding="utf-8"?>
+<p:sldLayout xmlns:a="http://schemas.openxmlformats.org/drawingml/2006/main" xmlns:r="http://schemas.openxmlformats.org/officeDocument/2006/relationships" xmlns:p="http://schemas.openxmlformats.org/presentationml/2006/main" preserve="1">
   <p:cSld name="Closing">
     <p:spTree>
       <p:nvGrpSpPr>
@@ -1189,11 +1208,6 @@
         </a:xfrm>
       </p:grpSpPr>
     </p:spTree>
-    <p:extLst>
-      <p:ext uri="{BB962C8B-B14F-4D97-AF65-F5344CB8AC3E}">
-        <p14:creationId val="1212999818"/>
-      </p:ext>
-    </p:extLst>
   </p:cSld>
   <p:clrMapOvr>
     <a:masterClrMapping/>
@@ -1289,6 +1303,7 @@
               <a:rPr lang="en-US" smtClean="0"/>
               <a:t>Click to edit Master text styles</a:t>
             </a:r>
+            <a:endParaRPr lang="en-US" smtClean="0"/>
           </a:p>
           <a:p>
             <a:pPr lvl="1"/>
@@ -1296,6 +1311,7 @@
               <a:rPr lang="en-US" smtClean="0"/>
               <a:t>Second level</a:t>
             </a:r>
+            <a:endParaRPr lang="en-US" smtClean="0"/>
           </a:p>
           <a:p>
             <a:pPr lvl="2"/>
@@ -1303,6 +1319,7 @@
               <a:rPr lang="en-US" smtClean="0"/>
               <a:t>Third level</a:t>
             </a:r>
+            <a:endParaRPr lang="en-US" smtClean="0"/>
           </a:p>
           <a:p>
             <a:pPr lvl="3"/>
@@ -1310,6 +1327,7 @@
               <a:rPr lang="en-US" smtClean="0"/>
               <a:t>Fourth level</a:t>
             </a:r>
+            <a:endParaRPr lang="en-US" smtClean="0"/>
           </a:p>
           <a:p>
             <a:pPr lvl="4"/>
@@ -1356,7 +1374,6 @@
           <a:p>
             <a:fld id="{5BCAD085-E8A6-8845-BD4E-CB4CCA059FC4}" type="datetimeFigureOut">
               <a:rPr lang="en-US" smtClean="0"/>
-              <a:t>1/27/13</a:t>
             </a:fld>
             <a:endParaRPr lang="en-US"/>
           </a:p>
@@ -1434,25 +1451,19 @@
           <a:p>
             <a:fld id="{C1FF6DA9-008F-8B48-92A6-B652298478BF}" type="slidenum">
               <a:rPr lang="en-US" smtClean="0"/>
-              <a:t>‹#›</a:t>
             </a:fld>
             <a:endParaRPr lang="en-US"/>
           </a:p>
         </p:txBody>
       </p:sp>
     </p:spTree>
-    <p:extLst>
-      <p:ext uri="{BB962C8B-B14F-4D97-AF65-F5344CB8AC3E}">
-        <p14:creationId xmlns:p14="http://schemas.microsoft.com/office/powerpoint/2010/main" val="2209977519"/>
-      </p:ext>
-    </p:extLst>
   </p:cSld>
   <p:clrMap bg1="lt1" tx1="dk1" bg2="lt2" tx2="dk2" accent1="accent1" accent2="accent2" accent3="accent3" accent4="accent4" accent5="accent5" accent6="accent6" hlink="hlink" folHlink="folHlink"/>
   <p:sldLayoutIdLst>
-    <p:sldLayoutId id="2147483660" r:id="rId13"/>
-    <p:sldLayoutId id="2147483661" r:id="rId14"/>
-    <p:sldLayoutId id="2147483662" r:id="rId15"/>
-    <p:sldLayoutId id="2147483663" r:id="rId16"/>
+    <p:sldLayoutId id="2147483649" r:id="rId1"/>
+    <p:sldLayoutId id="2147483650" r:id="rId2"/>
+    <p:sldLayoutId id="2147483651" r:id="rId3"/>
+    <p:sldLayoutId id="2147483652" r:id="rId4"/>
   </p:sldLayoutIdLst>
   <p:txStyles>
     <p:titleStyle>
@@ -1476,7 +1487,7 @@
         <a:spcBef>
           <a:spcPct val="20000"/>
         </a:spcBef>
-        <a:buFont typeface="Arial"/>
+        <a:buFont typeface="Arial" panose="020B0604020202020204"/>
         <a:buChar char="•"/>
         <a:defRPr sz="3200" kern="1200">
           <a:solidFill>
@@ -1491,7 +1502,7 @@
         <a:spcBef>
           <a:spcPct val="20000"/>
         </a:spcBef>
-        <a:buFont typeface="Arial"/>
+        <a:buFont typeface="Arial" panose="020B0604020202020204"/>
         <a:buChar char="–"/>
         <a:defRPr sz="2800" kern="1200">
           <a:solidFill>
@@ -1506,7 +1517,7 @@
         <a:spcBef>
           <a:spcPct val="20000"/>
         </a:spcBef>
-        <a:buFont typeface="Arial"/>
+        <a:buFont typeface="Arial" panose="020B0604020202020204"/>
         <a:buChar char="•"/>
         <a:defRPr sz="2400" kern="1200">
           <a:solidFill>
@@ -1521,7 +1532,7 @@
         <a:spcBef>
           <a:spcPct val="20000"/>
         </a:spcBef>
-        <a:buFont typeface="Arial"/>
+        <a:buFont typeface="Arial" panose="020B0604020202020204"/>
         <a:buChar char="–"/>
         <a:defRPr sz="2000" kern="1200">
           <a:solidFill>
@@ -1536,7 +1547,7 @@
         <a:spcBef>
           <a:spcPct val="20000"/>
         </a:spcBef>
-        <a:buFont typeface="Arial"/>
+        <a:buFont typeface="Arial" panose="020B0604020202020204"/>
         <a:buChar char="»"/>
         <a:defRPr sz="2000" kern="1200">
           <a:solidFill>
@@ -1551,7 +1562,7 @@
         <a:spcBef>
           <a:spcPct val="20000"/>
         </a:spcBef>
-        <a:buFont typeface="Arial"/>
+        <a:buFont typeface="Arial" panose="020B0604020202020204"/>
         <a:buChar char="•"/>
         <a:defRPr sz="2000" kern="1200">
           <a:solidFill>
@@ -1566,7 +1577,7 @@
         <a:spcBef>
           <a:spcPct val="20000"/>
         </a:spcBef>
-        <a:buFont typeface="Arial"/>
+        <a:buFont typeface="Arial" panose="020B0604020202020204"/>
         <a:buChar char="•"/>
         <a:defRPr sz="2000" kern="1200">
           <a:solidFill>
@@ -1581,7 +1592,7 @@
         <a:spcBef>
           <a:spcPct val="20000"/>
         </a:spcBef>
-        <a:buFont typeface="Arial"/>
+        <a:buFont typeface="Arial" panose="020B0604020202020204"/>
         <a:buChar char="•"/>
         <a:defRPr sz="2000" kern="1200">
           <a:solidFill>
@@ -1596,7 +1607,7 @@
         <a:spcBef>
           <a:spcPct val="20000"/>
         </a:spcBef>
-        <a:buFont typeface="Arial"/>
+        <a:buFont typeface="Arial" panose="020B0604020202020204"/>
         <a:buChar char="•"/>
         <a:defRPr sz="2000" kern="1200">
           <a:solidFill>
@@ -1849,6 +1860,14 @@
               </a:rPr>
               <a:t>Unity 语法基础</a:t>
             </a:r>
+            <a:endParaRPr lang="zh-CN" sz="6900" b="1" dirty="0">
+              <a:solidFill>
+                <a:schemeClr val="dk1"/>
+              </a:solidFill>
+              <a:latin typeface="+mj-lt"/>
+              <a:ea typeface="+mj-ea"/>
+              <a:cs typeface="+mj-cs"/>
+            </a:endParaRPr>
           </a:p>
         </p:txBody>
       </p:sp>
@@ -1889,6 +1908,14 @@
               </a:rPr>
               <a:t>MonoBehaviour、生命周期与常用对象</a:t>
             </a:r>
+            <a:endParaRPr lang="zh-CN" sz="3150" b="1" dirty="0">
+              <a:solidFill>
+                <a:schemeClr val="accent1"/>
+              </a:solidFill>
+              <a:latin typeface="+mj-lt"/>
+              <a:ea typeface="+mj-ea"/>
+              <a:cs typeface="+mj-cs"/>
+            </a:endParaRPr>
           </a:p>
         </p:txBody>
       </p:sp>
@@ -1929,6 +1956,14 @@
               </a:rPr>
               <a:t>让脚本在正确的对象上，于正确的时机做正确的事</a:t>
             </a:r>
+            <a:endParaRPr lang="zh-CN" sz="2400" dirty="0">
+              <a:solidFill>
+                <a:schemeClr val="dk2"/>
+              </a:solidFill>
+              <a:latin typeface="+mn-lt"/>
+              <a:ea typeface="+mn-ea"/>
+              <a:cs typeface="+mn-cs"/>
+            </a:endParaRPr>
           </a:p>
         </p:txBody>
       </p:sp>
@@ -1940,7 +1975,7 @@
         </p:nvGrpSpPr>
         <p:grpSpPr>
           <a:xfrm>
-            <a:off x="7334250" y="723900"/>
+            <a:off x="7825105" y="771525"/>
             <a:ext cx="4038600" cy="4533900"/>
             <a:chOff x="7334250" y="723900"/>
             <a:chExt cx="4038600" cy="4533900"/>
@@ -2003,12 +2038,20 @@
                   <a:solidFill>
                     <a:schemeClr val="accent5"/>
                   </a:solidFill>
-                  <a:latin typeface="Consolas"/>
-                  <a:ea typeface="Consolas"/>
-                  <a:cs typeface="Consolas"/>
+                  <a:latin typeface="Consolas" panose="020B0609020204030204"/>
+                  <a:ea typeface="Consolas" panose="020B0609020204030204"/>
+                  <a:cs typeface="Consolas" panose="020B0609020204030204"/>
                 </a:rPr>
                 <a:t>SCRIPT → COMPONENT</a:t>
               </a:r>
+              <a:endParaRPr lang="en-US" sz="1800" dirty="0">
+                <a:solidFill>
+                  <a:schemeClr val="accent5"/>
+                </a:solidFill>
+                <a:latin typeface="Consolas" panose="020B0609020204030204"/>
+                <a:ea typeface="Consolas" panose="020B0609020204030204"/>
+                <a:cs typeface="Consolas" panose="020B0609020204030204"/>
+              </a:endParaRPr>
             </a:p>
           </p:txBody>
         </p:sp>
@@ -2293,6 +2336,14 @@
                   </a:rPr>
                   <a:t>Player</a:t>
                 </a:r>
+                <a:endParaRPr lang="en-US" sz="2400" b="1" dirty="0">
+                  <a:solidFill>
+                    <a:schemeClr val="dk1"/>
+                  </a:solidFill>
+                  <a:latin typeface="+mn-lt"/>
+                  <a:ea typeface="+mn-ea"/>
+                  <a:cs typeface="+mn-cs"/>
+                </a:endParaRPr>
               </a:p>
             </p:txBody>
           </p:sp>
@@ -2327,12 +2378,20 @@
                     <a:solidFill>
                       <a:schemeClr val="accent5"/>
                     </a:solidFill>
-                    <a:latin typeface="Consolas"/>
-                    <a:ea typeface="Consolas"/>
-                    <a:cs typeface="Consolas"/>
+                    <a:latin typeface="Consolas" panose="020B0609020204030204"/>
+                    <a:ea typeface="Consolas" panose="020B0609020204030204"/>
+                    <a:cs typeface="Consolas" panose="020B0609020204030204"/>
                   </a:rPr>
                   <a:t>GameObject</a:t>
                 </a:r>
+                <a:endParaRPr lang="en-US" sz="1350" dirty="0">
+                  <a:solidFill>
+                    <a:schemeClr val="accent5"/>
+                  </a:solidFill>
+                  <a:latin typeface="Consolas" panose="020B0609020204030204"/>
+                  <a:ea typeface="Consolas" panose="020B0609020204030204"/>
+                  <a:cs typeface="Consolas" panose="020B0609020204030204"/>
+                </a:endParaRPr>
               </a:p>
             </p:txBody>
           </p:sp>
@@ -2677,6 +2736,14 @@
                   </a:rPr>
                   <a:t>Transform</a:t>
                 </a:r>
+                <a:endParaRPr lang="en-US" sz="1800" b="1" dirty="0">
+                  <a:solidFill>
+                    <a:schemeClr val="accent1"/>
+                  </a:solidFill>
+                  <a:latin typeface="+mn-lt"/>
+                  <a:ea typeface="+mn-ea"/>
+                  <a:cs typeface="+mn-cs"/>
+                </a:endParaRPr>
               </a:p>
             </p:txBody>
           </p:sp>
@@ -2938,6 +3005,14 @@
                   </a:rPr>
                   <a:t>CharacterController</a:t>
                 </a:r>
+                <a:endParaRPr lang="en-US" sz="1800" b="1" dirty="0">
+                  <a:solidFill>
+                    <a:srgbClr val="2F8F6A"/>
+                  </a:solidFill>
+                  <a:latin typeface="+mn-lt"/>
+                  <a:ea typeface="+mn-ea"/>
+                  <a:cs typeface="+mn-cs"/>
+                </a:endParaRPr>
               </a:p>
             </p:txBody>
           </p:sp>
@@ -3133,6 +3208,14 @@
                   </a:rPr>
                   <a:t>SimpleMover.cs</a:t>
                 </a:r>
+                <a:endParaRPr lang="en-US" sz="1800" b="1" dirty="0">
+                  <a:solidFill>
+                    <a:srgbClr val="8C5A00"/>
+                  </a:solidFill>
+                  <a:latin typeface="+mn-lt"/>
+                  <a:ea typeface="+mn-ea"/>
+                  <a:cs typeface="+mn-cs"/>
+                </a:endParaRPr>
               </a:p>
             </p:txBody>
           </p:sp>
@@ -3515,69 +3598,46 @@
                   <a:solidFill>
                     <a:schemeClr val="dk1"/>
                   </a:solidFill>
-                  <a:latin typeface="Consolas"/>
-                  <a:ea typeface="Consolas"/>
-                  <a:cs typeface="Consolas"/>
+                  <a:latin typeface="Consolas" panose="020B0609020204030204"/>
+                  <a:ea typeface="Consolas" panose="020B0609020204030204"/>
+                  <a:cs typeface="Consolas" panose="020B0609020204030204"/>
                 </a:rPr>
                 <a:t>Object + Callback + Time.deltaTime</a:t>
               </a:r>
+              <a:endParaRPr lang="en-US" sz="1800" b="1" dirty="0">
+                <a:solidFill>
+                  <a:schemeClr val="dk1"/>
+                </a:solidFill>
+                <a:latin typeface="Consolas" panose="020B0609020204030204"/>
+                <a:ea typeface="Consolas" panose="020B0609020204030204"/>
+                <a:cs typeface="Consolas" panose="020B0609020204030204"/>
+              </a:endParaRPr>
             </a:p>
           </p:txBody>
         </p:sp>
       </p:grpSp>
-      <p:sp>
-        <p:nvSpPr>
-          <p:cNvPr id="52" name="TextBox 52"/>
-          <p:cNvSpPr txBox="1"/>
-          <p:nvPr/>
-        </p:nvSpPr>
-        <p:spPr>
-          <a:xfrm>
-            <a:off x="697992" y="6274118"/>
-            <a:ext cx="2338715" cy="264033"/>
-          </a:xfrm>
-          <a:prstGeom prst="rect">
-            <a:avLst/>
-          </a:prstGeom>
-          <a:noFill/>
-          <a:ln>
-            <a:noFill/>
-          </a:ln>
-        </p:spPr>
-        <p:txBody>
-          <a:bodyPr wrap="none" lIns="0" tIns="0" rIns="0" bIns="0" anchor="t" anchorCtr="0">
-            <a:spAutoFit/>
-          </a:bodyPr>
-          <a:lstStyle/>
-          <a:p>
-            <a:pPr algn="l"/>
-            <a:r>
-              <a:rPr lang="zh-CN" sz="1350" dirty="0">
-                <a:solidFill>
-                  <a:schemeClr val="accent5"/>
-                </a:solidFill>
-                <a:latin typeface="+mn-lt"/>
-                <a:ea typeface="+mn-ea"/>
-                <a:cs typeface="+mn-cs"/>
-              </a:rPr>
-              <a:t>Unity 基础课程 · 第 02 单元</a:t>
-            </a:r>
-          </a:p>
-        </p:txBody>
-      </p:sp>
     </p:spTree>
   </p:cSld>
   <p:clrMapOvr>
     <a:masterClrMapping/>
   </p:clrMapOvr>
-  <p:transition xmlns:p14="http://schemas.microsoft.com/office/powerpoint/2010/main" p14:dur="400">
-    <p:fade/>
-  </p:transition>
+  <mc:AlternateContent xmlns:mc="http://schemas.openxmlformats.org/markup-compatibility/2006">
+    <mc:Choice xmlns:p14="http://schemas.microsoft.com/office/powerpoint/2010/main" Requires="p14">
+      <p:transition p14:dur="400">
+        <p:fade/>
+      </p:transition>
+    </mc:Choice>
+    <mc:Fallback>
+      <p:transition>
+        <p:fade/>
+      </p:transition>
+    </mc:Fallback>
+  </mc:AlternateContent>
 </p:sld>
 </file>
 
 <file path=ppt/slides/slide10.xml><?xml version="1.0" encoding="utf-8"?>
-<p:sld xmlns:a="http://schemas.openxmlformats.org/drawingml/2006/main" xmlns:p="http://schemas.openxmlformats.org/presentationml/2006/main" xmlns:p14="http://schemas.microsoft.com/office/powerpoint/2010/main">
+<p:sld xmlns:a="http://schemas.openxmlformats.org/drawingml/2006/main" xmlns:r="http://schemas.openxmlformats.org/officeDocument/2006/relationships" xmlns:p="http://schemas.openxmlformats.org/presentationml/2006/main">
   <p:cSld>
     <p:spTree>
       <p:nvGrpSpPr>
@@ -3644,6 +3704,14 @@
                 </a:rPr>
                 <a:t>Move 处理碰撞，但不会替你处理重力</a:t>
               </a:r>
+              <a:endParaRPr lang="zh-CN" sz="4200" b="1" dirty="0">
+                <a:solidFill>
+                  <a:schemeClr val="dk1"/>
+                </a:solidFill>
+                <a:latin typeface="+mj-lt"/>
+                <a:ea typeface="+mj-ea"/>
+                <a:cs typeface="+mj-cs"/>
+              </a:endParaRPr>
             </a:p>
           </p:txBody>
         </p:sp>
@@ -3684,10 +3752,48 @@
                 </a:rPr>
                 <a:t>CharacterController 是脚本直接控制的胶囊角色，不是普通动力学刚体</a:t>
               </a:r>
+              <a:endParaRPr lang="zh-CN" sz="1800" dirty="0">
+                <a:solidFill>
+                  <a:schemeClr val="dk2"/>
+                </a:solidFill>
+                <a:latin typeface="+mn-lt"/>
+                <a:ea typeface="+mn-ea"/>
+                <a:cs typeface="+mn-cs"/>
+              </a:endParaRPr>
             </a:p>
           </p:txBody>
         </p:sp>
       </p:grpSp>
+      <p:sp>
+        <p:nvSpPr>
+          <p:cNvPr id="55" name="Rectangle 44"/>
+          <p:cNvSpPr/>
+          <p:nvPr/>
+        </p:nvSpPr>
+        <p:spPr>
+          <a:xfrm>
+            <a:off x="4027170" y="5481320"/>
+            <a:ext cx="7543800" cy="781050"/>
+          </a:xfrm>
+          <a:prstGeom prst="roundRect">
+            <a:avLst>
+              <a:gd name="adj" fmla="val 18033"/>
+            </a:avLst>
+          </a:prstGeom>
+          <a:solidFill>
+            <a:schemeClr val="dk1"/>
+          </a:solidFill>
+          <a:ln>
+            <a:noFill/>
+          </a:ln>
+        </p:spPr>
+        <p:txBody>
+          <a:bodyPr/>
+          <a:p>
+            <a:endParaRPr lang="zh-CN" altLang="en-US"/>
+          </a:p>
+        </p:txBody>
+      </p:sp>
       <p:grpSp>
         <p:nvGrpSpPr>
           <p:cNvPr id="17" name="Group 17"/>
@@ -3765,6 +3871,14 @@
                 </a:rPr>
                 <a:t>脚本驱动的胶囊</a:t>
               </a:r>
+              <a:endParaRPr lang="zh-CN" sz="2550" b="1" dirty="0">
+                <a:solidFill>
+                  <a:schemeClr val="accent1"/>
+                </a:solidFill>
+                <a:latin typeface="+mj-lt"/>
+                <a:ea typeface="+mj-ea"/>
+                <a:cs typeface="+mj-cs"/>
+              </a:endParaRPr>
             </a:p>
           </p:txBody>
         </p:sp>
@@ -4074,12 +4188,20 @@
                   <a:solidFill>
                     <a:srgbClr val="2F8F6A"/>
                   </a:solidFill>
-                  <a:latin typeface="Consolas"/>
-                  <a:ea typeface="Consolas"/>
-                  <a:cs typeface="Consolas"/>
+                  <a:latin typeface="Consolas" panose="020B0609020204030204"/>
+                  <a:ea typeface="Consolas" panose="020B0609020204030204"/>
+                  <a:cs typeface="Consolas" panose="020B0609020204030204"/>
                 </a:rPr>
                 <a:t>controller.Move(displacement)</a:t>
               </a:r>
+              <a:endParaRPr lang="en-US" sz="1720" b="1" dirty="0">
+                <a:solidFill>
+                  <a:srgbClr val="2F8F6A"/>
+                </a:solidFill>
+                <a:latin typeface="Consolas" panose="020B0609020204030204"/>
+                <a:ea typeface="Consolas" panose="020B0609020204030204"/>
+                <a:cs typeface="Consolas" panose="020B0609020204030204"/>
+              </a:endParaRPr>
             </a:p>
           </p:txBody>
         </p:sp>
@@ -4120,6 +4242,14 @@
                 </a:rPr>
                 <a:t>Collider 会阻挡；重力要自己维护</a:t>
               </a:r>
+              <a:endParaRPr lang="zh-CN" sz="1500" dirty="0">
+                <a:solidFill>
+                  <a:schemeClr val="dk2"/>
+                </a:solidFill>
+                <a:latin typeface="+mn-lt"/>
+                <a:ea typeface="+mn-ea"/>
+                <a:cs typeface="+mn-cs"/>
+              </a:endParaRPr>
             </a:p>
           </p:txBody>
         </p:sp>
@@ -4133,9 +4263,9 @@
         <p:grpSpPr>
           <a:xfrm>
             <a:off x="4000500" y="1485900"/>
-            <a:ext cx="9971913" cy="3867150"/>
+            <a:ext cx="7823835" cy="4767168"/>
             <a:chOff x="4000500" y="1485900"/>
-            <a:chExt cx="9971913" cy="3867150"/>
+            <a:chExt cx="7823835" cy="4767168"/>
           </a:xfrm>
         </p:grpSpPr>
         <p:grpSp>
@@ -4209,12 +4339,20 @@
                     <a:solidFill>
                       <a:schemeClr val="accent1"/>
                     </a:solidFill>
-                    <a:latin typeface="Consolas"/>
-                    <a:ea typeface="Consolas"/>
-                    <a:cs typeface="Consolas"/>
+                    <a:latin typeface="Consolas" panose="020B0609020204030204"/>
+                    <a:ea typeface="Consolas" panose="020B0609020204030204"/>
+                    <a:cs typeface="Consolas" panose="020B0609020204030204"/>
                   </a:rPr>
                   <a:t>height / radius</a:t>
                 </a:r>
+                <a:endParaRPr lang="en-US" sz="1720" b="1" dirty="0">
+                  <a:solidFill>
+                    <a:schemeClr val="accent1"/>
+                  </a:solidFill>
+                  <a:latin typeface="Consolas" panose="020B0609020204030204"/>
+                  <a:ea typeface="Consolas" panose="020B0609020204030204"/>
+                  <a:cs typeface="Consolas" panose="020B0609020204030204"/>
+                </a:endParaRPr>
               </a:p>
             </p:txBody>
           </p:sp>
@@ -4249,12 +4387,20 @@
                     <a:solidFill>
                       <a:schemeClr val="accent1"/>
                     </a:solidFill>
-                    <a:latin typeface="Consolas"/>
-                    <a:ea typeface="Consolas"/>
-                    <a:cs typeface="Consolas"/>
+                    <a:latin typeface="Consolas" panose="020B0609020204030204"/>
+                    <a:ea typeface="Consolas" panose="020B0609020204030204"/>
+                    <a:cs typeface="Consolas" panose="020B0609020204030204"/>
                   </a:rPr>
                   <a:t>center</a:t>
                 </a:r>
+                <a:endParaRPr lang="en-US" sz="1720" dirty="0">
+                  <a:solidFill>
+                    <a:schemeClr val="accent1"/>
+                  </a:solidFill>
+                  <a:latin typeface="Consolas" panose="020B0609020204030204"/>
+                  <a:ea typeface="Consolas" panose="020B0609020204030204"/>
+                  <a:cs typeface="Consolas" panose="020B0609020204030204"/>
+                </a:endParaRPr>
               </a:p>
             </p:txBody>
           </p:sp>
@@ -4295,6 +4441,14 @@
                   </a:rPr>
                   <a:t>胶囊形状</a:t>
                 </a:r>
+                <a:endParaRPr lang="zh-CN" sz="1500" dirty="0">
+                  <a:solidFill>
+                    <a:schemeClr val="dk2"/>
+                  </a:solidFill>
+                  <a:latin typeface="+mn-lt"/>
+                  <a:ea typeface="+mn-ea"/>
+                  <a:cs typeface="+mn-cs"/>
+                </a:endParaRPr>
               </a:p>
             </p:txBody>
           </p:sp>
@@ -4370,12 +4524,20 @@
                     <a:solidFill>
                       <a:srgbClr val="8C5A00"/>
                     </a:solidFill>
-                    <a:latin typeface="Consolas"/>
-                    <a:ea typeface="Consolas"/>
-                    <a:cs typeface="Consolas"/>
+                    <a:latin typeface="Consolas" panose="020B0609020204030204"/>
+                    <a:ea typeface="Consolas" panose="020B0609020204030204"/>
+                    <a:cs typeface="Consolas" panose="020B0609020204030204"/>
                   </a:rPr>
                   <a:t>slopeLimit</a:t>
                 </a:r>
+                <a:endParaRPr lang="en-US" sz="1800" b="1" dirty="0">
+                  <a:solidFill>
+                    <a:srgbClr val="8C5A00"/>
+                  </a:solidFill>
+                  <a:latin typeface="Consolas" panose="020B0609020204030204"/>
+                  <a:ea typeface="Consolas" panose="020B0609020204030204"/>
+                  <a:cs typeface="Consolas" panose="020B0609020204030204"/>
+                </a:endParaRPr>
               </a:p>
             </p:txBody>
           </p:sp>
@@ -4416,6 +4578,14 @@
                   </a:rPr>
                   <a:t>可攀爬最大坡度</a:t>
                 </a:r>
+                <a:endParaRPr lang="zh-CN" sz="1650" dirty="0">
+                  <a:solidFill>
+                    <a:schemeClr val="dk1"/>
+                  </a:solidFill>
+                  <a:latin typeface="+mn-lt"/>
+                  <a:ea typeface="+mn-ea"/>
+                  <a:cs typeface="+mn-cs"/>
+                </a:endParaRPr>
               </a:p>
             </p:txBody>
           </p:sp>
@@ -4491,12 +4661,20 @@
                     <a:solidFill>
                       <a:srgbClr val="2F8F6A"/>
                     </a:solidFill>
-                    <a:latin typeface="Consolas"/>
-                    <a:ea typeface="Consolas"/>
-                    <a:cs typeface="Consolas"/>
+                    <a:latin typeface="Consolas" panose="020B0609020204030204"/>
+                    <a:ea typeface="Consolas" panose="020B0609020204030204"/>
+                    <a:cs typeface="Consolas" panose="020B0609020204030204"/>
                   </a:rPr>
                   <a:t>stepOffset</a:t>
                 </a:r>
+                <a:endParaRPr lang="en-US" sz="1800" b="1" dirty="0">
+                  <a:solidFill>
+                    <a:srgbClr val="2F8F6A"/>
+                  </a:solidFill>
+                  <a:latin typeface="Consolas" panose="020B0609020204030204"/>
+                  <a:ea typeface="Consolas" panose="020B0609020204030204"/>
+                  <a:cs typeface="Consolas" panose="020B0609020204030204"/>
+                </a:endParaRPr>
               </a:p>
             </p:txBody>
           </p:sp>
@@ -4537,6 +4715,14 @@
                   </a:rPr>
                   <a:t>可迈过台阶高度</a:t>
                 </a:r>
+                <a:endParaRPr lang="zh-CN" sz="1650" dirty="0">
+                  <a:solidFill>
+                    <a:schemeClr val="dk1"/>
+                  </a:solidFill>
+                  <a:latin typeface="+mn-lt"/>
+                  <a:ea typeface="+mn-ea"/>
+                  <a:cs typeface="+mn-cs"/>
+                </a:endParaRPr>
               </a:p>
             </p:txBody>
           </p:sp>
@@ -4612,12 +4798,20 @@
                     <a:solidFill>
                       <a:schemeClr val="accent1"/>
                     </a:solidFill>
-                    <a:latin typeface="Consolas"/>
-                    <a:ea typeface="Consolas"/>
-                    <a:cs typeface="Consolas"/>
+                    <a:latin typeface="Consolas" panose="020B0609020204030204"/>
+                    <a:ea typeface="Consolas" panose="020B0609020204030204"/>
+                    <a:cs typeface="Consolas" panose="020B0609020204030204"/>
                   </a:rPr>
                   <a:t>skinWidth</a:t>
                 </a:r>
+                <a:endParaRPr lang="en-US" sz="1800" b="1" dirty="0">
+                  <a:solidFill>
+                    <a:schemeClr val="accent1"/>
+                  </a:solidFill>
+                  <a:latin typeface="Consolas" panose="020B0609020204030204"/>
+                  <a:ea typeface="Consolas" panose="020B0609020204030204"/>
+                  <a:cs typeface="Consolas" panose="020B0609020204030204"/>
+                </a:endParaRPr>
               </a:p>
             </p:txBody>
           </p:sp>
@@ -4658,6 +4852,14 @@
                   </a:rPr>
                   <a:t>碰撞外壳余量</a:t>
                 </a:r>
+                <a:endParaRPr lang="zh-CN" sz="1650" dirty="0">
+                  <a:solidFill>
+                    <a:schemeClr val="dk1"/>
+                  </a:solidFill>
+                  <a:latin typeface="+mn-lt"/>
+                  <a:ea typeface="+mn-ea"/>
+                  <a:cs typeface="+mn-cs"/>
+                </a:endParaRPr>
               </a:p>
             </p:txBody>
           </p:sp>
@@ -4698,6 +4900,14 @@
                   </a:rPr>
                   <a:t>过小容易抖动</a:t>
                 </a:r>
+                <a:endParaRPr lang="zh-CN" sz="1350" dirty="0">
+                  <a:solidFill>
+                    <a:srgbClr val="D85C45"/>
+                  </a:solidFill>
+                  <a:latin typeface="+mn-lt"/>
+                  <a:ea typeface="+mn-ea"/>
+                  <a:cs typeface="+mn-cs"/>
+                </a:endParaRPr>
               </a:p>
             </p:txBody>
           </p:sp>
@@ -4773,12 +4983,20 @@
                     <a:solidFill>
                       <a:schemeClr val="accent1"/>
                     </a:solidFill>
-                    <a:latin typeface="Consolas"/>
-                    <a:ea typeface="Consolas"/>
-                    <a:cs typeface="Consolas"/>
+                    <a:latin typeface="Consolas" panose="020B0609020204030204"/>
+                    <a:ea typeface="Consolas" panose="020B0609020204030204"/>
+                    <a:cs typeface="Consolas" panose="020B0609020204030204"/>
                   </a:rPr>
                   <a:t>isGrounded</a:t>
                 </a:r>
+                <a:endParaRPr lang="en-US" sz="1800" b="1" dirty="0">
+                  <a:solidFill>
+                    <a:schemeClr val="accent1"/>
+                  </a:solidFill>
+                  <a:latin typeface="Consolas" panose="020B0609020204030204"/>
+                  <a:ea typeface="Consolas" panose="020B0609020204030204"/>
+                  <a:cs typeface="Consolas" panose="020B0609020204030204"/>
+                </a:endParaRPr>
               </a:p>
             </p:txBody>
           </p:sp>
@@ -4819,6 +5037,14 @@
                   </a:rPr>
                   <a:t>上次移动后是否着地</a:t>
                 </a:r>
+                <a:endParaRPr lang="zh-CN" sz="1650" dirty="0">
+                  <a:solidFill>
+                    <a:schemeClr val="dk1"/>
+                  </a:solidFill>
+                  <a:latin typeface="+mn-lt"/>
+                  <a:ea typeface="+mn-ea"/>
+                  <a:cs typeface="+mn-cs"/>
+                </a:endParaRPr>
               </a:p>
             </p:txBody>
           </p:sp>
@@ -4894,12 +5120,20 @@
                     <a:solidFill>
                       <a:schemeClr val="accent1"/>
                     </a:solidFill>
-                    <a:latin typeface="Consolas"/>
-                    <a:ea typeface="Consolas"/>
-                    <a:cs typeface="Consolas"/>
+                    <a:latin typeface="Consolas" panose="020B0609020204030204"/>
+                    <a:ea typeface="Consolas" panose="020B0609020204030204"/>
+                    <a:cs typeface="Consolas" panose="020B0609020204030204"/>
                   </a:rPr>
                   <a:t>velocity</a:t>
                 </a:r>
+                <a:endParaRPr lang="en-US" sz="1800" b="1" dirty="0">
+                  <a:solidFill>
+                    <a:schemeClr val="accent1"/>
+                  </a:solidFill>
+                  <a:latin typeface="Consolas" panose="020B0609020204030204"/>
+                  <a:ea typeface="Consolas" panose="020B0609020204030204"/>
+                  <a:cs typeface="Consolas" panose="020B0609020204030204"/>
+                </a:endParaRPr>
               </a:p>
             </p:txBody>
           </p:sp>
@@ -4940,6 +5174,14 @@
                   </a:rPr>
                   <a:t>最近一次移动形成的速度</a:t>
                 </a:r>
+                <a:endParaRPr lang="zh-CN" sz="1650" dirty="0">
+                  <a:solidFill>
+                    <a:schemeClr val="dk1"/>
+                  </a:solidFill>
+                  <a:latin typeface="+mn-lt"/>
+                  <a:ea typeface="+mn-ea"/>
+                  <a:cs typeface="+mn-cs"/>
+                </a:endParaRPr>
               </a:p>
             </p:txBody>
           </p:sp>
@@ -4953,9 +5195,9 @@
           <p:grpSpPr>
             <a:xfrm>
               <a:off x="4000500" y="4191000"/>
-              <a:ext cx="9971913" cy="1162050"/>
+              <a:ext cx="7543800" cy="2062068"/>
               <a:chOff x="4000500" y="4191000"/>
-              <a:chExt cx="9971913" cy="1162050"/>
+              <a:chExt cx="7543800" cy="2062068"/>
             </a:xfrm>
           </p:grpSpPr>
           <p:sp>
@@ -5013,12 +5255,20 @@
                     <a:solidFill>
                       <a:schemeClr val="accent2"/>
                     </a:solidFill>
-                    <a:latin typeface="Consolas"/>
-                    <a:ea typeface="Consolas"/>
-                    <a:cs typeface="Consolas"/>
+                    <a:latin typeface="Consolas" panose="020B0609020204030204"/>
+                    <a:ea typeface="Consolas" panose="020B0609020204030204"/>
+                    <a:cs typeface="Consolas" panose="020B0609020204030204"/>
                   </a:rPr>
                   <a:t>Move(motion × deltaTime)</a:t>
                 </a:r>
+                <a:endParaRPr lang="en-US" sz="1950" b="1" dirty="0">
+                  <a:solidFill>
+                    <a:schemeClr val="accent2"/>
+                  </a:solidFill>
+                  <a:latin typeface="Consolas" panose="020B0609020204030204"/>
+                  <a:ea typeface="Consolas" panose="020B0609020204030204"/>
+                  <a:cs typeface="Consolas" panose="020B0609020204030204"/>
+                </a:endParaRPr>
               </a:p>
             </p:txBody>
           </p:sp>
@@ -5030,7 +5280,7 @@
             </p:nvSpPr>
             <p:spPr>
               <a:xfrm>
-                <a:off x="4259199" y="4763929"/>
+                <a:off x="4960239" y="4763929"/>
                 <a:ext cx="5733574" cy="308039"/>
               </a:xfrm>
               <a:prstGeom prst="rect">
@@ -5059,46 +5309,14 @@
                   </a:rPr>
                   <a:t>参数是本次位移；可自定义重力与跳跃；返回 CollisionFlags</a:t>
                 </a:r>
-              </a:p>
-            </p:txBody>
-          </p:sp>
-          <p:sp>
-            <p:nvSpPr>
-              <p:cNvPr id="47" name="TextBox 47"/>
-              <p:cNvSpPr txBox="1"/>
-              <p:nvPr/>
-            </p:nvSpPr>
-            <p:spPr>
-              <a:xfrm>
-                <a:off x="7991094" y="4380548"/>
-                <a:ext cx="2904439" cy="381381"/>
-              </a:xfrm>
-              <a:prstGeom prst="rect">
-                <a:avLst/>
-              </a:prstGeom>
-              <a:noFill/>
-              <a:ln>
-                <a:noFill/>
-              </a:ln>
-            </p:spPr>
-            <p:txBody>
-              <a:bodyPr wrap="none" lIns="0" tIns="0" rIns="0" bIns="0" anchor="t" anchorCtr="0">
-                <a:spAutoFit/>
-              </a:bodyPr>
-              <a:lstStyle/>
-              <a:p>
-                <a:pPr algn="l"/>
-                <a:r>
-                  <a:rPr lang="en-US" sz="1950" b="1" dirty="0">
-                    <a:solidFill>
-                      <a:schemeClr val="accent3"/>
-                    </a:solidFill>
-                    <a:latin typeface="Consolas"/>
-                    <a:ea typeface="Consolas"/>
-                    <a:cs typeface="Consolas"/>
-                  </a:rPr>
-                  <a:t>SimpleMove(velocity)</a:t>
-                </a:r>
+                <a:endParaRPr lang="zh-CN" sz="1580" dirty="0">
+                  <a:solidFill>
+                    <a:srgbClr val="FFFFFF"/>
+                  </a:solidFill>
+                  <a:latin typeface="+mn-lt"/>
+                  <a:ea typeface="+mn-ea"/>
+                  <a:cs typeface="+mn-cs"/>
+                </a:endParaRPr>
               </a:p>
             </p:txBody>
           </p:sp>
@@ -5110,7 +5328,7 @@
             </p:nvSpPr>
             <p:spPr>
               <a:xfrm>
-                <a:off x="7992999" y="4763929"/>
+                <a:off x="4861179" y="5945029"/>
                 <a:ext cx="5979414" cy="308039"/>
               </a:xfrm>
               <a:prstGeom prst="rect">
@@ -5139,19 +5357,27 @@
                   </a:rPr>
                   <a:t>参数是速度；自动重力；不再乘 deltaTime；不适合自定义跳跃</a:t>
                 </a:r>
+                <a:endParaRPr lang="zh-CN" sz="1580" dirty="0">
+                  <a:solidFill>
+                    <a:srgbClr val="FFFFFF"/>
+                  </a:solidFill>
+                  <a:latin typeface="+mn-lt"/>
+                  <a:ea typeface="+mn-ea"/>
+                  <a:cs typeface="+mn-cs"/>
+                </a:endParaRPr>
               </a:p>
             </p:txBody>
           </p:sp>
           <p:sp>
             <p:nvSpPr>
-              <p:cNvPr id="49" name="TextBox 49"/>
+              <p:cNvPr id="47" name="TextBox 47"/>
               <p:cNvSpPr txBox="1"/>
               <p:nvPr/>
             </p:nvSpPr>
             <p:spPr>
               <a:xfrm>
-                <a:off x="6052853" y="5073968"/>
-                <a:ext cx="3439094" cy="264033"/>
+                <a:off x="4182364" y="5563553"/>
+                <a:ext cx="2904439" cy="381381"/>
               </a:xfrm>
               <a:prstGeom prst="rect">
                 <a:avLst/>
@@ -5167,18 +5393,26 @@
               </a:bodyPr>
               <a:lstStyle/>
               <a:p>
-                <a:pPr algn="ctr"/>
+                <a:pPr algn="l"/>
                 <a:r>
-                  <a:rPr lang="zh-CN" sz="1350" b="1" dirty="0">
+                  <a:rPr lang="en-US" sz="1950" b="1" dirty="0">
                     <a:solidFill>
-                      <a:srgbClr val="D8D2C5"/>
+                      <a:schemeClr val="accent3"/>
                     </a:solidFill>
-                    <a:latin typeface="+mn-lt"/>
-                    <a:ea typeface="+mn-ea"/>
-                    <a:cs typeface="+mn-cs"/>
+                    <a:latin typeface="Consolas" panose="020B0609020204030204"/>
+                    <a:ea typeface="Consolas" panose="020B0609020204030204"/>
+                    <a:cs typeface="Consolas" panose="020B0609020204030204"/>
                   </a:rPr>
-                  <a:t>初学跳跃：优先 Move，完整过程更清楚</a:t>
+                  <a:t>SimpleMove(velocity)</a:t>
                 </a:r>
+                <a:endParaRPr lang="en-US" sz="1950" b="1" dirty="0">
+                  <a:solidFill>
+                    <a:schemeClr val="accent3"/>
+                  </a:solidFill>
+                  <a:latin typeface="Consolas" panose="020B0609020204030204"/>
+                  <a:ea typeface="Consolas" panose="020B0609020204030204"/>
+                  <a:cs typeface="Consolas" panose="020B0609020204030204"/>
+                </a:endParaRPr>
               </a:p>
             </p:txBody>
           </p:sp>
@@ -5219,44 +5453,10 @@
             </a:solidFill>
           </a:ln>
         </p:spPr>
-      </p:sp>
-      <p:sp>
-        <p:nvSpPr>
-          <p:cNvPr id="53" name="TextBox 53"/>
-          <p:cNvSpPr txBox="1"/>
-          <p:nvPr/>
-        </p:nvSpPr>
-        <p:spPr>
-          <a:xfrm>
-            <a:off x="564642" y="6521768"/>
-            <a:ext cx="3289825" cy="264033"/>
-          </a:xfrm>
-          <a:prstGeom prst="rect">
-            <a:avLst/>
-          </a:prstGeom>
-          <a:noFill/>
-          <a:ln>
-            <a:noFill/>
-          </a:ln>
-        </p:spPr>
         <p:txBody>
-          <a:bodyPr wrap="none" lIns="0" tIns="0" rIns="0" bIns="0" anchor="t" anchorCtr="0">
-            <a:spAutoFit/>
-          </a:bodyPr>
-          <a:lstStyle/>
+          <a:bodyPr/>
           <a:p>
-            <a:pPr algn="l"/>
-            <a:r>
-              <a:rPr lang="zh-CN" sz="1350" dirty="0">
-                <a:solidFill>
-                  <a:schemeClr val="accent5"/>
-                </a:solidFill>
-                <a:latin typeface="+mn-lt"/>
-                <a:ea typeface="+mn-ea"/>
-                <a:cs typeface="+mn-cs"/>
-              </a:rPr>
-              <a:t>Unity 语法基础 · CharacterController</a:t>
-            </a:r>
+            <a:endParaRPr lang="zh-CN" altLang="en-US"/>
           </a:p>
         </p:txBody>
       </p:sp>
@@ -5291,12 +5491,19 @@
                 <a:solidFill>
                   <a:schemeClr val="accent5"/>
                 </a:solidFill>
-                <a:latin typeface="Consolas"/>
-                <a:ea typeface="Consolas"/>
-                <a:cs typeface="Consolas"/>
+                <a:latin typeface="Consolas" panose="020B0609020204030204"/>
+                <a:ea typeface="Consolas" panose="020B0609020204030204"/>
+                <a:cs typeface="Consolas" panose="020B0609020204030204"/>
               </a:rPr>
-              <a:t>10</a:t>
             </a:fld>
+            <a:endParaRPr lang="en-US" sz="1350" dirty="0">
+              <a:solidFill>
+                <a:schemeClr val="accent5"/>
+              </a:solidFill>
+              <a:latin typeface="Consolas" panose="020B0609020204030204"/>
+              <a:ea typeface="Consolas" panose="020B0609020204030204"/>
+              <a:cs typeface="Consolas" panose="020B0609020204030204"/>
+            </a:endParaRPr>
           </a:p>
         </p:txBody>
       </p:sp>
@@ -5305,14 +5512,23 @@
   <p:clrMapOvr>
     <a:masterClrMapping/>
   </p:clrMapOvr>
-  <p:transition p14:dur="400">
-    <p:fade/>
-  </p:transition>
+  <mc:AlternateContent xmlns:mc="http://schemas.openxmlformats.org/markup-compatibility/2006">
+    <mc:Choice xmlns:p14="http://schemas.microsoft.com/office/powerpoint/2010/main" Requires="p14">
+      <p:transition p14:dur="400">
+        <p:fade/>
+      </p:transition>
+    </mc:Choice>
+    <mc:Fallback>
+      <p:transition>
+        <p:fade/>
+      </p:transition>
+    </mc:Fallback>
+  </mc:AlternateContent>
 </p:sld>
 </file>
 
 <file path=ppt/slides/slide11.xml><?xml version="1.0" encoding="utf-8"?>
-<p:sld xmlns:a="http://schemas.openxmlformats.org/drawingml/2006/main" xmlns:p="http://schemas.openxmlformats.org/presentationml/2006/main" xmlns:p14="http://schemas.microsoft.com/office/powerpoint/2010/main">
+<p:sld xmlns:a="http://schemas.openxmlformats.org/drawingml/2006/main" xmlns:r="http://schemas.openxmlformats.org/officeDocument/2006/relationships" xmlns:p="http://schemas.openxmlformats.org/presentationml/2006/main">
   <p:cSld>
     <p:spTree>
       <p:nvGrpSpPr>
@@ -5379,6 +5595,14 @@
                 </a:rPr>
                 <a:t>一帧移动，其实是七个连续决策</a:t>
               </a:r>
+              <a:endParaRPr lang="zh-CN" sz="4200" b="1" dirty="0">
+                <a:solidFill>
+                  <a:schemeClr val="dk1"/>
+                </a:solidFill>
+                <a:latin typeface="+mj-lt"/>
+                <a:ea typeface="+mj-ea"/>
+                <a:cs typeface="+mj-cs"/>
+              </a:endParaRPr>
             </a:p>
           </p:txBody>
         </p:sp>
@@ -5419,6 +5643,14 @@
                 </a:rPr>
                 <a:t>输入、转向、贴地、跳跃、重力、移动与碰撞修正共同形成稳定角色</a:t>
               </a:r>
+              <a:endParaRPr lang="zh-CN" sz="1800" dirty="0">
+                <a:solidFill>
+                  <a:schemeClr val="dk2"/>
+                </a:solidFill>
+                <a:latin typeface="+mn-lt"/>
+                <a:ea typeface="+mn-ea"/>
+                <a:cs typeface="+mn-cs"/>
+              </a:endParaRPr>
             </a:p>
           </p:txBody>
         </p:sp>
@@ -5540,12 +5772,20 @@
                   <a:solidFill>
                     <a:srgbClr val="FFFFFF"/>
                   </a:solidFill>
-                  <a:latin typeface="Consolas"/>
-                  <a:ea typeface="Consolas"/>
-                  <a:cs typeface="Consolas"/>
+                  <a:latin typeface="Consolas" panose="020B0609020204030204"/>
+                  <a:ea typeface="Consolas" panose="020B0609020204030204"/>
+                  <a:cs typeface="Consolas" panose="020B0609020204030204"/>
                 </a:rPr>
                 <a:t>1</a:t>
               </a:r>
+              <a:endParaRPr lang="en-US" sz="1800" b="1" dirty="0">
+                <a:solidFill>
+                  <a:srgbClr val="FFFFFF"/>
+                </a:solidFill>
+                <a:latin typeface="Consolas" panose="020B0609020204030204"/>
+                <a:ea typeface="Consolas" panose="020B0609020204030204"/>
+                <a:cs typeface="Consolas" panose="020B0609020204030204"/>
+              </a:endParaRPr>
             </a:p>
           </p:txBody>
         </p:sp>
@@ -5612,6 +5852,14 @@
                 </a:rPr>
                 <a:t>读取输入</a:t>
               </a:r>
+              <a:endParaRPr lang="zh-CN" sz="2250" b="1" dirty="0">
+                <a:solidFill>
+                  <a:schemeClr val="accent1"/>
+                </a:solidFill>
+                <a:latin typeface="+mj-lt"/>
+                <a:ea typeface="+mj-ea"/>
+                <a:cs typeface="+mj-cs"/>
+              </a:endParaRPr>
             </a:p>
           </p:txBody>
         </p:sp>
@@ -5646,12 +5894,20 @@
                   <a:solidFill>
                     <a:schemeClr val="dk1"/>
                   </a:solidFill>
-                  <a:latin typeface="Consolas"/>
-                  <a:ea typeface="Consolas"/>
-                  <a:cs typeface="Consolas"/>
+                  <a:latin typeface="Consolas" panose="020B0609020204030204"/>
+                  <a:ea typeface="Consolas" panose="020B0609020204030204"/>
+                  <a:cs typeface="Consolas" panose="020B0609020204030204"/>
                 </a:rPr>
                 <a:t>W A S D → Vector3</a:t>
               </a:r>
+              <a:endParaRPr lang="en-US" sz="1500" dirty="0">
+                <a:solidFill>
+                  <a:schemeClr val="dk1"/>
+                </a:solidFill>
+                <a:latin typeface="Consolas" panose="020B0609020204030204"/>
+                <a:ea typeface="Consolas" panose="020B0609020204030204"/>
+                <a:cs typeface="Consolas" panose="020B0609020204030204"/>
+              </a:endParaRPr>
             </a:p>
           </p:txBody>
         </p:sp>
@@ -5692,6 +5948,14 @@
                 </a:rPr>
                 <a:t>Keyboard.current 可能为空</a:t>
               </a:r>
+              <a:endParaRPr lang="zh-CN" sz="1500" dirty="0">
+                <a:solidFill>
+                  <a:schemeClr val="dk2"/>
+                </a:solidFill>
+                <a:latin typeface="+mn-lt"/>
+                <a:ea typeface="+mn-ea"/>
+                <a:cs typeface="+mn-cs"/>
+              </a:endParaRPr>
             </a:p>
           </p:txBody>
         </p:sp>
@@ -5763,12 +6027,20 @@
                   <a:solidFill>
                     <a:srgbClr val="FFFFFF"/>
                   </a:solidFill>
-                  <a:latin typeface="Consolas"/>
-                  <a:ea typeface="Consolas"/>
-                  <a:cs typeface="Consolas"/>
+                  <a:latin typeface="Consolas" panose="020B0609020204030204"/>
+                  <a:ea typeface="Consolas" panose="020B0609020204030204"/>
+                  <a:cs typeface="Consolas" panose="020B0609020204030204"/>
                 </a:rPr>
                 <a:t>2</a:t>
               </a:r>
+              <a:endParaRPr lang="en-US" sz="1800" b="1" dirty="0">
+                <a:solidFill>
+                  <a:srgbClr val="FFFFFF"/>
+                </a:solidFill>
+                <a:latin typeface="Consolas" panose="020B0609020204030204"/>
+                <a:ea typeface="Consolas" panose="020B0609020204030204"/>
+                <a:cs typeface="Consolas" panose="020B0609020204030204"/>
+              </a:endParaRPr>
             </a:p>
           </p:txBody>
         </p:sp>
@@ -5835,6 +6107,14 @@
                 </a:rPr>
                 <a:t>限制输入长度</a:t>
               </a:r>
+              <a:endParaRPr lang="zh-CN" sz="2250" b="1" dirty="0">
+                <a:solidFill>
+                  <a:schemeClr val="accent1"/>
+                </a:solidFill>
+                <a:latin typeface="+mj-lt"/>
+                <a:ea typeface="+mj-ea"/>
+                <a:cs typeface="+mj-cs"/>
+              </a:endParaRPr>
             </a:p>
           </p:txBody>
         </p:sp>
@@ -5869,12 +6149,20 @@
                   <a:solidFill>
                     <a:schemeClr val="dk1"/>
                   </a:solidFill>
-                  <a:latin typeface="Consolas"/>
-                  <a:ea typeface="Consolas"/>
-                  <a:cs typeface="Consolas"/>
+                  <a:latin typeface="Consolas" panose="020B0609020204030204"/>
+                  <a:ea typeface="Consolas" panose="020B0609020204030204"/>
+                  <a:cs typeface="Consolas" panose="020B0609020204030204"/>
                 </a:rPr>
                 <a:t>ClampMagnitude(input, 1)</a:t>
               </a:r>
+              <a:endParaRPr lang="en-US" sz="1420" dirty="0">
+                <a:solidFill>
+                  <a:schemeClr val="dk1"/>
+                </a:solidFill>
+                <a:latin typeface="Consolas" panose="020B0609020204030204"/>
+                <a:ea typeface="Consolas" panose="020B0609020204030204"/>
+                <a:cs typeface="Consolas" panose="020B0609020204030204"/>
+              </a:endParaRPr>
             </a:p>
           </p:txBody>
         </p:sp>
@@ -5915,6 +6203,14 @@
                 </a:rPr>
                 <a:t>避免斜向速度更快</a:t>
               </a:r>
+              <a:endParaRPr lang="zh-CN" sz="1500" dirty="0">
+                <a:solidFill>
+                  <a:schemeClr val="dk2"/>
+                </a:solidFill>
+                <a:latin typeface="+mn-lt"/>
+                <a:ea typeface="+mn-ea"/>
+                <a:cs typeface="+mn-cs"/>
+              </a:endParaRPr>
             </a:p>
           </p:txBody>
         </p:sp>
@@ -5986,12 +6282,20 @@
                   <a:solidFill>
                     <a:srgbClr val="FFFFFF"/>
                   </a:solidFill>
-                  <a:latin typeface="Consolas"/>
-                  <a:ea typeface="Consolas"/>
-                  <a:cs typeface="Consolas"/>
+                  <a:latin typeface="Consolas" panose="020B0609020204030204"/>
+                  <a:ea typeface="Consolas" panose="020B0609020204030204"/>
+                  <a:cs typeface="Consolas" panose="020B0609020204030204"/>
                 </a:rPr>
                 <a:t>3</a:t>
               </a:r>
+              <a:endParaRPr lang="en-US" sz="1800" b="1" dirty="0">
+                <a:solidFill>
+                  <a:srgbClr val="FFFFFF"/>
+                </a:solidFill>
+                <a:latin typeface="Consolas" panose="020B0609020204030204"/>
+                <a:ea typeface="Consolas" panose="020B0609020204030204"/>
+                <a:cs typeface="Consolas" panose="020B0609020204030204"/>
+              </a:endParaRPr>
             </a:p>
           </p:txBody>
         </p:sp>
@@ -6058,6 +6362,14 @@
                 </a:rPr>
                 <a:t>平滑转向</a:t>
               </a:r>
+              <a:endParaRPr lang="zh-CN" sz="2250" b="1" dirty="0">
+                <a:solidFill>
+                  <a:srgbClr val="8C5A00"/>
+                </a:solidFill>
+                <a:latin typeface="+mj-lt"/>
+                <a:ea typeface="+mj-ea"/>
+                <a:cs typeface="+mj-cs"/>
+              </a:endParaRPr>
             </a:p>
           </p:txBody>
         </p:sp>
@@ -6092,12 +6404,20 @@
                   <a:solidFill>
                     <a:schemeClr val="dk1"/>
                   </a:solidFill>
-                  <a:latin typeface="Consolas"/>
-                  <a:ea typeface="Consolas"/>
-                  <a:cs typeface="Consolas"/>
+                  <a:latin typeface="Consolas" panose="020B0609020204030204"/>
+                  <a:ea typeface="Consolas" panose="020B0609020204030204"/>
+                  <a:cs typeface="Consolas" panose="020B0609020204030204"/>
                 </a:rPr>
                 <a:t>LookRotation + Slerp</a:t>
               </a:r>
+              <a:endParaRPr lang="en-US" sz="1420" dirty="0">
+                <a:solidFill>
+                  <a:schemeClr val="dk1"/>
+                </a:solidFill>
+                <a:latin typeface="Consolas" panose="020B0609020204030204"/>
+                <a:ea typeface="Consolas" panose="020B0609020204030204"/>
+                <a:cs typeface="Consolas" panose="020B0609020204030204"/>
+              </a:endParaRPr>
             </a:p>
           </p:txBody>
         </p:sp>
@@ -6138,6 +6458,14 @@
                 </a:rPr>
                 <a:t>仅在输入不接近 0 时</a:t>
               </a:r>
+              <a:endParaRPr lang="zh-CN" sz="1500" dirty="0">
+                <a:solidFill>
+                  <a:schemeClr val="dk2"/>
+                </a:solidFill>
+                <a:latin typeface="+mn-lt"/>
+                <a:ea typeface="+mn-ea"/>
+                <a:cs typeface="+mn-cs"/>
+              </a:endParaRPr>
             </a:p>
           </p:txBody>
         </p:sp>
@@ -6209,12 +6537,20 @@
                   <a:solidFill>
                     <a:srgbClr val="FFFFFF"/>
                   </a:solidFill>
-                  <a:latin typeface="Consolas"/>
-                  <a:ea typeface="Consolas"/>
-                  <a:cs typeface="Consolas"/>
+                  <a:latin typeface="Consolas" panose="020B0609020204030204"/>
+                  <a:ea typeface="Consolas" panose="020B0609020204030204"/>
+                  <a:cs typeface="Consolas" panose="020B0609020204030204"/>
                 </a:rPr>
                 <a:t>4</a:t>
               </a:r>
+              <a:endParaRPr lang="en-US" sz="1800" b="1" dirty="0">
+                <a:solidFill>
+                  <a:srgbClr val="FFFFFF"/>
+                </a:solidFill>
+                <a:latin typeface="Consolas" panose="020B0609020204030204"/>
+                <a:ea typeface="Consolas" panose="020B0609020204030204"/>
+                <a:cs typeface="Consolas" panose="020B0609020204030204"/>
+              </a:endParaRPr>
             </a:p>
           </p:txBody>
         </p:sp>
@@ -6281,6 +6617,14 @@
                 </a:rPr>
                 <a:t>稳定贴地</a:t>
               </a:r>
+              <a:endParaRPr lang="zh-CN" sz="2250" b="1" dirty="0">
+                <a:solidFill>
+                  <a:srgbClr val="2F8F6A"/>
+                </a:solidFill>
+                <a:latin typeface="+mj-lt"/>
+                <a:ea typeface="+mj-ea"/>
+                <a:cs typeface="+mj-cs"/>
+              </a:endParaRPr>
             </a:p>
           </p:txBody>
         </p:sp>
@@ -6315,12 +6659,20 @@
                   <a:solidFill>
                     <a:schemeClr val="dk1"/>
                   </a:solidFill>
-                  <a:latin typeface="Consolas"/>
-                  <a:ea typeface="Consolas"/>
-                  <a:cs typeface="Consolas"/>
+                  <a:latin typeface="Consolas" panose="020B0609020204030204"/>
+                  <a:ea typeface="Consolas" panose="020B0609020204030204"/>
+                  <a:cs typeface="Consolas" panose="020B0609020204030204"/>
                 </a:rPr>
                 <a:t>isGrounded ? -2f</a:t>
               </a:r>
+              <a:endParaRPr lang="en-US" sz="1420" dirty="0">
+                <a:solidFill>
+                  <a:schemeClr val="dk1"/>
+                </a:solidFill>
+                <a:latin typeface="Consolas" panose="020B0609020204030204"/>
+                <a:ea typeface="Consolas" panose="020B0609020204030204"/>
+                <a:cs typeface="Consolas" panose="020B0609020204030204"/>
+              </a:endParaRPr>
             </a:p>
           </p:txBody>
         </p:sp>
@@ -6361,6 +6713,14 @@
                 </a:rPr>
                 <a:t>保留很小向下速度</a:t>
               </a:r>
+              <a:endParaRPr lang="zh-CN" sz="1500" dirty="0">
+                <a:solidFill>
+                  <a:schemeClr val="dk2"/>
+                </a:solidFill>
+                <a:latin typeface="+mn-lt"/>
+                <a:ea typeface="+mn-ea"/>
+                <a:cs typeface="+mn-cs"/>
+              </a:endParaRPr>
             </a:p>
           </p:txBody>
         </p:sp>
@@ -6432,12 +6792,20 @@
                   <a:solidFill>
                     <a:srgbClr val="FFFFFF"/>
                   </a:solidFill>
-                  <a:latin typeface="Consolas"/>
-                  <a:ea typeface="Consolas"/>
-                  <a:cs typeface="Consolas"/>
+                  <a:latin typeface="Consolas" panose="020B0609020204030204"/>
+                  <a:ea typeface="Consolas" panose="020B0609020204030204"/>
+                  <a:cs typeface="Consolas" panose="020B0609020204030204"/>
                 </a:rPr>
                 <a:t>5</a:t>
               </a:r>
+              <a:endParaRPr lang="en-US" sz="1800" b="1" dirty="0">
+                <a:solidFill>
+                  <a:srgbClr val="FFFFFF"/>
+                </a:solidFill>
+                <a:latin typeface="Consolas" panose="020B0609020204030204"/>
+                <a:ea typeface="Consolas" panose="020B0609020204030204"/>
+                <a:cs typeface="Consolas" panose="020B0609020204030204"/>
+              </a:endParaRPr>
             </a:p>
           </p:txBody>
         </p:sp>
@@ -6699,6 +7067,14 @@
                 </a:rPr>
                 <a:t>计算跳跃</a:t>
               </a:r>
+              <a:endParaRPr lang="zh-CN" sz="2250" b="1" dirty="0">
+                <a:solidFill>
+                  <a:srgbClr val="8C5A00"/>
+                </a:solidFill>
+                <a:latin typeface="+mj-lt"/>
+                <a:ea typeface="+mj-ea"/>
+                <a:cs typeface="+mj-cs"/>
+              </a:endParaRPr>
             </a:p>
           </p:txBody>
         </p:sp>
@@ -6733,12 +7109,20 @@
                   <a:solidFill>
                     <a:schemeClr val="dk1"/>
                   </a:solidFill>
-                  <a:latin typeface="Consolas"/>
-                  <a:ea typeface="Consolas"/>
-                  <a:cs typeface="Consolas"/>
+                  <a:latin typeface="Consolas" panose="020B0609020204030204"/>
+                  <a:ea typeface="Consolas" panose="020B0609020204030204"/>
+                  <a:cs typeface="Consolas" panose="020B0609020204030204"/>
                 </a:rPr>
                 <a:t>sqrt(h × -2 × g)</a:t>
               </a:r>
+              <a:endParaRPr lang="en-US" sz="1350" dirty="0">
+                <a:solidFill>
+                  <a:schemeClr val="dk1"/>
+                </a:solidFill>
+                <a:latin typeface="Consolas" panose="020B0609020204030204"/>
+                <a:ea typeface="Consolas" panose="020B0609020204030204"/>
+                <a:cs typeface="Consolas" panose="020B0609020204030204"/>
+              </a:endParaRPr>
             </a:p>
           </p:txBody>
         </p:sp>
@@ -6779,6 +7163,14 @@
                 </a:rPr>
                 <a:t>着地且空格刚按下</a:t>
               </a:r>
+              <a:endParaRPr lang="zh-CN" sz="1500" dirty="0">
+                <a:solidFill>
+                  <a:schemeClr val="dk2"/>
+                </a:solidFill>
+                <a:latin typeface="+mn-lt"/>
+                <a:ea typeface="+mn-ea"/>
+                <a:cs typeface="+mn-cs"/>
+              </a:endParaRPr>
             </a:p>
           </p:txBody>
         </p:sp>
@@ -6850,12 +7242,20 @@
                   <a:solidFill>
                     <a:srgbClr val="FFFFFF"/>
                   </a:solidFill>
-                  <a:latin typeface="Consolas"/>
-                  <a:ea typeface="Consolas"/>
-                  <a:cs typeface="Consolas"/>
+                  <a:latin typeface="Consolas" panose="020B0609020204030204"/>
+                  <a:ea typeface="Consolas" panose="020B0609020204030204"/>
+                  <a:cs typeface="Consolas" panose="020B0609020204030204"/>
                 </a:rPr>
                 <a:t>6</a:t>
               </a:r>
+              <a:endParaRPr lang="en-US" sz="1800" b="1" dirty="0">
+                <a:solidFill>
+                  <a:srgbClr val="FFFFFF"/>
+                </a:solidFill>
+                <a:latin typeface="Consolas" panose="020B0609020204030204"/>
+                <a:ea typeface="Consolas" panose="020B0609020204030204"/>
+                <a:cs typeface="Consolas" panose="020B0609020204030204"/>
+              </a:endParaRPr>
             </a:p>
           </p:txBody>
         </p:sp>
@@ -7011,6 +7411,14 @@
                 </a:rPr>
                 <a:t>积分重力</a:t>
               </a:r>
+              <a:endParaRPr lang="zh-CN" sz="2250" b="1" dirty="0">
+                <a:solidFill>
+                  <a:srgbClr val="D85C45"/>
+                </a:solidFill>
+                <a:latin typeface="+mj-lt"/>
+                <a:ea typeface="+mj-ea"/>
+                <a:cs typeface="+mj-cs"/>
+              </a:endParaRPr>
             </a:p>
           </p:txBody>
         </p:sp>
@@ -7045,12 +7453,20 @@
                   <a:solidFill>
                     <a:schemeClr val="dk1"/>
                   </a:solidFill>
-                  <a:latin typeface="Consolas"/>
-                  <a:ea typeface="Consolas"/>
-                  <a:cs typeface="Consolas"/>
+                  <a:latin typeface="Consolas" panose="020B0609020204030204"/>
+                  <a:ea typeface="Consolas" panose="020B0609020204030204"/>
+                  <a:cs typeface="Consolas" panose="020B0609020204030204"/>
                 </a:rPr>
                 <a:t>vY += gravity × dt</a:t>
               </a:r>
+              <a:endParaRPr lang="en-US" sz="1280" dirty="0">
+                <a:solidFill>
+                  <a:schemeClr val="dk1"/>
+                </a:solidFill>
+                <a:latin typeface="Consolas" panose="020B0609020204030204"/>
+                <a:ea typeface="Consolas" panose="020B0609020204030204"/>
+                <a:cs typeface="Consolas" panose="020B0609020204030204"/>
+              </a:endParaRPr>
             </a:p>
           </p:txBody>
         </p:sp>
@@ -7091,6 +7507,14 @@
                 </a:rPr>
                 <a:t>每帧更新竖直速度</a:t>
               </a:r>
+              <a:endParaRPr lang="zh-CN" sz="1500" dirty="0">
+                <a:solidFill>
+                  <a:schemeClr val="dk2"/>
+                </a:solidFill>
+                <a:latin typeface="+mn-lt"/>
+                <a:ea typeface="+mn-ea"/>
+                <a:cs typeface="+mn-cs"/>
+              </a:endParaRPr>
             </a:p>
           </p:txBody>
         </p:sp>
@@ -7162,12 +7586,20 @@
                   <a:solidFill>
                     <a:srgbClr val="FFFFFF"/>
                   </a:solidFill>
-                  <a:latin typeface="Consolas"/>
-                  <a:ea typeface="Consolas"/>
-                  <a:cs typeface="Consolas"/>
+                  <a:latin typeface="Consolas" panose="020B0609020204030204"/>
+                  <a:ea typeface="Consolas" panose="020B0609020204030204"/>
+                  <a:cs typeface="Consolas" panose="020B0609020204030204"/>
                 </a:rPr>
                 <a:t>7</a:t>
               </a:r>
+              <a:endParaRPr lang="en-US" sz="1800" b="1" dirty="0">
+                <a:solidFill>
+                  <a:srgbClr val="FFFFFF"/>
+                </a:solidFill>
+                <a:latin typeface="Consolas" panose="020B0609020204030204"/>
+                <a:ea typeface="Consolas" panose="020B0609020204030204"/>
+                <a:cs typeface="Consolas" panose="020B0609020204030204"/>
+              </a:endParaRPr>
             </a:p>
           </p:txBody>
         </p:sp>
@@ -7549,6 +7981,14 @@
                 </a:rPr>
                 <a:t>Move + 修正</a:t>
               </a:r>
+              <a:endParaRPr lang="zh-CN" sz="2250" b="1" dirty="0">
+                <a:solidFill>
+                  <a:schemeClr val="accent1"/>
+                </a:solidFill>
+                <a:latin typeface="+mj-lt"/>
+                <a:ea typeface="+mj-ea"/>
+                <a:cs typeface="+mj-cs"/>
+              </a:endParaRPr>
             </a:p>
           </p:txBody>
         </p:sp>
@@ -7583,12 +8023,20 @@
                   <a:solidFill>
                     <a:schemeClr val="dk1"/>
                   </a:solidFill>
-                  <a:latin typeface="Consolas"/>
-                  <a:ea typeface="Consolas"/>
-                  <a:cs typeface="Consolas"/>
+                  <a:latin typeface="Consolas" panose="020B0609020204030204"/>
+                  <a:ea typeface="Consolas" panose="020B0609020204030204"/>
+                  <a:cs typeface="Consolas" panose="020B0609020204030204"/>
                 </a:rPr>
                 <a:t>Move(velocity × dt)</a:t>
               </a:r>
+              <a:endParaRPr lang="en-US" sz="1280" dirty="0">
+                <a:solidFill>
+                  <a:schemeClr val="dk1"/>
+                </a:solidFill>
+                <a:latin typeface="Consolas" panose="020B0609020204030204"/>
+                <a:ea typeface="Consolas" panose="020B0609020204030204"/>
+                <a:cs typeface="Consolas" panose="020B0609020204030204"/>
+              </a:endParaRPr>
             </a:p>
           </p:txBody>
         </p:sp>
@@ -7629,6 +8077,14 @@
                 </a:rPr>
                 <a:t>撞到顶部 → vY 归零</a:t>
               </a:r>
+              <a:endParaRPr lang="zh-CN" sz="1500" dirty="0">
+                <a:solidFill>
+                  <a:schemeClr val="dk2"/>
+                </a:solidFill>
+                <a:latin typeface="+mn-lt"/>
+                <a:ea typeface="+mn-ea"/>
+                <a:cs typeface="+mn-cs"/>
+              </a:endParaRPr>
             </a:p>
           </p:txBody>
         </p:sp>
@@ -7655,8 +8111,8 @@
           </p:nvSpPr>
           <p:spPr>
             <a:xfrm>
-              <a:off x="514350" y="4857750"/>
-              <a:ext cx="2362200" cy="971550"/>
+              <a:off x="322028" y="4857750"/>
+              <a:ext cx="2731770" cy="971550"/>
             </a:xfrm>
             <a:prstGeom prst="roundRect">
               <a:avLst>
@@ -7670,6 +8126,12 @@
               <a:noFill/>
             </a:ln>
           </p:spPr>
+          <p:txBody>
+            <a:bodyPr/>
+            <a:p>
+              <a:endParaRPr lang="zh-CN" altLang="en-US"/>
+            </a:p>
+          </p:txBody>
         </p:sp>
         <p:sp>
           <p:nvSpPr>
@@ -7702,12 +8164,20 @@
                   <a:solidFill>
                     <a:schemeClr val="accent2"/>
                   </a:solidFill>
-                  <a:latin typeface="Consolas"/>
-                  <a:ea typeface="Consolas"/>
-                  <a:cs typeface="Consolas"/>
+                  <a:latin typeface="Consolas" panose="020B0609020204030204"/>
+                  <a:ea typeface="Consolas" panose="020B0609020204030204"/>
+                  <a:cs typeface="Consolas" panose="020B0609020204030204"/>
                 </a:rPr>
                 <a:t>horizontal + vertical</a:t>
               </a:r>
+              <a:endParaRPr lang="en-US" sz="1580" b="1" dirty="0">
+                <a:solidFill>
+                  <a:schemeClr val="accent2"/>
+                </a:solidFill>
+                <a:latin typeface="Consolas" panose="020B0609020204030204"/>
+                <a:ea typeface="Consolas" panose="020B0609020204030204"/>
+                <a:cs typeface="Consolas" panose="020B0609020204030204"/>
+              </a:endParaRPr>
             </a:p>
           </p:txBody>
         </p:sp>
@@ -7748,6 +8218,14 @@
                 </a:rPr>
                 <a:t>合成速度后只调用一次 Move</a:t>
               </a:r>
+              <a:endParaRPr lang="zh-CN" sz="1580" dirty="0">
+                <a:solidFill>
+                  <a:srgbClr val="FFFFFF"/>
+                </a:solidFill>
+                <a:latin typeface="+mn-lt"/>
+                <a:ea typeface="+mn-ea"/>
+                <a:cs typeface="+mn-cs"/>
+              </a:endParaRPr>
             </a:p>
           </p:txBody>
         </p:sp>
@@ -7790,46 +8268,6 @@
       </p:sp>
       <p:sp>
         <p:nvSpPr>
-          <p:cNvPr id="74" name="TextBox 74"/>
-          <p:cNvSpPr txBox="1"/>
-          <p:nvPr/>
-        </p:nvSpPr>
-        <p:spPr>
-          <a:xfrm>
-            <a:off x="564642" y="6521768"/>
-            <a:ext cx="2577648" cy="264033"/>
-          </a:xfrm>
-          <a:prstGeom prst="rect">
-            <a:avLst/>
-          </a:prstGeom>
-          <a:noFill/>
-          <a:ln>
-            <a:noFill/>
-          </a:ln>
-        </p:spPr>
-        <p:txBody>
-          <a:bodyPr wrap="none" lIns="0" tIns="0" rIns="0" bIns="0" anchor="t" anchorCtr="0">
-            <a:spAutoFit/>
-          </a:bodyPr>
-          <a:lstStyle/>
-          <a:p>
-            <a:pPr algn="l"/>
-            <a:r>
-              <a:rPr lang="zh-CN" sz="1350" dirty="0">
-                <a:solidFill>
-                  <a:schemeClr val="accent5"/>
-                </a:solidFill>
-                <a:latin typeface="+mn-lt"/>
-                <a:ea typeface="+mn-ea"/>
-                <a:cs typeface="+mn-cs"/>
-              </a:rPr>
-              <a:t>Unity 语法基础 · 完整移动算法</a:t>
-            </a:r>
-          </a:p>
-        </p:txBody>
-      </p:sp>
-      <p:sp>
-        <p:nvSpPr>
           <p:cNvPr id="75" name="TextBox 75"/>
           <p:cNvSpPr txBox="1"/>
           <p:nvPr/>
@@ -7859,12 +8297,19 @@
                 <a:solidFill>
                   <a:schemeClr val="accent5"/>
                 </a:solidFill>
-                <a:latin typeface="Consolas"/>
-                <a:ea typeface="Consolas"/>
-                <a:cs typeface="Consolas"/>
+                <a:latin typeface="Consolas" panose="020B0609020204030204"/>
+                <a:ea typeface="Consolas" panose="020B0609020204030204"/>
+                <a:cs typeface="Consolas" panose="020B0609020204030204"/>
               </a:rPr>
-              <a:t>11</a:t>
             </a:fld>
+            <a:endParaRPr lang="en-US" sz="1350" dirty="0">
+              <a:solidFill>
+                <a:schemeClr val="accent5"/>
+              </a:solidFill>
+              <a:latin typeface="Consolas" panose="020B0609020204030204"/>
+              <a:ea typeface="Consolas" panose="020B0609020204030204"/>
+              <a:cs typeface="Consolas" panose="020B0609020204030204"/>
+            </a:endParaRPr>
           </a:p>
         </p:txBody>
       </p:sp>
@@ -7873,14 +8318,23 @@
   <p:clrMapOvr>
     <a:masterClrMapping/>
   </p:clrMapOvr>
-  <p:transition p14:dur="400">
-    <p:fade/>
-  </p:transition>
+  <mc:AlternateContent xmlns:mc="http://schemas.openxmlformats.org/markup-compatibility/2006">
+    <mc:Choice xmlns:p14="http://schemas.microsoft.com/office/powerpoint/2010/main" Requires="p14">
+      <p:transition p14:dur="400">
+        <p:fade/>
+      </p:transition>
+    </mc:Choice>
+    <mc:Fallback>
+      <p:transition>
+        <p:fade/>
+      </p:transition>
+    </mc:Fallback>
+  </mc:AlternateContent>
 </p:sld>
 </file>
 
 <file path=ppt/slides/slide12.xml><?xml version="1.0" encoding="utf-8"?>
-<p:sld xmlns:a="http://schemas.openxmlformats.org/drawingml/2006/main" xmlns:p="http://schemas.openxmlformats.org/presentationml/2006/main" xmlns:p14="http://schemas.microsoft.com/office/powerpoint/2010/main">
+<p:sld xmlns:a="http://schemas.openxmlformats.org/drawingml/2006/main" xmlns:r="http://schemas.openxmlformats.org/officeDocument/2006/relationships" xmlns:p="http://schemas.openxmlformats.org/presentationml/2006/main">
   <p:cSld>
     <p:spTree>
       <p:nvGrpSpPr>
@@ -7947,6 +8401,14 @@
                 </a:rPr>
                 <a:t>先决定“直接控制”还是“物理响应”</a:t>
               </a:r>
+              <a:endParaRPr lang="zh-CN" sz="4200" b="1" dirty="0">
+                <a:solidFill>
+                  <a:schemeClr val="dk1"/>
+                </a:solidFill>
+                <a:latin typeface="+mj-lt"/>
+                <a:ea typeface="+mj-ea"/>
+                <a:cs typeface="+mj-cs"/>
+              </a:endParaRPr>
             </a:p>
           </p:txBody>
         </p:sp>
@@ -7987,6 +8449,14 @@
                 </a:rPr>
                 <a:t>选择移动系统，就是选择角色对世界的响应方式</a:t>
               </a:r>
+              <a:endParaRPr lang="zh-CN" sz="1800" dirty="0">
+                <a:solidFill>
+                  <a:schemeClr val="dk2"/>
+                </a:solidFill>
+                <a:latin typeface="+mn-lt"/>
+                <a:ea typeface="+mn-ea"/>
+                <a:cs typeface="+mn-cs"/>
+              </a:endParaRPr>
             </a:p>
           </p:txBody>
         </p:sp>
@@ -8275,12 +8745,20 @@
                   <a:solidFill>
                     <a:schemeClr val="accent1"/>
                   </a:solidFill>
-                  <a:latin typeface="Consolas"/>
-                  <a:ea typeface="Consolas"/>
-                  <a:cs typeface="Consolas"/>
+                  <a:latin typeface="Consolas" panose="020B0609020204030204"/>
+                  <a:ea typeface="Consolas" panose="020B0609020204030204"/>
+                  <a:cs typeface="Consolas" panose="020B0609020204030204"/>
                 </a:rPr>
                 <a:t>CharacterController</a:t>
               </a:r>
+              <a:endParaRPr lang="en-US" sz="2180" b="1" dirty="0">
+                <a:solidFill>
+                  <a:schemeClr val="accent1"/>
+                </a:solidFill>
+                <a:latin typeface="Consolas" panose="020B0609020204030204"/>
+                <a:ea typeface="Consolas" panose="020B0609020204030204"/>
+                <a:cs typeface="Consolas" panose="020B0609020204030204"/>
+              </a:endParaRPr>
             </a:p>
           </p:txBody>
         </p:sp>
@@ -8321,6 +8799,14 @@
                 </a:rPr>
                 <a:t>脚本直接控制</a:t>
               </a:r>
+              <a:endParaRPr lang="zh-CN" sz="1880" b="1" dirty="0">
+                <a:solidFill>
+                  <a:schemeClr val="dk1"/>
+                </a:solidFill>
+                <a:latin typeface="+mn-lt"/>
+                <a:ea typeface="+mn-ea"/>
+                <a:cs typeface="+mn-cs"/>
+              </a:endParaRPr>
             </a:p>
           </p:txBody>
         </p:sp>
@@ -8349,7 +8835,7 @@
             </a:bodyPr>
             <a:lstStyle/>
             <a:p>
-              <a:pPr algn="l" marL="186214" indent="-186214">
+              <a:pPr marL="186055" indent="-186055" algn="l">
                 <a:buClr>
                   <a:schemeClr val="dk1"/>
                 </a:buClr>
@@ -8368,6 +8854,14 @@
                 </a:rPr>
                 <a:t>调用 Move 给位移</a:t>
               </a:r>
+              <a:endParaRPr lang="zh-CN" sz="1720" dirty="0">
+                <a:solidFill>
+                  <a:schemeClr val="dk1"/>
+                </a:solidFill>
+                <a:latin typeface="+mn-lt"/>
+                <a:ea typeface="+mn-ea"/>
+                <a:cs typeface="+mn-cs"/>
+              </a:endParaRPr>
             </a:p>
           </p:txBody>
         </p:sp>
@@ -8396,7 +8890,7 @@
             </a:bodyPr>
             <a:lstStyle/>
             <a:p>
-              <a:pPr algn="l" marL="186214" indent="-186214">
+              <a:pPr marL="186055" indent="-186055" algn="l">
                 <a:buClr>
                   <a:schemeClr val="dk1"/>
                 </a:buClr>
@@ -8415,6 +8909,14 @@
                 </a:rPr>
                 <a:t>重力与跳跃自己维护</a:t>
               </a:r>
+              <a:endParaRPr lang="zh-CN" sz="1720" dirty="0">
+                <a:solidFill>
+                  <a:schemeClr val="dk1"/>
+                </a:solidFill>
+                <a:latin typeface="+mn-lt"/>
+                <a:ea typeface="+mn-ea"/>
+                <a:cs typeface="+mn-cs"/>
+              </a:endParaRPr>
             </a:p>
           </p:txBody>
         </p:sp>
@@ -8443,7 +8945,7 @@
             </a:bodyPr>
             <a:lstStyle/>
             <a:p>
-              <a:pPr algn="l" marL="186214" indent="-186214">
+              <a:pPr marL="186055" indent="-186055" algn="l">
                 <a:buClr>
                   <a:schemeClr val="dk1"/>
                 </a:buClr>
@@ -8462,6 +8964,14 @@
                 </a:rPr>
                 <a:t>坡度、台阶参数友好</a:t>
               </a:r>
+              <a:endParaRPr lang="zh-CN" sz="1720" dirty="0">
+                <a:solidFill>
+                  <a:schemeClr val="dk1"/>
+                </a:solidFill>
+                <a:latin typeface="+mn-lt"/>
+                <a:ea typeface="+mn-ea"/>
+                <a:cs typeface="+mn-cs"/>
+              </a:endParaRPr>
             </a:p>
           </p:txBody>
         </p:sp>
@@ -8490,7 +9000,7 @@
             </a:bodyPr>
             <a:lstStyle/>
             <a:p>
-              <a:pPr algn="l" marL="186214" indent="-186214">
+              <a:pPr marL="186055" indent="-186055" algn="l">
                 <a:buClr>
                   <a:schemeClr val="dk1"/>
                 </a:buClr>
@@ -8509,6 +9019,14 @@
                 </a:rPr>
                 <a:t>默认不被刚体随意撞飞</a:t>
               </a:r>
+              <a:endParaRPr lang="zh-CN" sz="1720" dirty="0">
+                <a:solidFill>
+                  <a:schemeClr val="dk1"/>
+                </a:solidFill>
+                <a:latin typeface="+mn-lt"/>
+                <a:ea typeface="+mn-ea"/>
+                <a:cs typeface="+mn-cs"/>
+              </a:endParaRPr>
             </a:p>
           </p:txBody>
         </p:sp>
@@ -8573,6 +9091,14 @@
                 </a:rPr>
                 <a:t>常见：第一 / 第三人称玩家</a:t>
               </a:r>
+              <a:endParaRPr lang="zh-CN" sz="1280" b="1" dirty="0">
+                <a:solidFill>
+                  <a:srgbClr val="FFFFFF"/>
+                </a:solidFill>
+                <a:latin typeface="+mn-lt"/>
+                <a:ea typeface="+mn-ea"/>
+                <a:cs typeface="+mn-cs"/>
+              </a:endParaRPr>
             </a:p>
           </p:txBody>
         </p:sp>
@@ -8715,6 +9241,14 @@
                 </a:rPr>
                 <a:t>选择规则</a:t>
               </a:r>
+              <a:endParaRPr lang="zh-CN" sz="2700" b="1" dirty="0">
+                <a:solidFill>
+                  <a:srgbClr val="8C5A00"/>
+                </a:solidFill>
+                <a:latin typeface="+mj-lt"/>
+                <a:ea typeface="+mj-ea"/>
+                <a:cs typeface="+mj-cs"/>
+              </a:endParaRPr>
             </a:p>
           </p:txBody>
         </p:sp>
@@ -8779,6 +9313,14 @@
                 </a:rPr>
                 <a:t>可控性优先</a:t>
               </a:r>
+              <a:endParaRPr lang="zh-CN" sz="1800" b="1" dirty="0">
+                <a:solidFill>
+                  <a:schemeClr val="accent1"/>
+                </a:solidFill>
+                <a:latin typeface="+mn-lt"/>
+                <a:ea typeface="+mn-ea"/>
+                <a:cs typeface="+mn-cs"/>
+              </a:endParaRPr>
             </a:p>
           </p:txBody>
         </p:sp>
@@ -8819,6 +9361,14 @@
                 </a:rPr>
                 <a:t>玩家角色、精确移动</a:t>
               </a:r>
+              <a:endParaRPr lang="zh-CN" sz="1580" dirty="0">
+                <a:solidFill>
+                  <a:schemeClr val="dk1"/>
+                </a:solidFill>
+                <a:latin typeface="+mn-lt"/>
+                <a:ea typeface="+mn-ea"/>
+                <a:cs typeface="+mn-cs"/>
+              </a:endParaRPr>
             </a:p>
           </p:txBody>
         </p:sp>
@@ -8853,12 +9403,20 @@
                   <a:solidFill>
                     <a:schemeClr val="accent5"/>
                   </a:solidFill>
-                  <a:latin typeface="Consolas"/>
-                  <a:ea typeface="Consolas"/>
-                  <a:cs typeface="Consolas"/>
+                  <a:latin typeface="Consolas" panose="020B0609020204030204"/>
+                  <a:ea typeface="Consolas" panose="020B0609020204030204"/>
+                  <a:cs typeface="Consolas" panose="020B0609020204030204"/>
                 </a:rPr>
                 <a:t>OR</a:t>
               </a:r>
+              <a:endParaRPr lang="en-US" sz="2250" b="1" dirty="0">
+                <a:solidFill>
+                  <a:schemeClr val="accent5"/>
+                </a:solidFill>
+                <a:latin typeface="Consolas" panose="020B0609020204030204"/>
+                <a:ea typeface="Consolas" panose="020B0609020204030204"/>
+                <a:cs typeface="Consolas" panose="020B0609020204030204"/>
+              </a:endParaRPr>
             </a:p>
           </p:txBody>
         </p:sp>
@@ -8923,6 +9481,14 @@
                 </a:rPr>
                 <a:t>物理响应优先</a:t>
               </a:r>
+              <a:endParaRPr lang="zh-CN" sz="1800" b="1" dirty="0">
+                <a:solidFill>
+                  <a:srgbClr val="2F8F6A"/>
+                </a:solidFill>
+                <a:latin typeface="+mn-lt"/>
+                <a:ea typeface="+mn-ea"/>
+                <a:cs typeface="+mn-cs"/>
+              </a:endParaRPr>
             </a:p>
           </p:txBody>
         </p:sp>
@@ -8963,6 +9529,14 @@
                 </a:rPr>
                 <a:t>箱子、球、载具、物理角色</a:t>
               </a:r>
+              <a:endParaRPr lang="zh-CN" sz="1580" dirty="0">
+                <a:solidFill>
+                  <a:schemeClr val="dk1"/>
+                </a:solidFill>
+                <a:latin typeface="+mn-lt"/>
+                <a:ea typeface="+mn-ea"/>
+                <a:cs typeface="+mn-cs"/>
+              </a:endParaRPr>
             </a:p>
           </p:txBody>
         </p:sp>
@@ -9234,12 +9808,20 @@
                   <a:solidFill>
                     <a:srgbClr val="2F8F6A"/>
                   </a:solidFill>
-                  <a:latin typeface="Consolas"/>
-                  <a:ea typeface="Consolas"/>
-                  <a:cs typeface="Consolas"/>
+                  <a:latin typeface="Consolas" panose="020B0609020204030204"/>
+                  <a:ea typeface="Consolas" panose="020B0609020204030204"/>
+                  <a:cs typeface="Consolas" panose="020B0609020204030204"/>
                 </a:rPr>
                 <a:t>Rigidbody</a:t>
               </a:r>
+              <a:endParaRPr lang="en-US" sz="2400" b="1" dirty="0">
+                <a:solidFill>
+                  <a:srgbClr val="2F8F6A"/>
+                </a:solidFill>
+                <a:latin typeface="Consolas" panose="020B0609020204030204"/>
+                <a:ea typeface="Consolas" panose="020B0609020204030204"/>
+                <a:cs typeface="Consolas" panose="020B0609020204030204"/>
+              </a:endParaRPr>
             </a:p>
           </p:txBody>
         </p:sp>
@@ -9280,6 +9862,14 @@
                 </a:rPr>
                 <a:t>动力学响应</a:t>
               </a:r>
+              <a:endParaRPr lang="zh-CN" sz="1880" b="1" dirty="0">
+                <a:solidFill>
+                  <a:schemeClr val="dk1"/>
+                </a:solidFill>
+                <a:latin typeface="+mn-lt"/>
+                <a:ea typeface="+mn-ea"/>
+                <a:cs typeface="+mn-cs"/>
+              </a:endParaRPr>
             </a:p>
           </p:txBody>
         </p:sp>
@@ -9308,7 +9898,7 @@
             </a:bodyPr>
             <a:lstStyle/>
             <a:p>
-              <a:pPr algn="l" marL="186214" indent="-186214">
+              <a:pPr marL="186055" indent="-186055" algn="l">
                 <a:buClr>
                   <a:schemeClr val="dk1"/>
                 </a:buClr>
@@ -9327,6 +9917,14 @@
                 </a:rPr>
                 <a:t>力、速度或物理移动</a:t>
               </a:r>
+              <a:endParaRPr lang="zh-CN" sz="1720" dirty="0">
+                <a:solidFill>
+                  <a:schemeClr val="dk1"/>
+                </a:solidFill>
+                <a:latin typeface="+mn-lt"/>
+                <a:ea typeface="+mn-ea"/>
+                <a:cs typeface="+mn-cs"/>
+              </a:endParaRPr>
             </a:p>
           </p:txBody>
         </p:sp>
@@ -9355,7 +9953,7 @@
             </a:bodyPr>
             <a:lstStyle/>
             <a:p>
-              <a:pPr algn="l" marL="186214" indent="-186214">
+              <a:pPr marL="186055" indent="-186055" algn="l">
                 <a:buClr>
                   <a:schemeClr val="dk1"/>
                 </a:buClr>
@@ -9374,6 +9972,14 @@
                 </a:rPr>
                 <a:t>可使用物理重力</a:t>
               </a:r>
+              <a:endParaRPr lang="zh-CN" sz="1720" dirty="0">
+                <a:solidFill>
+                  <a:schemeClr val="dk1"/>
+                </a:solidFill>
+                <a:latin typeface="+mn-lt"/>
+                <a:ea typeface="+mn-ea"/>
+                <a:cs typeface="+mn-cs"/>
+              </a:endParaRPr>
             </a:p>
           </p:txBody>
         </p:sp>
@@ -9402,7 +10008,7 @@
             </a:bodyPr>
             <a:lstStyle/>
             <a:p>
-              <a:pPr algn="l" marL="186214" indent="-186214">
+              <a:pPr marL="186055" indent="-186055" algn="l">
                 <a:buClr>
                   <a:schemeClr val="dk1"/>
                 </a:buClr>
@@ -9421,6 +10027,14 @@
                 </a:rPr>
                 <a:t>会被其他刚体推动</a:t>
               </a:r>
+              <a:endParaRPr lang="zh-CN" sz="1720" dirty="0">
+                <a:solidFill>
+                  <a:schemeClr val="dk1"/>
+                </a:solidFill>
+                <a:latin typeface="+mn-lt"/>
+                <a:ea typeface="+mn-ea"/>
+                <a:cs typeface="+mn-cs"/>
+              </a:endParaRPr>
             </a:p>
           </p:txBody>
         </p:sp>
@@ -9449,7 +10063,7 @@
             </a:bodyPr>
             <a:lstStyle/>
             <a:p>
-              <a:pPr algn="l" marL="186214" indent="-186214">
+              <a:pPr marL="186055" indent="-186055" algn="l">
                 <a:buClr>
                   <a:schemeClr val="dk1"/>
                 </a:buClr>
@@ -9468,6 +10082,14 @@
                 </a:rPr>
                 <a:t>坡度台阶需额外处理</a:t>
               </a:r>
+              <a:endParaRPr lang="zh-CN" sz="1720" dirty="0">
+                <a:solidFill>
+                  <a:schemeClr val="dk1"/>
+                </a:solidFill>
+                <a:latin typeface="+mn-lt"/>
+                <a:ea typeface="+mn-ea"/>
+                <a:cs typeface="+mn-cs"/>
+              </a:endParaRPr>
             </a:p>
           </p:txBody>
         </p:sp>
@@ -9532,6 +10154,14 @@
                 </a:rPr>
                 <a:t>常见：箱子、球、载具</a:t>
               </a:r>
+              <a:endParaRPr lang="zh-CN" sz="1280" b="1" dirty="0">
+                <a:solidFill>
+                  <a:srgbClr val="FFFFFF"/>
+                </a:solidFill>
+                <a:latin typeface="+mn-lt"/>
+                <a:ea typeface="+mn-ea"/>
+                <a:cs typeface="+mn-cs"/>
+              </a:endParaRPr>
             </a:p>
           </p:txBody>
         </p:sp>
@@ -9770,6 +10400,14 @@
                 </a:rPr>
                 <a:t>不要让 CharacterController 与非运动学 Rigidbody 在同一根节点争夺移动控制权</a:t>
               </a:r>
+              <a:endParaRPr lang="zh-CN" sz="1720" b="1" dirty="0">
+                <a:solidFill>
+                  <a:srgbClr val="FFFFFF"/>
+                </a:solidFill>
+                <a:latin typeface="+mn-lt"/>
+                <a:ea typeface="+mn-ea"/>
+                <a:cs typeface="+mn-cs"/>
+              </a:endParaRPr>
             </a:p>
           </p:txBody>
         </p:sp>
@@ -9812,46 +10450,6 @@
       </p:sp>
       <p:sp>
         <p:nvSpPr>
-          <p:cNvPr id="57" name="TextBox 57"/>
-          <p:cNvSpPr txBox="1"/>
-          <p:nvPr/>
-        </p:nvSpPr>
-        <p:spPr>
-          <a:xfrm>
-            <a:off x="564642" y="6521768"/>
-            <a:ext cx="2577648" cy="264033"/>
-          </a:xfrm>
-          <a:prstGeom prst="rect">
-            <a:avLst/>
-          </a:prstGeom>
-          <a:noFill/>
-          <a:ln>
-            <a:noFill/>
-          </a:ln>
-        </p:spPr>
-        <p:txBody>
-          <a:bodyPr wrap="none" lIns="0" tIns="0" rIns="0" bIns="0" anchor="t" anchorCtr="0">
-            <a:spAutoFit/>
-          </a:bodyPr>
-          <a:lstStyle/>
-          <a:p>
-            <a:pPr algn="l"/>
-            <a:r>
-              <a:rPr lang="zh-CN" sz="1350" dirty="0">
-                <a:solidFill>
-                  <a:schemeClr val="accent5"/>
-                </a:solidFill>
-                <a:latin typeface="+mn-lt"/>
-                <a:ea typeface="+mn-ea"/>
-                <a:cs typeface="+mn-cs"/>
-              </a:rPr>
-              <a:t>Unity 语法基础 · 移动系统选择</a:t>
-            </a:r>
-          </a:p>
-        </p:txBody>
-      </p:sp>
-      <p:sp>
-        <p:nvSpPr>
           <p:cNvPr id="58" name="TextBox 58"/>
           <p:cNvSpPr txBox="1"/>
           <p:nvPr/>
@@ -9881,12 +10479,19 @@
                 <a:solidFill>
                   <a:schemeClr val="accent5"/>
                 </a:solidFill>
-                <a:latin typeface="Consolas"/>
-                <a:ea typeface="Consolas"/>
-                <a:cs typeface="Consolas"/>
+                <a:latin typeface="Consolas" panose="020B0609020204030204"/>
+                <a:ea typeface="Consolas" panose="020B0609020204030204"/>
+                <a:cs typeface="Consolas" panose="020B0609020204030204"/>
               </a:rPr>
-              <a:t>12</a:t>
             </a:fld>
+            <a:endParaRPr lang="en-US" sz="1350" dirty="0">
+              <a:solidFill>
+                <a:schemeClr val="accent5"/>
+              </a:solidFill>
+              <a:latin typeface="Consolas" panose="020B0609020204030204"/>
+              <a:ea typeface="Consolas" panose="020B0609020204030204"/>
+              <a:cs typeface="Consolas" panose="020B0609020204030204"/>
+            </a:endParaRPr>
           </a:p>
         </p:txBody>
       </p:sp>
@@ -9895,14 +10500,23 @@
   <p:clrMapOvr>
     <a:masterClrMapping/>
   </p:clrMapOvr>
-  <p:transition p14:dur="400">
-    <p:fade/>
-  </p:transition>
+  <mc:AlternateContent xmlns:mc="http://schemas.openxmlformats.org/markup-compatibility/2006">
+    <mc:Choice xmlns:p14="http://schemas.microsoft.com/office/powerpoint/2010/main" Requires="p14">
+      <p:transition p14:dur="400">
+        <p:fade/>
+      </p:transition>
+    </mc:Choice>
+    <mc:Fallback>
+      <p:transition>
+        <p:fade/>
+      </p:transition>
+    </mc:Fallback>
+  </mc:AlternateContent>
 </p:sld>
 </file>
 
 <file path=ppt/slides/slide13.xml><?xml version="1.0" encoding="utf-8"?>
-<p:sld xmlns:a="http://schemas.openxmlformats.org/drawingml/2006/main" xmlns:p="http://schemas.openxmlformats.org/presentationml/2006/main" xmlns:p14="http://schemas.microsoft.com/office/powerpoint/2010/main">
+<p:sld xmlns:a="http://schemas.openxmlformats.org/drawingml/2006/main" xmlns:r="http://schemas.openxmlformats.org/officeDocument/2006/relationships" xmlns:p="http://schemas.openxmlformats.org/presentationml/2006/main">
   <p:cSld>
     <p:spTree>
       <p:nvGrpSpPr>
@@ -9969,6 +10583,14 @@
                 </a:rPr>
                 <a:t>把脚本放回场景：角色先走，摄像机后跟</a:t>
               </a:r>
+              <a:endParaRPr lang="zh-CN" sz="4200" b="1" dirty="0">
+                <a:solidFill>
+                  <a:schemeClr val="dk1"/>
+                </a:solidFill>
+                <a:latin typeface="+mj-lt"/>
+                <a:ea typeface="+mj-ea"/>
+                <a:cs typeface="+mj-cs"/>
+              </a:endParaRPr>
             </a:p>
           </p:txBody>
         </p:sp>
@@ -10315,6 +10937,14 @@
                   </a:rPr>
                   <a:t>Player</a:t>
                 </a:r>
+                <a:endParaRPr lang="en-US" sz="2550" b="1" dirty="0">
+                  <a:solidFill>
+                    <a:schemeClr val="dk1"/>
+                  </a:solidFill>
+                  <a:latin typeface="+mn-lt"/>
+                  <a:ea typeface="+mn-ea"/>
+                  <a:cs typeface="+mn-cs"/>
+                </a:endParaRPr>
               </a:p>
             </p:txBody>
           </p:sp>
@@ -10349,12 +10979,20 @@
                     <a:solidFill>
                       <a:schemeClr val="accent1"/>
                     </a:solidFill>
-                    <a:latin typeface="Consolas"/>
-                    <a:ea typeface="Consolas"/>
-                    <a:cs typeface="Consolas"/>
+                    <a:latin typeface="Consolas" panose="020B0609020204030204"/>
+                    <a:ea typeface="Consolas" panose="020B0609020204030204"/>
+                    <a:cs typeface="Consolas" panose="020B0609020204030204"/>
                   </a:rPr>
                   <a:t>Update()</a:t>
                 </a:r>
+                <a:endParaRPr lang="en-US" sz="2100" b="1" dirty="0">
+                  <a:solidFill>
+                    <a:schemeClr val="accent1"/>
+                  </a:solidFill>
+                  <a:latin typeface="Consolas" panose="020B0609020204030204"/>
+                  <a:ea typeface="Consolas" panose="020B0609020204030204"/>
+                  <a:cs typeface="Consolas" panose="020B0609020204030204"/>
+                </a:endParaRPr>
               </a:p>
             </p:txBody>
           </p:sp>
@@ -10395,6 +11033,14 @@
                   </a:rPr>
                   <a:t>读取输入 → Move → 新位置</a:t>
                 </a:r>
+                <a:endParaRPr lang="zh-CN" sz="1720" dirty="0">
+                  <a:solidFill>
+                    <a:schemeClr val="dk2"/>
+                  </a:solidFill>
+                  <a:latin typeface="+mn-lt"/>
+                  <a:ea typeface="+mn-ea"/>
+                  <a:cs typeface="+mn-cs"/>
+                </a:endParaRPr>
               </a:p>
             </p:txBody>
           </p:sp>
@@ -10514,6 +11160,14 @@
                 </a:rPr>
                 <a:t>同一帧，后执行</a:t>
               </a:r>
+              <a:endParaRPr lang="zh-CN" sz="2250" b="1" dirty="0">
+                <a:solidFill>
+                  <a:srgbClr val="8C5A00"/>
+                </a:solidFill>
+                <a:latin typeface="+mj-lt"/>
+                <a:ea typeface="+mj-ea"/>
+                <a:cs typeface="+mj-cs"/>
+              </a:endParaRPr>
             </a:p>
           </p:txBody>
         </p:sp>
@@ -10749,6 +11403,14 @@
                   </a:rPr>
                   <a:t>Main Camera</a:t>
                 </a:r>
+                <a:endParaRPr lang="en-US" sz="2550" b="1" dirty="0">
+                  <a:solidFill>
+                    <a:schemeClr val="dk1"/>
+                  </a:solidFill>
+                  <a:latin typeface="+mn-lt"/>
+                  <a:ea typeface="+mn-ea"/>
+                  <a:cs typeface="+mn-cs"/>
+                </a:endParaRPr>
               </a:p>
             </p:txBody>
           </p:sp>
@@ -10783,12 +11445,20 @@
                     <a:solidFill>
                       <a:srgbClr val="2F8F6A"/>
                     </a:solidFill>
-                    <a:latin typeface="Consolas"/>
-                    <a:ea typeface="Consolas"/>
-                    <a:cs typeface="Consolas"/>
+                    <a:latin typeface="Consolas" panose="020B0609020204030204"/>
+                    <a:ea typeface="Consolas" panose="020B0609020204030204"/>
+                    <a:cs typeface="Consolas" panose="020B0609020204030204"/>
                   </a:rPr>
                   <a:t>LateUpdate()</a:t>
                 </a:r>
+                <a:endParaRPr lang="en-US" sz="2100" b="1" dirty="0">
+                  <a:solidFill>
+                    <a:srgbClr val="2F8F6A"/>
+                  </a:solidFill>
+                  <a:latin typeface="Consolas" panose="020B0609020204030204"/>
+                  <a:ea typeface="Consolas" panose="020B0609020204030204"/>
+                  <a:cs typeface="Consolas" panose="020B0609020204030204"/>
+                </a:endParaRPr>
               </a:p>
             </p:txBody>
           </p:sp>
@@ -10829,6 +11499,14 @@
                   </a:rPr>
                   <a:t>Lerp 到目标位置 → LookAt</a:t>
                 </a:r>
+                <a:endParaRPr lang="zh-CN" sz="1720" dirty="0">
+                  <a:solidFill>
+                    <a:schemeClr val="dk2"/>
+                  </a:solidFill>
+                  <a:latin typeface="+mn-lt"/>
+                  <a:ea typeface="+mn-ea"/>
+                  <a:cs typeface="+mn-cs"/>
+                </a:endParaRPr>
               </a:p>
             </p:txBody>
           </p:sp>
@@ -10951,12 +11629,20 @@
                     <a:solidFill>
                       <a:srgbClr val="FFFFFF"/>
                     </a:solidFill>
-                    <a:latin typeface="Consolas"/>
-                    <a:ea typeface="Consolas"/>
-                    <a:cs typeface="Consolas"/>
+                    <a:latin typeface="Consolas" panose="020B0609020204030204"/>
+                    <a:ea typeface="Consolas" panose="020B0609020204030204"/>
+                    <a:cs typeface="Consolas" panose="020B0609020204030204"/>
                   </a:rPr>
                   <a:t>1</a:t>
                 </a:r>
+                <a:endParaRPr lang="en-US" sz="1720" b="1" dirty="0">
+                  <a:solidFill>
+                    <a:srgbClr val="FFFFFF"/>
+                  </a:solidFill>
+                  <a:latin typeface="Consolas" panose="020B0609020204030204"/>
+                  <a:ea typeface="Consolas" panose="020B0609020204030204"/>
+                  <a:cs typeface="Consolas" panose="020B0609020204030204"/>
+                </a:endParaRPr>
               </a:p>
             </p:txBody>
           </p:sp>
@@ -11023,6 +11709,14 @@
                   </a:rPr>
                   <a:t>角色根节点</a:t>
                 </a:r>
+                <a:endParaRPr lang="zh-CN" sz="1720" b="1" dirty="0">
+                  <a:solidFill>
+                    <a:schemeClr val="accent1"/>
+                  </a:solidFill>
+                  <a:latin typeface="+mn-lt"/>
+                  <a:ea typeface="+mn-ea"/>
+                  <a:cs typeface="+mn-cs"/>
+                </a:endParaRPr>
               </a:p>
             </p:txBody>
           </p:sp>
@@ -11063,6 +11757,14 @@
                   </a:rPr>
                   <a:t>Capsule / 空物体</a:t>
                 </a:r>
+                <a:endParaRPr lang="zh-CN" sz="1500" dirty="0">
+                  <a:solidFill>
+                    <a:schemeClr val="dk1"/>
+                  </a:solidFill>
+                  <a:latin typeface="+mn-lt"/>
+                  <a:ea typeface="+mn-ea"/>
+                  <a:cs typeface="+mn-cs"/>
+                </a:endParaRPr>
               </a:p>
             </p:txBody>
           </p:sp>
@@ -11103,6 +11805,14 @@
                   </a:rPr>
                   <a:t>模型可放子节点调朝向</a:t>
                 </a:r>
+                <a:endParaRPr lang="zh-CN" sz="1350" dirty="0">
+                  <a:solidFill>
+                    <a:schemeClr val="dk2"/>
+                  </a:solidFill>
+                  <a:latin typeface="+mn-lt"/>
+                  <a:ea typeface="+mn-ea"/>
+                  <a:cs typeface="+mn-cs"/>
+                </a:endParaRPr>
               </a:p>
             </p:txBody>
           </p:sp>
@@ -11174,12 +11884,20 @@
                     <a:solidFill>
                       <a:srgbClr val="FFFFFF"/>
                     </a:solidFill>
-                    <a:latin typeface="Consolas"/>
-                    <a:ea typeface="Consolas"/>
-                    <a:cs typeface="Consolas"/>
+                    <a:latin typeface="Consolas" panose="020B0609020204030204"/>
+                    <a:ea typeface="Consolas" panose="020B0609020204030204"/>
+                    <a:cs typeface="Consolas" panose="020B0609020204030204"/>
                   </a:rPr>
                   <a:t>2</a:t>
                 </a:r>
+                <a:endParaRPr lang="en-US" sz="1720" b="1" dirty="0">
+                  <a:solidFill>
+                    <a:srgbClr val="FFFFFF"/>
+                  </a:solidFill>
+                  <a:latin typeface="Consolas" panose="020B0609020204030204"/>
+                  <a:ea typeface="Consolas" panose="020B0609020204030204"/>
+                  <a:cs typeface="Consolas" panose="020B0609020204030204"/>
+                </a:endParaRPr>
               </a:p>
             </p:txBody>
           </p:sp>
@@ -11246,6 +11964,14 @@
                   </a:rPr>
                   <a:t>添加控制器</a:t>
                 </a:r>
+                <a:endParaRPr lang="zh-CN" sz="1720" b="1" dirty="0">
+                  <a:solidFill>
+                    <a:schemeClr val="accent1"/>
+                  </a:solidFill>
+                  <a:latin typeface="+mn-lt"/>
+                  <a:ea typeface="+mn-ea"/>
+                  <a:cs typeface="+mn-cs"/>
+                </a:endParaRPr>
               </a:p>
             </p:txBody>
           </p:sp>
@@ -11280,12 +12006,20 @@
                     <a:solidFill>
                       <a:schemeClr val="dk1"/>
                     </a:solidFill>
-                    <a:latin typeface="Consolas"/>
-                    <a:ea typeface="Consolas"/>
-                    <a:cs typeface="Consolas"/>
+                    <a:latin typeface="Consolas" panose="020B0609020204030204"/>
+                    <a:ea typeface="Consolas" panose="020B0609020204030204"/>
+                    <a:cs typeface="Consolas" panose="020B0609020204030204"/>
                   </a:rPr>
                   <a:t>CharacterController</a:t>
                 </a:r>
+                <a:endParaRPr lang="en-US" sz="1350" dirty="0">
+                  <a:solidFill>
+                    <a:schemeClr val="dk1"/>
+                  </a:solidFill>
+                  <a:latin typeface="Consolas" panose="020B0609020204030204"/>
+                  <a:ea typeface="Consolas" panose="020B0609020204030204"/>
+                  <a:cs typeface="Consolas" panose="020B0609020204030204"/>
+                </a:endParaRPr>
               </a:p>
             </p:txBody>
           </p:sp>
@@ -11326,6 +12060,14 @@
                   </a:rPr>
                   <a:t>调整胶囊与台阶参数</a:t>
                 </a:r>
+                <a:endParaRPr lang="zh-CN" sz="1350" dirty="0">
+                  <a:solidFill>
+                    <a:schemeClr val="dk2"/>
+                  </a:solidFill>
+                  <a:latin typeface="+mn-lt"/>
+                  <a:ea typeface="+mn-ea"/>
+                  <a:cs typeface="+mn-cs"/>
+                </a:endParaRPr>
               </a:p>
             </p:txBody>
           </p:sp>
@@ -11397,12 +12139,20 @@
                     <a:solidFill>
                       <a:srgbClr val="FFFFFF"/>
                     </a:solidFill>
-                    <a:latin typeface="Consolas"/>
-                    <a:ea typeface="Consolas"/>
-                    <a:cs typeface="Consolas"/>
+                    <a:latin typeface="Consolas" panose="020B0609020204030204"/>
+                    <a:ea typeface="Consolas" panose="020B0609020204030204"/>
+                    <a:cs typeface="Consolas" panose="020B0609020204030204"/>
                   </a:rPr>
                   <a:t>3</a:t>
                 </a:r>
+                <a:endParaRPr lang="en-US" sz="1720" b="1" dirty="0">
+                  <a:solidFill>
+                    <a:srgbClr val="FFFFFF"/>
+                  </a:solidFill>
+                  <a:latin typeface="Consolas" panose="020B0609020204030204"/>
+                  <a:ea typeface="Consolas" panose="020B0609020204030204"/>
+                  <a:cs typeface="Consolas" panose="020B0609020204030204"/>
+                </a:endParaRPr>
               </a:p>
             </p:txBody>
           </p:sp>
@@ -11469,6 +12219,14 @@
                   </a:rPr>
                   <a:t>挂移动脚本</a:t>
                 </a:r>
+                <a:endParaRPr lang="zh-CN" sz="1720" b="1" dirty="0">
+                  <a:solidFill>
+                    <a:srgbClr val="8C5A00"/>
+                  </a:solidFill>
+                  <a:latin typeface="+mn-lt"/>
+                  <a:ea typeface="+mn-ea"/>
+                  <a:cs typeface="+mn-cs"/>
+                </a:endParaRPr>
               </a:p>
             </p:txBody>
           </p:sp>
@@ -11503,12 +12261,20 @@
                     <a:solidFill>
                       <a:schemeClr val="dk1"/>
                     </a:solidFill>
-                    <a:latin typeface="Consolas"/>
-                    <a:ea typeface="Consolas"/>
-                    <a:cs typeface="Consolas"/>
+                    <a:latin typeface="Consolas" panose="020B0609020204030204"/>
+                    <a:ea typeface="Consolas" panose="020B0609020204030204"/>
+                    <a:cs typeface="Consolas" panose="020B0609020204030204"/>
                   </a:rPr>
                   <a:t>SimpleCharacterMover</a:t>
                 </a:r>
+                <a:endParaRPr lang="en-US" sz="1350" dirty="0">
+                  <a:solidFill>
+                    <a:schemeClr val="dk1"/>
+                  </a:solidFill>
+                  <a:latin typeface="Consolas" panose="020B0609020204030204"/>
+                  <a:ea typeface="Consolas" panose="020B0609020204030204"/>
+                  <a:cs typeface="Consolas" panose="020B0609020204030204"/>
+                </a:endParaRPr>
               </a:p>
             </p:txBody>
           </p:sp>
@@ -11549,6 +12315,14 @@
                   </a:rPr>
                   <a:t>WASD + 空格</a:t>
                 </a:r>
+                <a:endParaRPr lang="zh-CN" sz="1350" dirty="0">
+                  <a:solidFill>
+                    <a:schemeClr val="dk2"/>
+                  </a:solidFill>
+                  <a:latin typeface="+mn-lt"/>
+                  <a:ea typeface="+mn-ea"/>
+                  <a:cs typeface="+mn-cs"/>
+                </a:endParaRPr>
               </a:p>
             </p:txBody>
           </p:sp>
@@ -11620,12 +12394,20 @@
                     <a:solidFill>
                       <a:srgbClr val="FFFFFF"/>
                     </a:solidFill>
-                    <a:latin typeface="Consolas"/>
-                    <a:ea typeface="Consolas"/>
-                    <a:cs typeface="Consolas"/>
+                    <a:latin typeface="Consolas" panose="020B0609020204030204"/>
+                    <a:ea typeface="Consolas" panose="020B0609020204030204"/>
+                    <a:cs typeface="Consolas" panose="020B0609020204030204"/>
                   </a:rPr>
                   <a:t>4</a:t>
                 </a:r>
+                <a:endParaRPr lang="en-US" sz="1720" b="1" dirty="0">
+                  <a:solidFill>
+                    <a:srgbClr val="FFFFFF"/>
+                  </a:solidFill>
+                  <a:latin typeface="Consolas" panose="020B0609020204030204"/>
+                  <a:ea typeface="Consolas" panose="020B0609020204030204"/>
+                  <a:cs typeface="Consolas" panose="020B0609020204030204"/>
+                </a:endParaRPr>
               </a:p>
             </p:txBody>
           </p:sp>
@@ -11692,6 +12474,14 @@
                   </a:rPr>
                   <a:t>连接摄像机</a:t>
                 </a:r>
+                <a:endParaRPr lang="zh-CN" sz="1720" b="1" dirty="0">
+                  <a:solidFill>
+                    <a:srgbClr val="2F8F6A"/>
+                  </a:solidFill>
+                  <a:latin typeface="+mn-lt"/>
+                  <a:ea typeface="+mn-ea"/>
+                  <a:cs typeface="+mn-cs"/>
+                </a:endParaRPr>
               </a:p>
             </p:txBody>
           </p:sp>
@@ -11726,12 +12516,20 @@
                     <a:solidFill>
                       <a:schemeClr val="dk1"/>
                     </a:solidFill>
-                    <a:latin typeface="Consolas"/>
-                    <a:ea typeface="Consolas"/>
-                    <a:cs typeface="Consolas"/>
+                    <a:latin typeface="Consolas" panose="020B0609020204030204"/>
+                    <a:ea typeface="Consolas" panose="020B0609020204030204"/>
+                    <a:cs typeface="Consolas" panose="020B0609020204030204"/>
                   </a:rPr>
                   <a:t>SimpleCameraFollow</a:t>
                 </a:r>
+                <a:endParaRPr lang="en-US" sz="1350" dirty="0">
+                  <a:solidFill>
+                    <a:schemeClr val="dk1"/>
+                  </a:solidFill>
+                  <a:latin typeface="Consolas" panose="020B0609020204030204"/>
+                  <a:ea typeface="Consolas" panose="020B0609020204030204"/>
+                  <a:cs typeface="Consolas" panose="020B0609020204030204"/>
+                </a:endParaRPr>
               </a:p>
             </p:txBody>
           </p:sp>
@@ -11772,6 +12570,14 @@
                   </a:rPr>
                   <a:t>Inspector 连接 target</a:t>
                 </a:r>
+                <a:endParaRPr lang="zh-CN" sz="1350" dirty="0">
+                  <a:solidFill>
+                    <a:schemeClr val="dk2"/>
+                  </a:solidFill>
+                  <a:latin typeface="+mn-lt"/>
+                  <a:ea typeface="+mn-ea"/>
+                  <a:cs typeface="+mn-cs"/>
+                </a:endParaRPr>
               </a:p>
             </p:txBody>
           </p:sp>
@@ -11843,12 +12649,20 @@
                     <a:solidFill>
                       <a:srgbClr val="FFFFFF"/>
                     </a:solidFill>
-                    <a:latin typeface="Consolas"/>
-                    <a:ea typeface="Consolas"/>
-                    <a:cs typeface="Consolas"/>
+                    <a:latin typeface="Consolas" panose="020B0609020204030204"/>
+                    <a:ea typeface="Consolas" panose="020B0609020204030204"/>
+                    <a:cs typeface="Consolas" panose="020B0609020204030204"/>
                   </a:rPr>
                   <a:t>5</a:t>
                 </a:r>
+                <a:endParaRPr lang="en-US" sz="1720" b="1" dirty="0">
+                  <a:solidFill>
+                    <a:srgbClr val="FFFFFF"/>
+                  </a:solidFill>
+                  <a:latin typeface="Consolas" panose="020B0609020204030204"/>
+                  <a:ea typeface="Consolas" panose="020B0609020204030204"/>
+                  <a:cs typeface="Consolas" panose="020B0609020204030204"/>
+                </a:endParaRPr>
               </a:p>
             </p:txBody>
           </p:sp>
@@ -11915,6 +12729,14 @@
                   </a:rPr>
                   <a:t>播放并验证</a:t>
                 </a:r>
+                <a:endParaRPr lang="zh-CN" sz="1720" b="1" dirty="0">
+                  <a:solidFill>
+                    <a:srgbClr val="D85C45"/>
+                  </a:solidFill>
+                  <a:latin typeface="+mn-lt"/>
+                  <a:ea typeface="+mn-ea"/>
+                  <a:cs typeface="+mn-cs"/>
+                </a:endParaRPr>
               </a:p>
             </p:txBody>
           </p:sp>
@@ -11955,6 +12777,14 @@
                   </a:rPr>
                   <a:t>移动 / 跳跃 / 碰撞</a:t>
                 </a:r>
+                <a:endParaRPr lang="zh-CN" sz="1420" dirty="0">
+                  <a:solidFill>
+                    <a:schemeClr val="dk1"/>
+                  </a:solidFill>
+                  <a:latin typeface="+mn-lt"/>
+                  <a:ea typeface="+mn-ea"/>
+                  <a:cs typeface="+mn-cs"/>
+                </a:endParaRPr>
               </a:p>
             </p:txBody>
           </p:sp>
@@ -11995,6 +12825,14 @@
                   </a:rPr>
                   <a:t>跟随稳定即闭环完成</a:t>
                 </a:r>
+                <a:endParaRPr lang="zh-CN" sz="1350" dirty="0">
+                  <a:solidFill>
+                    <a:schemeClr val="dk2"/>
+                  </a:solidFill>
+                  <a:latin typeface="+mn-lt"/>
+                  <a:ea typeface="+mn-ea"/>
+                  <a:cs typeface="+mn-cs"/>
+                </a:endParaRPr>
               </a:p>
             </p:txBody>
           </p:sp>
@@ -12038,46 +12876,6 @@
       </p:sp>
       <p:sp>
         <p:nvSpPr>
-          <p:cNvPr id="66" name="TextBox 66"/>
-          <p:cNvSpPr txBox="1"/>
-          <p:nvPr/>
-        </p:nvSpPr>
-        <p:spPr>
-          <a:xfrm>
-            <a:off x="564642" y="6521768"/>
-            <a:ext cx="3312825" cy="264033"/>
-          </a:xfrm>
-          <a:prstGeom prst="rect">
-            <a:avLst/>
-          </a:prstGeom>
-          <a:noFill/>
-          <a:ln>
-            <a:noFill/>
-          </a:ln>
-        </p:spPr>
-        <p:txBody>
-          <a:bodyPr wrap="none" lIns="0" tIns="0" rIns="0" bIns="0" anchor="t" anchorCtr="0">
-            <a:spAutoFit/>
-          </a:bodyPr>
-          <a:lstStyle/>
-          <a:p>
-            <a:pPr algn="l"/>
-            <a:r>
-              <a:rPr lang="zh-CN" sz="1350" dirty="0">
-                <a:solidFill>
-                  <a:schemeClr val="accent5"/>
-                </a:solidFill>
-                <a:latin typeface="+mn-lt"/>
-                <a:ea typeface="+mn-ea"/>
-                <a:cs typeface="+mn-cs"/>
-              </a:rPr>
-              <a:t>Unity 语法基础 · 角色与摄像机场景闭环</a:t>
-            </a:r>
-          </a:p>
-        </p:txBody>
-      </p:sp>
-      <p:sp>
-        <p:nvSpPr>
           <p:cNvPr id="67" name="TextBox 67"/>
           <p:cNvSpPr txBox="1"/>
           <p:nvPr/>
@@ -12107,12 +12905,19 @@
                 <a:solidFill>
                   <a:schemeClr val="accent5"/>
                 </a:solidFill>
-                <a:latin typeface="Consolas"/>
-                <a:ea typeface="Consolas"/>
-                <a:cs typeface="Consolas"/>
+                <a:latin typeface="Consolas" panose="020B0609020204030204"/>
+                <a:ea typeface="Consolas" panose="020B0609020204030204"/>
+                <a:cs typeface="Consolas" panose="020B0609020204030204"/>
               </a:rPr>
-              <a:t>13</a:t>
             </a:fld>
+            <a:endParaRPr lang="en-US" sz="1350" dirty="0">
+              <a:solidFill>
+                <a:schemeClr val="accent5"/>
+              </a:solidFill>
+              <a:latin typeface="Consolas" panose="020B0609020204030204"/>
+              <a:ea typeface="Consolas" panose="020B0609020204030204"/>
+              <a:cs typeface="Consolas" panose="020B0609020204030204"/>
+            </a:endParaRPr>
           </a:p>
         </p:txBody>
       </p:sp>
@@ -12121,14 +12926,23 @@
   <p:clrMapOvr>
     <a:masterClrMapping/>
   </p:clrMapOvr>
-  <p:transition p14:dur="400">
-    <p:fade/>
-  </p:transition>
+  <mc:AlternateContent xmlns:mc="http://schemas.openxmlformats.org/markup-compatibility/2006">
+    <mc:Choice xmlns:p14="http://schemas.microsoft.com/office/powerpoint/2010/main" Requires="p14">
+      <p:transition p14:dur="400">
+        <p:fade/>
+      </p:transition>
+    </mc:Choice>
+    <mc:Fallback>
+      <p:transition>
+        <p:fade/>
+      </p:transition>
+    </mc:Fallback>
+  </mc:AlternateContent>
 </p:sld>
 </file>
 
 <file path=ppt/slides/slide2.xml><?xml version="1.0" encoding="utf-8"?>
-<p:sld xmlns:a="http://schemas.openxmlformats.org/drawingml/2006/main" xmlns:p="http://schemas.openxmlformats.org/presentationml/2006/main" xmlns:p14="http://schemas.microsoft.com/office/powerpoint/2010/main">
+<p:sld xmlns:a="http://schemas.openxmlformats.org/drawingml/2006/main" xmlns:r="http://schemas.openxmlformats.org/officeDocument/2006/relationships" xmlns:p="http://schemas.openxmlformats.org/presentationml/2006/main">
   <p:cSld>
     <p:spTree>
       <p:nvGrpSpPr>
@@ -12195,6 +13009,14 @@
                 </a:rPr>
                 <a:t>从“脚本挂上去”走到“角色跑起来”</a:t>
               </a:r>
+              <a:endParaRPr lang="zh-CN" sz="4200" b="1" dirty="0">
+                <a:solidFill>
+                  <a:schemeClr val="dk1"/>
+                </a:solidFill>
+                <a:latin typeface="+mj-lt"/>
+                <a:ea typeface="+mj-ea"/>
+                <a:cs typeface="+mj-cs"/>
+              </a:endParaRPr>
             </a:p>
           </p:txBody>
         </p:sp>
@@ -12356,12 +13178,20 @@
                     <a:solidFill>
                       <a:srgbClr val="FFFFFF"/>
                     </a:solidFill>
-                    <a:latin typeface="Consolas"/>
-                    <a:ea typeface="Consolas"/>
-                    <a:cs typeface="Consolas"/>
+                    <a:latin typeface="Consolas" panose="020B0609020204030204"/>
+                    <a:ea typeface="Consolas" panose="020B0609020204030204"/>
+                    <a:cs typeface="Consolas" panose="020B0609020204030204"/>
                   </a:rPr>
                   <a:t>01</a:t>
                 </a:r>
+                <a:endParaRPr lang="en-US" sz="1800" b="1" dirty="0">
+                  <a:solidFill>
+                    <a:srgbClr val="FFFFFF"/>
+                  </a:solidFill>
+                  <a:latin typeface="Consolas" panose="020B0609020204030204"/>
+                  <a:ea typeface="Consolas" panose="020B0609020204030204"/>
+                  <a:cs typeface="Consolas" panose="020B0609020204030204"/>
+                </a:endParaRPr>
               </a:p>
             </p:txBody>
           </p:sp>
@@ -12402,6 +13232,14 @@
                   </a:rPr>
                   <a:t>脚本如何成为组件</a:t>
                 </a:r>
+                <a:endParaRPr lang="zh-CN" sz="2400" b="1" dirty="0">
+                  <a:solidFill>
+                    <a:schemeClr val="dk1"/>
+                  </a:solidFill>
+                  <a:latin typeface="+mn-lt"/>
+                  <a:ea typeface="+mn-ea"/>
+                  <a:cs typeface="+mn-cs"/>
+                </a:endParaRPr>
               </a:p>
             </p:txBody>
           </p:sp>
@@ -12442,6 +13280,14 @@
                   </a:rPr>
                   <a:t>MonoBehaviour、文件名与类名、三个常用入口</a:t>
                 </a:r>
+                <a:endParaRPr lang="zh-CN" sz="1800" dirty="0">
+                  <a:solidFill>
+                    <a:schemeClr val="dk2"/>
+                  </a:solidFill>
+                  <a:latin typeface="+mn-lt"/>
+                  <a:ea typeface="+mn-ea"/>
+                  <a:cs typeface="+mn-cs"/>
+                </a:endParaRPr>
               </a:p>
             </p:txBody>
           </p:sp>
@@ -12513,12 +13359,20 @@
                     <a:solidFill>
                       <a:srgbClr val="FFFFFF"/>
                     </a:solidFill>
-                    <a:latin typeface="Consolas"/>
-                    <a:ea typeface="Consolas"/>
-                    <a:cs typeface="Consolas"/>
+                    <a:latin typeface="Consolas" panose="020B0609020204030204"/>
+                    <a:ea typeface="Consolas" panose="020B0609020204030204"/>
+                    <a:cs typeface="Consolas" panose="020B0609020204030204"/>
                   </a:rPr>
                   <a:t>02</a:t>
                 </a:r>
+                <a:endParaRPr lang="en-US" sz="1800" b="1" dirty="0">
+                  <a:solidFill>
+                    <a:srgbClr val="FFFFFF"/>
+                  </a:solidFill>
+                  <a:latin typeface="Consolas" panose="020B0609020204030204"/>
+                  <a:ea typeface="Consolas" panose="020B0609020204030204"/>
+                  <a:cs typeface="Consolas" panose="020B0609020204030204"/>
+                </a:endParaRPr>
               </a:p>
             </p:txBody>
           </p:sp>
@@ -12559,6 +13413,14 @@
                   </a:rPr>
                   <a:t>生命周期与三个更新循环</a:t>
                 </a:r>
+                <a:endParaRPr lang="zh-CN" sz="2400" b="1" dirty="0">
+                  <a:solidFill>
+                    <a:schemeClr val="dk1"/>
+                  </a:solidFill>
+                  <a:latin typeface="+mn-lt"/>
+                  <a:ea typeface="+mn-ea"/>
+                  <a:cs typeface="+mn-cs"/>
+                </a:endParaRPr>
               </a:p>
             </p:txBody>
           </p:sp>
@@ -12599,6 +13461,14 @@
                   </a:rPr>
                   <a:t>Awake 到 OnDestroy；Update / Fixed / Late</a:t>
                 </a:r>
+                <a:endParaRPr lang="zh-CN" sz="1800" dirty="0">
+                  <a:solidFill>
+                    <a:schemeClr val="dk2"/>
+                  </a:solidFill>
+                  <a:latin typeface="+mn-lt"/>
+                  <a:ea typeface="+mn-ea"/>
+                  <a:cs typeface="+mn-cs"/>
+                </a:endParaRPr>
               </a:p>
             </p:txBody>
           </p:sp>
@@ -12670,12 +13540,20 @@
                     <a:solidFill>
                       <a:srgbClr val="FFFFFF"/>
                     </a:solidFill>
-                    <a:latin typeface="Consolas"/>
-                    <a:ea typeface="Consolas"/>
-                    <a:cs typeface="Consolas"/>
+                    <a:latin typeface="Consolas" panose="020B0609020204030204"/>
+                    <a:ea typeface="Consolas" panose="020B0609020204030204"/>
+                    <a:cs typeface="Consolas" panose="020B0609020204030204"/>
                   </a:rPr>
                   <a:t>03</a:t>
                 </a:r>
+                <a:endParaRPr lang="en-US" sz="1800" b="1" dirty="0">
+                  <a:solidFill>
+                    <a:srgbClr val="FFFFFF"/>
+                  </a:solidFill>
+                  <a:latin typeface="Consolas" panose="020B0609020204030204"/>
+                  <a:ea typeface="Consolas" panose="020B0609020204030204"/>
+                  <a:cs typeface="Consolas" panose="020B0609020204030204"/>
+                </a:endParaRPr>
               </a:p>
             </p:txBody>
           </p:sp>
@@ -12716,6 +13594,14 @@
                   </a:rPr>
                   <a:t>Transform 与 GameObject</a:t>
                 </a:r>
+                <a:endParaRPr lang="zh-CN" sz="2400" b="1" dirty="0">
+                  <a:solidFill>
+                    <a:schemeClr val="dk1"/>
+                  </a:solidFill>
+                  <a:latin typeface="+mn-lt"/>
+                  <a:ea typeface="+mn-ea"/>
+                  <a:cs typeface="+mn-cs"/>
+                </a:endParaRPr>
               </a:p>
             </p:txBody>
           </p:sp>
@@ -12756,6 +13642,14 @@
                   </a:rPr>
                   <a:t>空间、层级、组件引用、对象创建与销毁</a:t>
                 </a:r>
+                <a:endParaRPr lang="zh-CN" sz="1800" dirty="0">
+                  <a:solidFill>
+                    <a:schemeClr val="dk2"/>
+                  </a:solidFill>
+                  <a:latin typeface="+mn-lt"/>
+                  <a:ea typeface="+mn-ea"/>
+                  <a:cs typeface="+mn-cs"/>
+                </a:endParaRPr>
               </a:p>
             </p:txBody>
           </p:sp>
@@ -12827,12 +13721,20 @@
                     <a:solidFill>
                       <a:srgbClr val="FFFFFF"/>
                     </a:solidFill>
-                    <a:latin typeface="Consolas"/>
-                    <a:ea typeface="Consolas"/>
-                    <a:cs typeface="Consolas"/>
+                    <a:latin typeface="Consolas" panose="020B0609020204030204"/>
+                    <a:ea typeface="Consolas" panose="020B0609020204030204"/>
+                    <a:cs typeface="Consolas" panose="020B0609020204030204"/>
                   </a:rPr>
                   <a:t>04</a:t>
                 </a:r>
+                <a:endParaRPr lang="en-US" sz="1800" b="1" dirty="0">
+                  <a:solidFill>
+                    <a:srgbClr val="FFFFFF"/>
+                  </a:solidFill>
+                  <a:latin typeface="Consolas" panose="020B0609020204030204"/>
+                  <a:ea typeface="Consolas" panose="020B0609020204030204"/>
+                  <a:cs typeface="Consolas" panose="020B0609020204030204"/>
+                </a:endParaRPr>
               </a:p>
             </p:txBody>
           </p:sp>
@@ -12873,6 +13775,14 @@
                   </a:rPr>
                   <a:t>CharacterController</a:t>
                 </a:r>
+                <a:endParaRPr lang="en-US" sz="2400" b="1" dirty="0">
+                  <a:solidFill>
+                    <a:schemeClr val="dk1"/>
+                  </a:solidFill>
+                  <a:latin typeface="+mn-lt"/>
+                  <a:ea typeface="+mn-ea"/>
+                  <a:cs typeface="+mn-cs"/>
+                </a:endParaRPr>
               </a:p>
             </p:txBody>
           </p:sp>
@@ -12913,6 +13823,14 @@
                   </a:rPr>
                   <a:t>Move、重力、跳跃、碰撞与选择边界</a:t>
                 </a:r>
+                <a:endParaRPr lang="zh-CN" sz="1800" dirty="0">
+                  <a:solidFill>
+                    <a:schemeClr val="dk2"/>
+                  </a:solidFill>
+                  <a:latin typeface="+mn-lt"/>
+                  <a:ea typeface="+mn-ea"/>
+                  <a:cs typeface="+mn-cs"/>
+                </a:endParaRPr>
               </a:p>
             </p:txBody>
           </p:sp>
@@ -12984,12 +13902,20 @@
                     <a:solidFill>
                       <a:srgbClr val="FFFFFF"/>
                     </a:solidFill>
-                    <a:latin typeface="Consolas"/>
-                    <a:ea typeface="Consolas"/>
-                    <a:cs typeface="Consolas"/>
+                    <a:latin typeface="Consolas" panose="020B0609020204030204"/>
+                    <a:ea typeface="Consolas" panose="020B0609020204030204"/>
+                    <a:cs typeface="Consolas" panose="020B0609020204030204"/>
                   </a:rPr>
                   <a:t>05</a:t>
                 </a:r>
+                <a:endParaRPr lang="en-US" sz="1800" b="1" dirty="0">
+                  <a:solidFill>
+                    <a:srgbClr val="FFFFFF"/>
+                  </a:solidFill>
+                  <a:latin typeface="Consolas" panose="020B0609020204030204"/>
+                  <a:ea typeface="Consolas" panose="020B0609020204030204"/>
+                  <a:cs typeface="Consolas" panose="020B0609020204030204"/>
+                </a:endParaRPr>
               </a:p>
             </p:txBody>
           </p:sp>
@@ -13030,6 +13956,14 @@
                   </a:rPr>
                   <a:t>角色 + 摄像机的场景闭环</a:t>
                 </a:r>
+                <a:endParaRPr lang="zh-CN" sz="2400" b="1" dirty="0">
+                  <a:solidFill>
+                    <a:schemeClr val="dk1"/>
+                  </a:solidFill>
+                  <a:latin typeface="+mn-lt"/>
+                  <a:ea typeface="+mn-ea"/>
+                  <a:cs typeface="+mn-cs"/>
+                </a:endParaRPr>
               </a:p>
             </p:txBody>
           </p:sp>
@@ -13070,464 +14004,18 @@
                   </a:rPr>
                   <a:t>Player 先移动，Camera 后跟随</a:t>
                 </a:r>
+                <a:endParaRPr lang="zh-CN" sz="1800" dirty="0">
+                  <a:solidFill>
+                    <a:schemeClr val="dk2"/>
+                  </a:solidFill>
+                  <a:latin typeface="+mn-lt"/>
+                  <a:ea typeface="+mn-ea"/>
+                  <a:cs typeface="+mn-cs"/>
+                </a:endParaRPr>
               </a:p>
             </p:txBody>
           </p:sp>
         </p:grpSp>
-      </p:grpSp>
-      <p:grpSp>
-        <p:nvGrpSpPr>
-          <p:cNvPr id="44" name="Group 44"/>
-          <p:cNvGrpSpPr/>
-          <p:nvPr/>
-        </p:nvGrpSpPr>
-        <p:grpSpPr>
-          <a:xfrm>
-            <a:off x="8239125" y="1752600"/>
-            <a:ext cx="3286125" cy="3429000"/>
-            <a:chOff x="8239125" y="1752600"/>
-            <a:chExt cx="3286125" cy="3429000"/>
-          </a:xfrm>
-        </p:grpSpPr>
-        <p:sp>
-          <p:nvSpPr>
-            <p:cNvPr id="32" name="Rectangle 32"/>
-            <p:cNvSpPr/>
-            <p:nvPr/>
-          </p:nvSpPr>
-          <p:spPr>
-            <a:xfrm>
-              <a:off x="8239125" y="1752600"/>
-              <a:ext cx="3286125" cy="3429000"/>
-            </a:xfrm>
-            <a:prstGeom prst="roundRect">
-              <a:avLst>
-                <a:gd name="adj" fmla="val 7536"/>
-              </a:avLst>
-            </a:prstGeom>
-            <a:solidFill>
-              <a:srgbClr val="FFF9E9"/>
-            </a:solidFill>
-            <a:ln w="28575">
-              <a:solidFill>
-                <a:schemeClr val="accent4"/>
-              </a:solidFill>
-            </a:ln>
-          </p:spPr>
-        </p:sp>
-        <p:grpSp>
-          <p:nvGrpSpPr>
-            <p:cNvPr id="37" name="Group 37"/>
-            <p:cNvGrpSpPr/>
-            <p:nvPr/>
-          </p:nvGrpSpPr>
-          <p:grpSpPr>
-            <a:xfrm>
-              <a:off x="9658350" y="2243137"/>
-              <a:ext cx="438150" cy="657225"/>
-              <a:chOff x="9658350" y="2243137"/>
-              <a:chExt cx="438150" cy="657225"/>
-            </a:xfrm>
-          </p:grpSpPr>
-          <p:sp>
-            <p:nvSpPr>
-              <p:cNvPr id="33" name="Freeform 33"/>
-              <p:cNvSpPr/>
-              <p:nvPr/>
-            </p:nvSpPr>
-            <p:spPr>
-              <a:xfrm>
-                <a:off x="9877425" y="2243137"/>
-                <a:ext cx="73025" cy="73025"/>
-              </a:xfrm>
-              <a:custGeom>
-                <a:avLst/>
-                <a:gdLst/>
-                <a:ahLst/>
-                <a:cxnLst/>
-                <a:rect l="l" t="t" r="r" b="b"/>
-                <a:pathLst>
-                  <a:path w="73025" h="73025">
-                    <a:moveTo>
-                      <a:pt x="0" y="36512"/>
-                    </a:moveTo>
-                    <a:cubicBezTo>
-                      <a:pt x="0" y="56678"/>
-                      <a:pt x="16347" y="73025"/>
-                      <a:pt x="36512" y="73025"/>
-                    </a:cubicBezTo>
-                    <a:cubicBezTo>
-                      <a:pt x="56678" y="73025"/>
-                      <a:pt x="73025" y="56678"/>
-                      <a:pt x="73025" y="36512"/>
-                    </a:cubicBezTo>
-                    <a:cubicBezTo>
-                      <a:pt x="73025" y="16347"/>
-                      <a:pt x="56678" y="0"/>
-                      <a:pt x="36512" y="0"/>
-                    </a:cubicBezTo>
-                    <a:cubicBezTo>
-                      <a:pt x="16347" y="0"/>
-                      <a:pt x="0" y="16347"/>
-                      <a:pt x="0" y="36512"/>
-                    </a:cubicBezTo>
-                  </a:path>
-                </a:pathLst>
-              </a:custGeom>
-              <a:noFill/>
-              <a:ln w="19050">
-                <a:solidFill>
-                  <a:schemeClr val="accent1"/>
-                </a:solidFill>
-              </a:ln>
-            </p:spPr>
-          </p:sp>
-          <p:sp>
-            <p:nvSpPr>
-              <p:cNvPr id="34" name="Freeform 34"/>
-              <p:cNvSpPr/>
-              <p:nvPr/>
-            </p:nvSpPr>
-            <p:spPr>
-              <a:xfrm>
-                <a:off x="9694862" y="2754312"/>
-                <a:ext cx="109537" cy="146050"/>
-              </a:xfrm>
-              <a:custGeom>
-                <a:avLst/>
-                <a:gdLst/>
-                <a:ahLst/>
-                <a:cxnLst/>
-                <a:rect l="l" t="t" r="r" b="b"/>
-                <a:pathLst>
-                  <a:path w="109537" h="146050">
-                    <a:moveTo>
-                      <a:pt x="0" y="146050"/>
-                    </a:moveTo>
-                    <a:lnTo>
-                      <a:pt x="109537" y="0"/>
-                    </a:lnTo>
-                  </a:path>
-                </a:pathLst>
-              </a:custGeom>
-              <a:noFill/>
-              <a:ln w="19050">
-                <a:solidFill>
-                  <a:schemeClr val="accent1"/>
-                </a:solidFill>
-              </a:ln>
-            </p:spPr>
-          </p:sp>
-          <p:sp>
-            <p:nvSpPr>
-              <p:cNvPr id="35" name="Freeform 35"/>
-              <p:cNvSpPr/>
-              <p:nvPr/>
-            </p:nvSpPr>
-            <p:spPr>
-              <a:xfrm>
-                <a:off x="9840912" y="2425700"/>
-                <a:ext cx="182562" cy="474662"/>
-              </a:xfrm>
-              <a:custGeom>
-                <a:avLst/>
-                <a:gdLst/>
-                <a:ahLst/>
-                <a:cxnLst/>
-                <a:rect l="l" t="t" r="r" b="b"/>
-                <a:pathLst>
-                  <a:path w="182562" h="474662">
-                    <a:moveTo>
-                      <a:pt x="182562" y="474662"/>
-                    </a:moveTo>
-                    <a:lnTo>
-                      <a:pt x="109537" y="328612"/>
-                    </a:lnTo>
-                    <a:lnTo>
-                      <a:pt x="0" y="219075"/>
-                    </a:lnTo>
-                    <a:lnTo>
-                      <a:pt x="36512" y="0"/>
-                    </a:lnTo>
-                  </a:path>
-                </a:pathLst>
-              </a:custGeom>
-              <a:noFill/>
-              <a:ln w="19050">
-                <a:solidFill>
-                  <a:schemeClr val="accent1"/>
-                </a:solidFill>
-              </a:ln>
-            </p:spPr>
-          </p:sp>
-          <p:sp>
-            <p:nvSpPr>
-              <p:cNvPr id="36" name="Freeform 36"/>
-              <p:cNvSpPr/>
-              <p:nvPr/>
-            </p:nvSpPr>
-            <p:spPr>
-              <a:xfrm>
-                <a:off x="9658350" y="2425700"/>
-                <a:ext cx="438150" cy="146050"/>
-              </a:xfrm>
-              <a:custGeom>
-                <a:avLst/>
-                <a:gdLst/>
-                <a:ahLst/>
-                <a:cxnLst/>
-                <a:rect l="l" t="t" r="r" b="b"/>
-                <a:pathLst>
-                  <a:path w="438150" h="146050">
-                    <a:moveTo>
-                      <a:pt x="0" y="146050"/>
-                    </a:moveTo>
-                    <a:lnTo>
-                      <a:pt x="73025" y="36512"/>
-                    </a:lnTo>
-                    <a:lnTo>
-                      <a:pt x="219075" y="0"/>
-                    </a:lnTo>
-                    <a:lnTo>
-                      <a:pt x="328612" y="109537"/>
-                    </a:lnTo>
-                    <a:lnTo>
-                      <a:pt x="438150" y="146050"/>
-                    </a:lnTo>
-                  </a:path>
-                </a:pathLst>
-              </a:custGeom>
-              <a:noFill/>
-              <a:ln w="19050">
-                <a:solidFill>
-                  <a:schemeClr val="accent1"/>
-                </a:solidFill>
-              </a:ln>
-            </p:spPr>
-          </p:sp>
-        </p:grpSp>
-        <p:sp>
-          <p:nvSpPr>
-            <p:cNvPr id="38" name="Freeform 38"/>
-            <p:cNvSpPr/>
-            <p:nvPr/>
-          </p:nvSpPr>
-          <p:spPr>
-            <a:xfrm>
-              <a:off x="8829675" y="3133725"/>
-              <a:ext cx="2133600" cy="228600"/>
-            </a:xfrm>
-            <a:custGeom>
-              <a:avLst/>
-              <a:gdLst/>
-              <a:ahLst/>
-              <a:cxnLst/>
-              <a:rect l="l" t="t" r="r" b="b"/>
-              <a:pathLst>
-                <a:path w="2133600" h="228600">
-                  <a:moveTo>
-                    <a:pt x="0" y="123825"/>
-                  </a:moveTo>
-                  <a:cubicBezTo>
-                    <a:pt x="647700" y="0"/>
-                    <a:pt x="1514475" y="228600"/>
-                    <a:pt x="2133600" y="85725"/>
-                  </a:cubicBezTo>
-                </a:path>
-              </a:pathLst>
-            </a:custGeom>
-            <a:noFill/>
-            <a:ln w="57150" cap="rnd">
-              <a:solidFill>
-                <a:schemeClr val="accent2"/>
-              </a:solidFill>
-            </a:ln>
-          </p:spPr>
-        </p:sp>
-        <p:sp>
-          <p:nvSpPr>
-            <p:cNvPr id="39" name="TextBox 39"/>
-            <p:cNvSpPr txBox="1"/>
-            <p:nvPr/>
-          </p:nvSpPr>
-          <p:spPr>
-            <a:xfrm>
-              <a:off x="9057208" y="3423285"/>
-              <a:ext cx="1640434" cy="528066"/>
-            </a:xfrm>
-            <a:prstGeom prst="rect">
-              <a:avLst/>
-            </a:prstGeom>
-            <a:noFill/>
-            <a:ln>
-              <a:noFill/>
-            </a:ln>
-          </p:spPr>
-          <p:txBody>
-            <a:bodyPr wrap="none" lIns="0" tIns="0" rIns="0" bIns="0" anchor="t" anchorCtr="0">
-              <a:spAutoFit/>
-            </a:bodyPr>
-            <a:lstStyle/>
-            <a:p>
-              <a:pPr algn="ctr"/>
-              <a:r>
-                <a:rPr lang="zh-CN" sz="2700" b="1" dirty="0">
-                  <a:solidFill>
-                    <a:schemeClr val="accent1"/>
-                  </a:solidFill>
-                  <a:latin typeface="+mj-lt"/>
-                  <a:ea typeface="+mj-ea"/>
-                  <a:cs typeface="+mj-cs"/>
-                </a:rPr>
-                <a:t>最终目标</a:t>
-              </a:r>
-            </a:p>
-          </p:txBody>
-        </p:sp>
-        <p:sp>
-          <p:nvSpPr>
-            <p:cNvPr id="40" name="TextBox 40"/>
-            <p:cNvSpPr txBox="1"/>
-            <p:nvPr/>
-          </p:nvSpPr>
-          <p:spPr>
-            <a:xfrm>
-              <a:off x="8414385" y="3958590"/>
-              <a:ext cx="2926080" cy="352044"/>
-            </a:xfrm>
-            <a:prstGeom prst="rect">
-              <a:avLst/>
-            </a:prstGeom>
-            <a:noFill/>
-            <a:ln>
-              <a:noFill/>
-            </a:ln>
-          </p:spPr>
-          <p:txBody>
-            <a:bodyPr wrap="none" lIns="0" tIns="0" rIns="0" bIns="0" anchor="t" anchorCtr="0">
-              <a:spAutoFit/>
-            </a:bodyPr>
-            <a:lstStyle/>
-            <a:p>
-              <a:pPr algn="ctr"/>
-              <a:r>
-                <a:rPr lang="zh-CN" sz="1800" dirty="0">
-                  <a:solidFill>
-                    <a:schemeClr val="dk1"/>
-                  </a:solidFill>
-                  <a:latin typeface="+mn-lt"/>
-                  <a:ea typeface="+mn-ea"/>
-                  <a:cs typeface="+mn-cs"/>
-                </a:rPr>
-                <a:t>写出一个可移动、可跳跃、</a:t>
-              </a:r>
-            </a:p>
-          </p:txBody>
-        </p:sp>
-        <p:sp>
-          <p:nvSpPr>
-            <p:cNvPr id="41" name="TextBox 41"/>
-            <p:cNvSpPr txBox="1"/>
-            <p:nvPr/>
-          </p:nvSpPr>
-          <p:spPr>
-            <a:xfrm>
-              <a:off x="8293227" y="4282440"/>
-              <a:ext cx="3168396" cy="352044"/>
-            </a:xfrm>
-            <a:prstGeom prst="rect">
-              <a:avLst/>
-            </a:prstGeom>
-            <a:noFill/>
-            <a:ln>
-              <a:noFill/>
-            </a:ln>
-          </p:spPr>
-          <p:txBody>
-            <a:bodyPr wrap="none" lIns="0" tIns="0" rIns="0" bIns="0" anchor="t" anchorCtr="0">
-              <a:spAutoFit/>
-            </a:bodyPr>
-            <a:lstStyle/>
-            <a:p>
-              <a:pPr algn="ctr"/>
-              <a:r>
-                <a:rPr lang="zh-CN" sz="1800" dirty="0">
-                  <a:solidFill>
-                    <a:schemeClr val="dk1"/>
-                  </a:solidFill>
-                  <a:latin typeface="+mn-lt"/>
-                  <a:ea typeface="+mn-ea"/>
-                  <a:cs typeface="+mn-cs"/>
-                </a:rPr>
-                <a:t>能碰撞、被摄像机跟随的角色</a:t>
-              </a:r>
-            </a:p>
-          </p:txBody>
-        </p:sp>
-        <p:sp>
-          <p:nvSpPr>
-            <p:cNvPr id="42" name="Rectangle 42"/>
-            <p:cNvSpPr/>
-            <p:nvPr/>
-          </p:nvSpPr>
-          <p:spPr>
-            <a:xfrm>
-              <a:off x="8772525" y="4762500"/>
-              <a:ext cx="2219325" cy="266700"/>
-            </a:xfrm>
-            <a:prstGeom prst="roundRect">
-              <a:avLst>
-                <a:gd name="adj" fmla="val 50000"/>
-              </a:avLst>
-            </a:prstGeom>
-            <a:solidFill>
-              <a:srgbClr val="E8F5F0"/>
-            </a:solidFill>
-            <a:ln>
-              <a:noFill/>
-            </a:ln>
-          </p:spPr>
-        </p:sp>
-        <p:sp>
-          <p:nvSpPr>
-            <p:cNvPr id="43" name="TextBox 43"/>
-            <p:cNvSpPr txBox="1"/>
-            <p:nvPr/>
-          </p:nvSpPr>
-          <p:spPr>
-            <a:xfrm>
-              <a:off x="8912847" y="4816792"/>
-              <a:ext cx="1929155" cy="264033"/>
-            </a:xfrm>
-            <a:prstGeom prst="rect">
-              <a:avLst/>
-            </a:prstGeom>
-            <a:noFill/>
-            <a:ln>
-              <a:noFill/>
-            </a:ln>
-          </p:spPr>
-          <p:txBody>
-            <a:bodyPr wrap="none" lIns="0" tIns="0" rIns="0" bIns="0" anchor="t" anchorCtr="0">
-              <a:spAutoFit/>
-            </a:bodyPr>
-            <a:lstStyle/>
-            <a:p>
-              <a:pPr algn="ctr"/>
-              <a:r>
-                <a:rPr lang="en-US" sz="1350" b="1" dirty="0">
-                  <a:solidFill>
-                    <a:srgbClr val="2F8F6A"/>
-                  </a:solidFill>
-                  <a:latin typeface="Consolas"/>
-                  <a:ea typeface="Consolas"/>
-                  <a:cs typeface="Consolas"/>
-                </a:rPr>
-                <a:t>A RUNNABLE MINIMUM</a:t>
-              </a:r>
-            </a:p>
-          </p:txBody>
-        </p:sp>
       </p:grpSp>
       <p:sp>
         <p:nvSpPr>
@@ -13567,46 +14055,6 @@
       </p:sp>
       <p:sp>
         <p:nvSpPr>
-          <p:cNvPr id="46" name="TextBox 46"/>
-          <p:cNvSpPr txBox="1"/>
-          <p:nvPr/>
-        </p:nvSpPr>
-        <p:spPr>
-          <a:xfrm>
-            <a:off x="564642" y="6521768"/>
-            <a:ext cx="2210059" cy="264033"/>
-          </a:xfrm>
-          <a:prstGeom prst="rect">
-            <a:avLst/>
-          </a:prstGeom>
-          <a:noFill/>
-          <a:ln>
-            <a:noFill/>
-          </a:ln>
-        </p:spPr>
-        <p:txBody>
-          <a:bodyPr wrap="none" lIns="0" tIns="0" rIns="0" bIns="0" anchor="t" anchorCtr="0">
-            <a:spAutoFit/>
-          </a:bodyPr>
-          <a:lstStyle/>
-          <a:p>
-            <a:pPr algn="l"/>
-            <a:r>
-              <a:rPr lang="zh-CN" sz="1350" dirty="0">
-                <a:solidFill>
-                  <a:schemeClr val="accent5"/>
-                </a:solidFill>
-                <a:latin typeface="+mn-lt"/>
-                <a:ea typeface="+mn-ea"/>
-                <a:cs typeface="+mn-cs"/>
-              </a:rPr>
-              <a:t>Unity 语法基础 · 学习路线</a:t>
-            </a:r>
-          </a:p>
-        </p:txBody>
-      </p:sp>
-      <p:sp>
-        <p:nvSpPr>
           <p:cNvPr id="47" name="TextBox 47"/>
           <p:cNvSpPr txBox="1"/>
           <p:nvPr/>
@@ -13636,12 +14084,19 @@
                 <a:solidFill>
                   <a:schemeClr val="accent5"/>
                 </a:solidFill>
-                <a:latin typeface="Consolas"/>
-                <a:ea typeface="Consolas"/>
-                <a:cs typeface="Consolas"/>
+                <a:latin typeface="Consolas" panose="020B0609020204030204"/>
+                <a:ea typeface="Consolas" panose="020B0609020204030204"/>
+                <a:cs typeface="Consolas" panose="020B0609020204030204"/>
               </a:rPr>
-              <a:t>2</a:t>
             </a:fld>
+            <a:endParaRPr lang="en-US" sz="1350" dirty="0">
+              <a:solidFill>
+                <a:schemeClr val="accent5"/>
+              </a:solidFill>
+              <a:latin typeface="Consolas" panose="020B0609020204030204"/>
+              <a:ea typeface="Consolas" panose="020B0609020204030204"/>
+              <a:cs typeface="Consolas" panose="020B0609020204030204"/>
+            </a:endParaRPr>
           </a:p>
         </p:txBody>
       </p:sp>
@@ -13650,14 +14105,23 @@
   <p:clrMapOvr>
     <a:masterClrMapping/>
   </p:clrMapOvr>
-  <p:transition p14:dur="400">
-    <p:fade/>
-  </p:transition>
+  <mc:AlternateContent xmlns:mc="http://schemas.openxmlformats.org/markup-compatibility/2006">
+    <mc:Choice xmlns:p14="http://schemas.microsoft.com/office/powerpoint/2010/main" Requires="p14">
+      <p:transition p14:dur="400">
+        <p:fade/>
+      </p:transition>
+    </mc:Choice>
+    <mc:Fallback>
+      <p:transition>
+        <p:fade/>
+      </p:transition>
+    </mc:Fallback>
+  </mc:AlternateContent>
 </p:sld>
 </file>
 
 <file path=ppt/slides/slide3.xml><?xml version="1.0" encoding="utf-8"?>
-<p:sld xmlns:a="http://schemas.openxmlformats.org/drawingml/2006/main" xmlns:p="http://schemas.openxmlformats.org/presentationml/2006/main" xmlns:p14="http://schemas.microsoft.com/office/powerpoint/2010/main">
+<p:sld xmlns:a="http://schemas.openxmlformats.org/drawingml/2006/main" xmlns:r="http://schemas.openxmlformats.org/officeDocument/2006/relationships" xmlns:p="http://schemas.openxmlformats.org/presentationml/2006/main">
   <p:cSld>
     <p:spTree>
       <p:nvGrpSpPr>
@@ -13724,6 +14188,14 @@
                 </a:rPr>
                 <a:t>MonoBehaviour 让代码进入场景</a:t>
               </a:r>
+              <a:endParaRPr lang="zh-CN" sz="4200" b="1" dirty="0">
+                <a:solidFill>
+                  <a:schemeClr val="dk1"/>
+                </a:solidFill>
+                <a:latin typeface="+mj-lt"/>
+                <a:ea typeface="+mj-ea"/>
+                <a:cs typeface="+mj-cs"/>
+              </a:endParaRPr>
             </a:p>
           </p:txBody>
         </p:sp>
@@ -13764,6 +14236,14 @@
                 </a:rPr>
                 <a:t>GameObject 是容器；脚本挂载后，才会成为真正参与运行的组件</a:t>
               </a:r>
+              <a:endParaRPr lang="zh-CN" sz="1800" dirty="0">
+                <a:solidFill>
+                  <a:schemeClr val="dk2"/>
+                </a:solidFill>
+                <a:latin typeface="+mn-lt"/>
+                <a:ea typeface="+mn-ea"/>
+                <a:cs typeface="+mn-cs"/>
+              </a:endParaRPr>
             </a:p>
           </p:txBody>
         </p:sp>
@@ -14066,6 +14546,14 @@
                   </a:rPr>
                   <a:t>GameObject：RotatingCube</a:t>
                 </a:r>
+                <a:endParaRPr lang="zh-CN" sz="2700" b="1" dirty="0">
+                  <a:solidFill>
+                    <a:schemeClr val="accent1"/>
+                  </a:solidFill>
+                  <a:latin typeface="+mn-lt"/>
+                  <a:ea typeface="+mn-ea"/>
+                  <a:cs typeface="+mn-cs"/>
+                </a:endParaRPr>
               </a:p>
             </p:txBody>
           </p:sp>
@@ -14374,6 +14862,14 @@
                   </a:rPr>
                   <a:t>Transform</a:t>
                 </a:r>
+                <a:endParaRPr lang="en-US" sz="2250" b="1" dirty="0">
+                  <a:solidFill>
+                    <a:schemeClr val="dk1"/>
+                  </a:solidFill>
+                  <a:latin typeface="+mn-lt"/>
+                  <a:ea typeface="+mn-ea"/>
+                  <a:cs typeface="+mn-cs"/>
+                </a:endParaRPr>
               </a:p>
             </p:txBody>
           </p:sp>
@@ -14414,6 +14910,14 @@
                   </a:rPr>
                   <a:t>每个对象必备：位置、旋转、缩放、父子层级</a:t>
                 </a:r>
+                <a:endParaRPr lang="zh-CN" sz="1650" dirty="0">
+                  <a:solidFill>
+                    <a:schemeClr val="dk2"/>
+                  </a:solidFill>
+                  <a:latin typeface="+mn-lt"/>
+                  <a:ea typeface="+mn-ea"/>
+                  <a:cs typeface="+mn-cs"/>
+                </a:endParaRPr>
               </a:p>
             </p:txBody>
           </p:sp>
@@ -14690,6 +15194,14 @@
                   </a:rPr>
                   <a:t>MeshRenderer / Collider</a:t>
                 </a:r>
+                <a:endParaRPr lang="en-US" sz="2250" b="1" dirty="0">
+                  <a:solidFill>
+                    <a:schemeClr val="dk1"/>
+                  </a:solidFill>
+                  <a:latin typeface="+mn-lt"/>
+                  <a:ea typeface="+mn-ea"/>
+                  <a:cs typeface="+mn-cs"/>
+                </a:endParaRPr>
               </a:p>
             </p:txBody>
           </p:sp>
@@ -14730,6 +15242,14 @@
                   </a:rPr>
                   <a:t>显示与碰撞能力来自不同组件</a:t>
                 </a:r>
+                <a:endParaRPr lang="zh-CN" sz="1650" dirty="0">
+                  <a:solidFill>
+                    <a:schemeClr val="dk2"/>
+                  </a:solidFill>
+                  <a:latin typeface="+mn-lt"/>
+                  <a:ea typeface="+mn-ea"/>
+                  <a:cs typeface="+mn-cs"/>
+                </a:endParaRPr>
               </a:p>
             </p:txBody>
           </p:sp>
@@ -14940,6 +15460,14 @@
                   </a:rPr>
                   <a:t>Rotator.cs</a:t>
                 </a:r>
+                <a:endParaRPr lang="en-US" sz="2250" b="1" dirty="0">
+                  <a:solidFill>
+                    <a:srgbClr val="8C5A00"/>
+                  </a:solidFill>
+                  <a:latin typeface="+mn-lt"/>
+                  <a:ea typeface="+mn-ea"/>
+                  <a:cs typeface="+mn-cs"/>
+                </a:endParaRPr>
               </a:p>
             </p:txBody>
           </p:sp>
@@ -14974,12 +15502,20 @@
                     <a:solidFill>
                       <a:schemeClr val="dk1"/>
                     </a:solidFill>
-                    <a:latin typeface="Consolas"/>
-                    <a:ea typeface="Consolas"/>
-                    <a:cs typeface="Consolas"/>
+                    <a:latin typeface="Consolas" panose="020B0609020204030204"/>
+                    <a:ea typeface="Consolas" panose="020B0609020204030204"/>
+                    <a:cs typeface="Consolas" panose="020B0609020204030204"/>
                   </a:rPr>
                   <a:t>public class Rotator : MonoBehaviour</a:t>
                 </a:r>
+                <a:endParaRPr lang="en-US" sz="1650" b="1" dirty="0">
+                  <a:solidFill>
+                    <a:schemeClr val="dk1"/>
+                  </a:solidFill>
+                  <a:latin typeface="Consolas" panose="020B0609020204030204"/>
+                  <a:ea typeface="Consolas" panose="020B0609020204030204"/>
+                  <a:cs typeface="Consolas" panose="020B0609020204030204"/>
+                </a:endParaRPr>
               </a:p>
             </p:txBody>
           </p:sp>
@@ -15020,6 +15556,14 @@
                   </a:rPr>
                   <a:t>文件名必须与可挂载类名完全一致</a:t>
                 </a:r>
+                <a:endParaRPr lang="zh-CN" sz="1650" dirty="0">
+                  <a:solidFill>
+                    <a:schemeClr val="dk2"/>
+                  </a:solidFill>
+                  <a:latin typeface="+mn-lt"/>
+                  <a:ea typeface="+mn-ea"/>
+                  <a:cs typeface="+mn-cs"/>
+                </a:endParaRPr>
               </a:p>
             </p:txBody>
           </p:sp>
@@ -15094,12 +15638,20 @@
                   <a:solidFill>
                     <a:schemeClr val="accent2"/>
                   </a:solidFill>
-                  <a:latin typeface="Consolas"/>
-                  <a:ea typeface="Consolas"/>
-                  <a:cs typeface="Consolas"/>
+                  <a:latin typeface="Consolas" panose="020B0609020204030204"/>
+                  <a:ea typeface="Consolas" panose="020B0609020204030204"/>
+                  <a:cs typeface="Consolas" panose="020B0609020204030204"/>
                 </a:rPr>
                 <a:t>THREE ENTRY POINTS</a:t>
               </a:r>
+              <a:endParaRPr lang="en-US" sz="1650" dirty="0">
+                <a:solidFill>
+                  <a:schemeClr val="accent2"/>
+                </a:solidFill>
+                <a:latin typeface="Consolas" panose="020B0609020204030204"/>
+                <a:ea typeface="Consolas" panose="020B0609020204030204"/>
+                <a:cs typeface="Consolas" panose="020B0609020204030204"/>
+              </a:endParaRPr>
             </a:p>
           </p:txBody>
         </p:sp>
@@ -15134,12 +15686,20 @@
                   <a:solidFill>
                     <a:srgbClr val="FFFFFF"/>
                   </a:solidFill>
-                  <a:latin typeface="Consolas"/>
-                  <a:ea typeface="Consolas"/>
-                  <a:cs typeface="Consolas"/>
+                  <a:latin typeface="Consolas" panose="020B0609020204030204"/>
+                  <a:ea typeface="Consolas" panose="020B0609020204030204"/>
+                  <a:cs typeface="Consolas" panose="020B0609020204030204"/>
                 </a:rPr>
                 <a:t>transform</a:t>
               </a:r>
+              <a:endParaRPr lang="en-US" sz="2100" b="1" dirty="0">
+                <a:solidFill>
+                  <a:srgbClr val="FFFFFF"/>
+                </a:solidFill>
+                <a:latin typeface="Consolas" panose="020B0609020204030204"/>
+                <a:ea typeface="Consolas" panose="020B0609020204030204"/>
+                <a:cs typeface="Consolas" panose="020B0609020204030204"/>
+              </a:endParaRPr>
             </a:p>
           </p:txBody>
         </p:sp>
@@ -15180,6 +15740,14 @@
                 </a:rPr>
                 <a:t>当前 Transform</a:t>
               </a:r>
+              <a:endParaRPr lang="zh-CN" sz="1650" dirty="0">
+                <a:solidFill>
+                  <a:srgbClr val="D8D2C5"/>
+                </a:solidFill>
+                <a:latin typeface="+mn-lt"/>
+                <a:ea typeface="+mn-ea"/>
+                <a:cs typeface="+mn-cs"/>
+              </a:endParaRPr>
             </a:p>
           </p:txBody>
         </p:sp>
@@ -15214,12 +15782,20 @@
                   <a:solidFill>
                     <a:srgbClr val="FFFFFF"/>
                   </a:solidFill>
-                  <a:latin typeface="Consolas"/>
-                  <a:ea typeface="Consolas"/>
-                  <a:cs typeface="Consolas"/>
+                  <a:latin typeface="Consolas" panose="020B0609020204030204"/>
+                  <a:ea typeface="Consolas" panose="020B0609020204030204"/>
+                  <a:cs typeface="Consolas" panose="020B0609020204030204"/>
                 </a:rPr>
                 <a:t>gameObject</a:t>
               </a:r>
+              <a:endParaRPr lang="en-US" sz="2100" b="1" dirty="0">
+                <a:solidFill>
+                  <a:srgbClr val="FFFFFF"/>
+                </a:solidFill>
+                <a:latin typeface="Consolas" panose="020B0609020204030204"/>
+                <a:ea typeface="Consolas" panose="020B0609020204030204"/>
+                <a:cs typeface="Consolas" panose="020B0609020204030204"/>
+              </a:endParaRPr>
             </a:p>
           </p:txBody>
         </p:sp>
@@ -15260,6 +15836,14 @@
                 </a:rPr>
                 <a:t>当前对象实例</a:t>
               </a:r>
+              <a:endParaRPr lang="zh-CN" sz="1650" dirty="0">
+                <a:solidFill>
+                  <a:srgbClr val="D8D2C5"/>
+                </a:solidFill>
+                <a:latin typeface="+mn-lt"/>
+                <a:ea typeface="+mn-ea"/>
+                <a:cs typeface="+mn-cs"/>
+              </a:endParaRPr>
             </a:p>
           </p:txBody>
         </p:sp>
@@ -15294,12 +15878,20 @@
                   <a:solidFill>
                     <a:srgbClr val="FFFFFF"/>
                   </a:solidFill>
-                  <a:latin typeface="Consolas"/>
-                  <a:ea typeface="Consolas"/>
-                  <a:cs typeface="Consolas"/>
+                  <a:latin typeface="Consolas" panose="020B0609020204030204"/>
+                  <a:ea typeface="Consolas" panose="020B0609020204030204"/>
+                  <a:cs typeface="Consolas" panose="020B0609020204030204"/>
                 </a:rPr>
                 <a:t>GetComponent&lt;T&gt;()</a:t>
               </a:r>
+              <a:endParaRPr lang="en-US" sz="1880" b="1" dirty="0">
+                <a:solidFill>
+                  <a:srgbClr val="FFFFFF"/>
+                </a:solidFill>
+                <a:latin typeface="Consolas" panose="020B0609020204030204"/>
+                <a:ea typeface="Consolas" panose="020B0609020204030204"/>
+                <a:cs typeface="Consolas" panose="020B0609020204030204"/>
+              </a:endParaRPr>
             </a:p>
           </p:txBody>
         </p:sp>
@@ -15340,6 +15932,14 @@
                 </a:rPr>
                 <a:t>获取当前对象上的某种组件</a:t>
               </a:r>
+              <a:endParaRPr lang="zh-CN" sz="1650" dirty="0">
+                <a:solidFill>
+                  <a:srgbClr val="D8D2C5"/>
+                </a:solidFill>
+                <a:latin typeface="+mn-lt"/>
+                <a:ea typeface="+mn-ea"/>
+                <a:cs typeface="+mn-cs"/>
+              </a:endParaRPr>
             </a:p>
           </p:txBody>
         </p:sp>
@@ -15421,6 +16021,14 @@
                 </a:rPr>
                 <a:t>大小写不是装饰</a:t>
               </a:r>
+              <a:endParaRPr lang="zh-CN" sz="2250" b="1" dirty="0">
+                <a:solidFill>
+                  <a:srgbClr val="2F8F6A"/>
+                </a:solidFill>
+                <a:latin typeface="+mj-lt"/>
+                <a:ea typeface="+mj-ea"/>
+                <a:cs typeface="+mj-cs"/>
+              </a:endParaRPr>
             </a:p>
           </p:txBody>
         </p:sp>
@@ -15455,12 +16063,20 @@
                   <a:solidFill>
                     <a:schemeClr val="dk1"/>
                   </a:solidFill>
-                  <a:latin typeface="Consolas"/>
-                  <a:ea typeface="Consolas"/>
-                  <a:cs typeface="Consolas"/>
+                  <a:latin typeface="Consolas" panose="020B0609020204030204"/>
+                  <a:ea typeface="Consolas" panose="020B0609020204030204"/>
+                  <a:cs typeface="Consolas" panose="020B0609020204030204"/>
                 </a:rPr>
                 <a:t>GameObject / Transform</a:t>
               </a:r>
+              <a:endParaRPr lang="en-US" sz="1720" dirty="0">
+                <a:solidFill>
+                  <a:schemeClr val="dk1"/>
+                </a:solidFill>
+                <a:latin typeface="Consolas" panose="020B0609020204030204"/>
+                <a:ea typeface="Consolas" panose="020B0609020204030204"/>
+                <a:cs typeface="Consolas" panose="020B0609020204030204"/>
+              </a:endParaRPr>
             </a:p>
           </p:txBody>
         </p:sp>
@@ -15495,12 +16111,20 @@
                   <a:solidFill>
                     <a:schemeClr val="dk2"/>
                   </a:solidFill>
-                  <a:latin typeface="Consolas"/>
-                  <a:ea typeface="Consolas"/>
-                  <a:cs typeface="Consolas"/>
+                  <a:latin typeface="Consolas" panose="020B0609020204030204"/>
+                  <a:ea typeface="Consolas" panose="020B0609020204030204"/>
+                  <a:cs typeface="Consolas" panose="020B0609020204030204"/>
                 </a:rPr>
                 <a:t>gameObject / transform</a:t>
               </a:r>
+              <a:endParaRPr lang="en-US" sz="1720" dirty="0">
+                <a:solidFill>
+                  <a:schemeClr val="dk2"/>
+                </a:solidFill>
+                <a:latin typeface="Consolas" panose="020B0609020204030204"/>
+                <a:ea typeface="Consolas" panose="020B0609020204030204"/>
+                <a:cs typeface="Consolas" panose="020B0609020204030204"/>
+              </a:endParaRPr>
             </a:p>
           </p:txBody>
         </p:sp>
@@ -15543,46 +16167,6 @@
       </p:sp>
       <p:sp>
         <p:nvSpPr>
-          <p:cNvPr id="56" name="TextBox 56"/>
-          <p:cNvSpPr txBox="1"/>
-          <p:nvPr/>
-        </p:nvSpPr>
-        <p:spPr>
-          <a:xfrm>
-            <a:off x="564642" y="6521768"/>
-            <a:ext cx="2774661" cy="264033"/>
-          </a:xfrm>
-          <a:prstGeom prst="rect">
-            <a:avLst/>
-          </a:prstGeom>
-          <a:noFill/>
-          <a:ln>
-            <a:noFill/>
-          </a:ln>
-        </p:spPr>
-        <p:txBody>
-          <a:bodyPr wrap="none" lIns="0" tIns="0" rIns="0" bIns="0" anchor="t" anchorCtr="0">
-            <a:spAutoFit/>
-          </a:bodyPr>
-          <a:lstStyle/>
-          <a:p>
-            <a:pPr algn="l"/>
-            <a:r>
-              <a:rPr lang="zh-CN" sz="1350" dirty="0">
-                <a:solidFill>
-                  <a:schemeClr val="accent5"/>
-                </a:solidFill>
-                <a:latin typeface="+mn-lt"/>
-                <a:ea typeface="+mn-ea"/>
-                <a:cs typeface="+mn-cs"/>
-              </a:rPr>
-              <a:t>Unity 语法基础 · MonoBehaviour</a:t>
-            </a:r>
-          </a:p>
-        </p:txBody>
-      </p:sp>
-      <p:sp>
-        <p:nvSpPr>
           <p:cNvPr id="57" name="TextBox 57"/>
           <p:cNvSpPr txBox="1"/>
           <p:nvPr/>
@@ -15612,12 +16196,19 @@
                 <a:solidFill>
                   <a:schemeClr val="accent5"/>
                 </a:solidFill>
-                <a:latin typeface="Consolas"/>
-                <a:ea typeface="Consolas"/>
-                <a:cs typeface="Consolas"/>
+                <a:latin typeface="Consolas" panose="020B0609020204030204"/>
+                <a:ea typeface="Consolas" panose="020B0609020204030204"/>
+                <a:cs typeface="Consolas" panose="020B0609020204030204"/>
               </a:rPr>
-              <a:t>3</a:t>
             </a:fld>
+            <a:endParaRPr lang="en-US" sz="1350" dirty="0">
+              <a:solidFill>
+                <a:schemeClr val="accent5"/>
+              </a:solidFill>
+              <a:latin typeface="Consolas" panose="020B0609020204030204"/>
+              <a:ea typeface="Consolas" panose="020B0609020204030204"/>
+              <a:cs typeface="Consolas" panose="020B0609020204030204"/>
+            </a:endParaRPr>
           </a:p>
         </p:txBody>
       </p:sp>
@@ -15626,14 +16217,23 @@
   <p:clrMapOvr>
     <a:masterClrMapping/>
   </p:clrMapOvr>
-  <p:transition p14:dur="400">
-    <p:fade/>
-  </p:transition>
+  <mc:AlternateContent xmlns:mc="http://schemas.openxmlformats.org/markup-compatibility/2006">
+    <mc:Choice xmlns:p14="http://schemas.microsoft.com/office/powerpoint/2010/main" Requires="p14">
+      <p:transition p14:dur="400">
+        <p:fade/>
+      </p:transition>
+    </mc:Choice>
+    <mc:Fallback>
+      <p:transition>
+        <p:fade/>
+      </p:transition>
+    </mc:Fallback>
+  </mc:AlternateContent>
 </p:sld>
 </file>
 
 <file path=ppt/slides/slide4.xml><?xml version="1.0" encoding="utf-8"?>
-<p:sld xmlns:a="http://schemas.openxmlformats.org/drawingml/2006/main" xmlns:p="http://schemas.openxmlformats.org/presentationml/2006/main" xmlns:p14="http://schemas.microsoft.com/office/powerpoint/2010/main">
+<p:sld xmlns:a="http://schemas.openxmlformats.org/drawingml/2006/main" xmlns:r="http://schemas.openxmlformats.org/officeDocument/2006/relationships" xmlns:p="http://schemas.openxmlformats.org/presentationml/2006/main">
   <p:cSld>
     <p:spTree>
       <p:nvGrpSpPr>
@@ -15700,6 +16300,14 @@
                 </a:rPr>
                 <a:t>生命周期函数由 Unity 按时机调用</a:t>
               </a:r>
+              <a:endParaRPr lang="zh-CN" sz="4200" b="1" dirty="0">
+                <a:solidFill>
+                  <a:schemeClr val="dk1"/>
+                </a:solidFill>
+                <a:latin typeface="+mj-lt"/>
+                <a:ea typeface="+mj-ea"/>
+                <a:cs typeface="+mj-cs"/>
+              </a:endParaRPr>
             </a:p>
           </p:txBody>
         </p:sp>
@@ -15740,6 +16348,14 @@
                 </a:rPr>
                 <a:t>它们不是任意调用的方法，而是引擎约定好的事件入口</a:t>
               </a:r>
+              <a:endParaRPr lang="zh-CN" sz="1800" dirty="0">
+                <a:solidFill>
+                  <a:schemeClr val="dk2"/>
+                </a:solidFill>
+                <a:latin typeface="+mn-lt"/>
+                <a:ea typeface="+mn-ea"/>
+                <a:cs typeface="+mn-cs"/>
+              </a:endParaRPr>
             </a:p>
           </p:txBody>
         </p:sp>
@@ -15896,12 +16512,20 @@
                     <a:solidFill>
                       <a:schemeClr val="accent1"/>
                     </a:solidFill>
-                    <a:latin typeface="Consolas"/>
-                    <a:ea typeface="Consolas"/>
-                    <a:cs typeface="Consolas"/>
+                    <a:latin typeface="Consolas" panose="020B0609020204030204"/>
+                    <a:ea typeface="Consolas" panose="020B0609020204030204"/>
+                    <a:cs typeface="Consolas" panose="020B0609020204030204"/>
                   </a:rPr>
                   <a:t>Awake</a:t>
                 </a:r>
+                <a:endParaRPr lang="en-US" sz="1950" b="1" dirty="0">
+                  <a:solidFill>
+                    <a:schemeClr val="accent1"/>
+                  </a:solidFill>
+                  <a:latin typeface="Consolas" panose="020B0609020204030204"/>
+                  <a:ea typeface="Consolas" panose="020B0609020204030204"/>
+                  <a:cs typeface="Consolas" panose="020B0609020204030204"/>
+                </a:endParaRPr>
               </a:p>
             </p:txBody>
           </p:sp>
@@ -15942,6 +16566,14 @@
                   </a:rPr>
                   <a:t>实例加载</a:t>
                 </a:r>
+                <a:endParaRPr lang="zh-CN" sz="1350" dirty="0">
+                  <a:solidFill>
+                    <a:schemeClr val="dk2"/>
+                  </a:solidFill>
+                  <a:latin typeface="+mn-lt"/>
+                  <a:ea typeface="+mn-ea"/>
+                  <a:cs typeface="+mn-cs"/>
+                </a:endParaRPr>
               </a:p>
             </p:txBody>
           </p:sp>
@@ -16042,12 +16674,20 @@
                     <a:solidFill>
                       <a:srgbClr val="2F8F6A"/>
                     </a:solidFill>
-                    <a:latin typeface="Consolas"/>
-                    <a:ea typeface="Consolas"/>
-                    <a:cs typeface="Consolas"/>
+                    <a:latin typeface="Consolas" panose="020B0609020204030204"/>
+                    <a:ea typeface="Consolas" panose="020B0609020204030204"/>
+                    <a:cs typeface="Consolas" panose="020B0609020204030204"/>
                   </a:rPr>
                   <a:t>OnEnable</a:t>
                 </a:r>
+                <a:endParaRPr lang="en-US" sz="1880" b="1" dirty="0">
+                  <a:solidFill>
+                    <a:srgbClr val="2F8F6A"/>
+                  </a:solidFill>
+                  <a:latin typeface="Consolas" panose="020B0609020204030204"/>
+                  <a:ea typeface="Consolas" panose="020B0609020204030204"/>
+                  <a:cs typeface="Consolas" panose="020B0609020204030204"/>
+                </a:endParaRPr>
               </a:p>
             </p:txBody>
           </p:sp>
@@ -16088,6 +16728,14 @@
                   </a:rPr>
                   <a:t>每次启用</a:t>
                 </a:r>
+                <a:endParaRPr lang="zh-CN" sz="1350" dirty="0">
+                  <a:solidFill>
+                    <a:schemeClr val="dk2"/>
+                  </a:solidFill>
+                  <a:latin typeface="+mn-lt"/>
+                  <a:ea typeface="+mn-ea"/>
+                  <a:cs typeface="+mn-cs"/>
+                </a:endParaRPr>
               </a:p>
             </p:txBody>
           </p:sp>
@@ -16188,12 +16836,20 @@
                     <a:solidFill>
                       <a:srgbClr val="8C5A00"/>
                     </a:solidFill>
-                    <a:latin typeface="Consolas"/>
-                    <a:ea typeface="Consolas"/>
-                    <a:cs typeface="Consolas"/>
+                    <a:latin typeface="Consolas" panose="020B0609020204030204"/>
+                    <a:ea typeface="Consolas" panose="020B0609020204030204"/>
+                    <a:cs typeface="Consolas" panose="020B0609020204030204"/>
                   </a:rPr>
                   <a:t>Start</a:t>
                 </a:r>
+                <a:endParaRPr lang="en-US" sz="2020" b="1" dirty="0">
+                  <a:solidFill>
+                    <a:srgbClr val="8C5A00"/>
+                  </a:solidFill>
+                  <a:latin typeface="Consolas" panose="020B0609020204030204"/>
+                  <a:ea typeface="Consolas" panose="020B0609020204030204"/>
+                  <a:cs typeface="Consolas" panose="020B0609020204030204"/>
+                </a:endParaRPr>
               </a:p>
             </p:txBody>
           </p:sp>
@@ -16234,6 +16890,14 @@
                   </a:rPr>
                   <a:t>首次启用前</a:t>
                 </a:r>
+                <a:endParaRPr lang="zh-CN" sz="1350" dirty="0">
+                  <a:solidFill>
+                    <a:schemeClr val="dk2"/>
+                  </a:solidFill>
+                  <a:latin typeface="+mn-lt"/>
+                  <a:ea typeface="+mn-ea"/>
+                  <a:cs typeface="+mn-cs"/>
+                </a:endParaRPr>
               </a:p>
             </p:txBody>
           </p:sp>
@@ -16311,10 +16975,10 @@
             </p:nvGrpSpPr>
             <p:grpSpPr>
               <a:xfrm>
-                <a:off x="6200775" y="2040731"/>
-                <a:ext cx="266700" cy="300038"/>
-                <a:chOff x="6200775" y="2040731"/>
-                <a:chExt cx="266700" cy="300038"/>
+                <a:off x="6215380" y="1635601"/>
+                <a:ext cx="276860" cy="263208"/>
+                <a:chOff x="6215380" y="1635601"/>
+                <a:chExt cx="276860" cy="263208"/>
               </a:xfrm>
             </p:grpSpPr>
             <p:sp>
@@ -16325,7 +16989,7 @@
               </p:nvSpPr>
               <p:spPr>
                 <a:xfrm>
-                  <a:off x="6200775" y="2040731"/>
+                  <a:off x="6215380" y="1635601"/>
                   <a:ext cx="266700" cy="150019"/>
                 </a:xfrm>
                 <a:custGeom>
@@ -16369,6 +17033,12 @@
                   </a:solidFill>
                 </a:ln>
               </p:spPr>
+              <p:txBody>
+                <a:bodyPr/>
+                <a:p>
+                  <a:endParaRPr lang="zh-CN" altLang="en-US"/>
+                </a:p>
+              </p:txBody>
             </p:sp>
             <p:sp>
               <p:nvSpPr>
@@ -16378,7 +17048,7 @@
               </p:nvSpPr>
               <p:spPr>
                 <a:xfrm>
-                  <a:off x="6200775" y="2190750"/>
+                  <a:off x="6225540" y="1748790"/>
                   <a:ext cx="266700" cy="150019"/>
                 </a:xfrm>
                 <a:custGeom>
@@ -16432,8 +17102,8 @@
             </p:nvSpPr>
             <p:spPr>
               <a:xfrm>
-                <a:off x="6269431" y="1947386"/>
-                <a:ext cx="1729588" cy="337376"/>
+                <a:off x="6480810" y="1699895"/>
+                <a:ext cx="1447800" cy="528320"/>
               </a:xfrm>
               <a:prstGeom prst="rect">
                 <a:avLst/>
@@ -16444,7 +17114,7 @@
               </a:ln>
             </p:spPr>
             <p:txBody>
-              <a:bodyPr wrap="none" lIns="0" tIns="0" rIns="0" bIns="0" anchor="t" anchorCtr="0">
+              <a:bodyPr wrap="square" lIns="0" tIns="0" rIns="0" bIns="0" anchor="t" anchorCtr="0">
                 <a:spAutoFit/>
               </a:bodyPr>
               <a:lstStyle/>
@@ -16455,12 +17125,56 @@
                     <a:solidFill>
                       <a:srgbClr val="FFFFFF"/>
                     </a:solidFill>
-                    <a:latin typeface="Consolas"/>
-                    <a:ea typeface="Consolas"/>
-                    <a:cs typeface="Consolas"/>
+                    <a:latin typeface="Consolas" panose="020B0609020204030204"/>
+                    <a:ea typeface="Consolas" panose="020B0609020204030204"/>
+                    <a:cs typeface="Consolas" panose="020B0609020204030204"/>
+                    <a:sym typeface="+mn-ea"/>
                   </a:rPr>
-                  <a:t>Update / Fixed</a:t>
+                  <a:t>FixedUpdate</a:t>
                 </a:r>
+                <a:endParaRPr lang="en-US" sz="1720" b="1" dirty="0">
+                  <a:solidFill>
+                    <a:srgbClr val="FFFFFF"/>
+                  </a:solidFill>
+                  <a:latin typeface="Consolas" panose="020B0609020204030204"/>
+                  <a:ea typeface="Consolas" panose="020B0609020204030204"/>
+                  <a:cs typeface="Consolas" panose="020B0609020204030204"/>
+                  <a:sym typeface="+mn-ea"/>
+                </a:endParaRPr>
+              </a:p>
+              <a:p>
+                <a:pPr algn="ctr"/>
+                <a:r>
+                  <a:rPr lang="en-US" sz="1720" b="1" dirty="0">
+                    <a:solidFill>
+                      <a:srgbClr val="FFFFFF"/>
+                    </a:solidFill>
+                    <a:latin typeface="Consolas" panose="020B0609020204030204"/>
+                    <a:ea typeface="Consolas" panose="020B0609020204030204"/>
+                    <a:cs typeface="Consolas" panose="020B0609020204030204"/>
+                    <a:sym typeface="+mn-ea"/>
+                  </a:rPr>
+                  <a:t>/</a:t>
+                </a:r>
+                <a:r>
+                  <a:rPr lang="en-US" sz="1720" b="1" dirty="0">
+                    <a:solidFill>
+                      <a:srgbClr val="FFFFFF"/>
+                    </a:solidFill>
+                    <a:latin typeface="Consolas" panose="020B0609020204030204"/>
+                    <a:ea typeface="Consolas" panose="020B0609020204030204"/>
+                    <a:cs typeface="Consolas" panose="020B0609020204030204"/>
+                  </a:rPr>
+                  <a:t>Update </a:t>
+                </a:r>
+                <a:endParaRPr lang="en-US" sz="1720" b="1" dirty="0">
+                  <a:solidFill>
+                    <a:srgbClr val="FFFFFF"/>
+                  </a:solidFill>
+                  <a:latin typeface="Consolas" panose="020B0609020204030204"/>
+                  <a:ea typeface="Consolas" panose="020B0609020204030204"/>
+                  <a:cs typeface="Consolas" panose="020B0609020204030204"/>
+                </a:endParaRPr>
               </a:p>
             </p:txBody>
           </p:sp>
@@ -16495,12 +17209,20 @@
                     <a:solidFill>
                       <a:srgbClr val="FFFFFF"/>
                     </a:solidFill>
-                    <a:latin typeface="Consolas"/>
-                    <a:ea typeface="Consolas"/>
-                    <a:cs typeface="Consolas"/>
+                    <a:latin typeface="Consolas" panose="020B0609020204030204"/>
+                    <a:ea typeface="Consolas" panose="020B0609020204030204"/>
+                    <a:cs typeface="Consolas" panose="020B0609020204030204"/>
                   </a:rPr>
                   <a:t>/ LateUpdate</a:t>
                 </a:r>
+                <a:endParaRPr lang="en-US" sz="1720" b="1" dirty="0">
+                  <a:solidFill>
+                    <a:srgbClr val="FFFFFF"/>
+                  </a:solidFill>
+                  <a:latin typeface="Consolas" panose="020B0609020204030204"/>
+                  <a:ea typeface="Consolas" panose="020B0609020204030204"/>
+                  <a:cs typeface="Consolas" panose="020B0609020204030204"/>
+                </a:endParaRPr>
               </a:p>
             </p:txBody>
           </p:sp>
@@ -16541,6 +17263,14 @@
                   </a:rPr>
                   <a:t>运行中反复</a:t>
                 </a:r>
+                <a:endParaRPr lang="zh-CN" sz="1350" dirty="0">
+                  <a:solidFill>
+                    <a:srgbClr val="FFFFFF"/>
+                  </a:solidFill>
+                  <a:latin typeface="+mn-lt"/>
+                  <a:ea typeface="+mn-ea"/>
+                  <a:cs typeface="+mn-cs"/>
+                </a:endParaRPr>
               </a:p>
             </p:txBody>
           </p:sp>
@@ -16641,12 +17371,20 @@
                     <a:solidFill>
                       <a:schemeClr val="dk1"/>
                     </a:solidFill>
-                    <a:latin typeface="Consolas"/>
-                    <a:ea typeface="Consolas"/>
-                    <a:cs typeface="Consolas"/>
+                    <a:latin typeface="Consolas" panose="020B0609020204030204"/>
+                    <a:ea typeface="Consolas" panose="020B0609020204030204"/>
+                    <a:cs typeface="Consolas" panose="020B0609020204030204"/>
                   </a:rPr>
                   <a:t>OnDisable</a:t>
                 </a:r>
+                <a:endParaRPr lang="en-US" sz="1800" b="1" dirty="0">
+                  <a:solidFill>
+                    <a:schemeClr val="dk1"/>
+                  </a:solidFill>
+                  <a:latin typeface="Consolas" panose="020B0609020204030204"/>
+                  <a:ea typeface="Consolas" panose="020B0609020204030204"/>
+                  <a:cs typeface="Consolas" panose="020B0609020204030204"/>
+                </a:endParaRPr>
               </a:p>
             </p:txBody>
           </p:sp>
@@ -16687,6 +17425,14 @@
                   </a:rPr>
                   <a:t>禁用时</a:t>
                 </a:r>
+                <a:endParaRPr lang="zh-CN" sz="1350" dirty="0">
+                  <a:solidFill>
+                    <a:schemeClr val="dk2"/>
+                  </a:solidFill>
+                  <a:latin typeface="+mn-lt"/>
+                  <a:ea typeface="+mn-ea"/>
+                  <a:cs typeface="+mn-cs"/>
+                </a:endParaRPr>
               </a:p>
             </p:txBody>
           </p:sp>
@@ -16787,12 +17533,20 @@
                     <a:solidFill>
                       <a:srgbClr val="D85C45"/>
                     </a:solidFill>
-                    <a:latin typeface="Consolas"/>
-                    <a:ea typeface="Consolas"/>
-                    <a:cs typeface="Consolas"/>
+                    <a:latin typeface="Consolas" panose="020B0609020204030204"/>
+                    <a:ea typeface="Consolas" panose="020B0609020204030204"/>
+                    <a:cs typeface="Consolas" panose="020B0609020204030204"/>
                   </a:rPr>
                   <a:t>OnDestroy</a:t>
                 </a:r>
+                <a:endParaRPr lang="en-US" sz="1800" b="1" dirty="0">
+                  <a:solidFill>
+                    <a:srgbClr val="D85C45"/>
+                  </a:solidFill>
+                  <a:latin typeface="Consolas" panose="020B0609020204030204"/>
+                  <a:ea typeface="Consolas" panose="020B0609020204030204"/>
+                  <a:cs typeface="Consolas" panose="020B0609020204030204"/>
+                </a:endParaRPr>
               </a:p>
             </p:txBody>
           </p:sp>
@@ -16833,6 +17587,14 @@
                   </a:rPr>
                   <a:t>实例销毁</a:t>
                 </a:r>
+                <a:endParaRPr lang="zh-CN" sz="1350" dirty="0">
+                  <a:solidFill>
+                    <a:schemeClr val="dk2"/>
+                  </a:solidFill>
+                  <a:latin typeface="+mn-lt"/>
+                  <a:ea typeface="+mn-ea"/>
+                  <a:cs typeface="+mn-cs"/>
+                </a:endParaRPr>
               </a:p>
             </p:txBody>
           </p:sp>
@@ -17022,6 +17784,14 @@
                 </a:rPr>
                 <a:t>运行期不是一个函数，而是三种节奏</a:t>
               </a:r>
+              <a:endParaRPr lang="zh-CN" sz="2550" b="1" dirty="0">
+                <a:solidFill>
+                  <a:schemeClr val="accent1"/>
+                </a:solidFill>
+                <a:latin typeface="+mj-lt"/>
+                <a:ea typeface="+mj-ea"/>
+                <a:cs typeface="+mj-cs"/>
+              </a:endParaRPr>
             </a:p>
           </p:txBody>
         </p:sp>
@@ -17056,12 +17826,20 @@
                   <a:solidFill>
                     <a:schemeClr val="dk1"/>
                   </a:solidFill>
-                  <a:latin typeface="Consolas"/>
-                  <a:ea typeface="Microsoft YaHei"/>
-                  <a:cs typeface="Consolas"/>
+                  <a:latin typeface="Consolas" panose="020B0609020204030204"/>
+                  <a:ea typeface="微软雅黑" panose="020B0503020204020204" charset="-122"/>
+                  <a:cs typeface="Consolas" panose="020B0609020204030204"/>
                 </a:rPr>
                 <a:t>Update 输入与普通逻辑</a:t>
               </a:r>
+              <a:endParaRPr lang="zh-CN" sz="1800" dirty="0">
+                <a:solidFill>
+                  <a:schemeClr val="dk1"/>
+                </a:solidFill>
+                <a:latin typeface="Consolas" panose="020B0609020204030204"/>
+                <a:ea typeface="微软雅黑" panose="020B0503020204020204" charset="-122"/>
+                <a:cs typeface="Consolas" panose="020B0609020204030204"/>
+              </a:endParaRPr>
             </a:p>
           </p:txBody>
         </p:sp>
@@ -17096,12 +17874,20 @@
                   <a:solidFill>
                     <a:schemeClr val="dk1"/>
                   </a:solidFill>
-                  <a:latin typeface="Consolas"/>
-                  <a:ea typeface="Microsoft YaHei"/>
-                  <a:cs typeface="Consolas"/>
+                  <a:latin typeface="Consolas" panose="020B0609020204030204"/>
+                  <a:ea typeface="微软雅黑" panose="020B0503020204020204" charset="-122"/>
+                  <a:cs typeface="Consolas" panose="020B0609020204030204"/>
                 </a:rPr>
                 <a:t>FixedUpdate 固定物理时间步</a:t>
               </a:r>
+              <a:endParaRPr lang="zh-CN" sz="1800" dirty="0">
+                <a:solidFill>
+                  <a:schemeClr val="dk1"/>
+                </a:solidFill>
+                <a:latin typeface="Consolas" panose="020B0609020204030204"/>
+                <a:ea typeface="微软雅黑" panose="020B0503020204020204" charset="-122"/>
+                <a:cs typeface="Consolas" panose="020B0609020204030204"/>
+              </a:endParaRPr>
             </a:p>
           </p:txBody>
         </p:sp>
@@ -17136,12 +17922,20 @@
                   <a:solidFill>
                     <a:schemeClr val="dk1"/>
                   </a:solidFill>
-                  <a:latin typeface="Consolas"/>
-                  <a:ea typeface="Microsoft YaHei"/>
-                  <a:cs typeface="Consolas"/>
+                  <a:latin typeface="Consolas" panose="020B0609020204030204"/>
+                  <a:ea typeface="微软雅黑" panose="020B0503020204020204" charset="-122"/>
+                  <a:cs typeface="Consolas" panose="020B0609020204030204"/>
                 </a:rPr>
                 <a:t>LateUpdate 其他更新之后收尾</a:t>
               </a:r>
+              <a:endParaRPr lang="zh-CN" sz="1800" dirty="0">
+                <a:solidFill>
+                  <a:schemeClr val="dk1"/>
+                </a:solidFill>
+                <a:latin typeface="Consolas" panose="020B0609020204030204"/>
+                <a:ea typeface="微软雅黑" panose="020B0503020204020204" charset="-122"/>
+                <a:cs typeface="Consolas" panose="020B0609020204030204"/>
+              </a:endParaRPr>
             </a:p>
           </p:txBody>
         </p:sp>
@@ -17275,6 +18069,14 @@
                 </a:rPr>
                 <a:t>重新启用：OnEnable 再来一次</a:t>
               </a:r>
+              <a:endParaRPr lang="zh-CN" sz="1650" b="1" dirty="0">
+                <a:solidFill>
+                  <a:srgbClr val="2F8F6A"/>
+                </a:solidFill>
+                <a:latin typeface="+mn-lt"/>
+                <a:ea typeface="+mn-ea"/>
+                <a:cs typeface="+mn-cs"/>
+              </a:endParaRPr>
             </a:p>
           </p:txBody>
         </p:sp>
@@ -17315,6 +18117,14 @@
                 </a:rPr>
                 <a:t>同一实例：Start 通常只执行一次</a:t>
               </a:r>
+              <a:endParaRPr lang="zh-CN" sz="1650" b="1" dirty="0">
+                <a:solidFill>
+                  <a:srgbClr val="8C5A00"/>
+                </a:solidFill>
+                <a:latin typeface="+mn-lt"/>
+                <a:ea typeface="+mn-ea"/>
+                <a:cs typeface="+mn-cs"/>
+              </a:endParaRPr>
             </a:p>
           </p:txBody>
         </p:sp>
@@ -17357,46 +18167,6 @@
       </p:sp>
       <p:sp>
         <p:nvSpPr>
-          <p:cNvPr id="50" name="TextBox 50"/>
-          <p:cNvSpPr txBox="1"/>
-          <p:nvPr/>
-        </p:nvSpPr>
-        <p:spPr>
-          <a:xfrm>
-            <a:off x="564642" y="6521768"/>
-            <a:ext cx="2210059" cy="264033"/>
-          </a:xfrm>
-          <a:prstGeom prst="rect">
-            <a:avLst/>
-          </a:prstGeom>
-          <a:noFill/>
-          <a:ln>
-            <a:noFill/>
-          </a:ln>
-        </p:spPr>
-        <p:txBody>
-          <a:bodyPr wrap="none" lIns="0" tIns="0" rIns="0" bIns="0" anchor="t" anchorCtr="0">
-            <a:spAutoFit/>
-          </a:bodyPr>
-          <a:lstStyle/>
-          <a:p>
-            <a:pPr algn="l"/>
-            <a:r>
-              <a:rPr lang="zh-CN" sz="1350" dirty="0">
-                <a:solidFill>
-                  <a:schemeClr val="accent5"/>
-                </a:solidFill>
-                <a:latin typeface="+mn-lt"/>
-                <a:ea typeface="+mn-ea"/>
-                <a:cs typeface="+mn-cs"/>
-              </a:rPr>
-              <a:t>Unity 语法基础 · 生命周期</a:t>
-            </a:r>
-          </a:p>
-        </p:txBody>
-      </p:sp>
-      <p:sp>
-        <p:nvSpPr>
           <p:cNvPr id="51" name="TextBox 51"/>
           <p:cNvSpPr txBox="1"/>
           <p:nvPr/>
@@ -17426,12 +18196,19 @@
                 <a:solidFill>
                   <a:schemeClr val="accent5"/>
                 </a:solidFill>
-                <a:latin typeface="Consolas"/>
-                <a:ea typeface="Consolas"/>
-                <a:cs typeface="Consolas"/>
+                <a:latin typeface="Consolas" panose="020B0609020204030204"/>
+                <a:ea typeface="Consolas" panose="020B0609020204030204"/>
+                <a:cs typeface="Consolas" panose="020B0609020204030204"/>
               </a:rPr>
-              <a:t>4</a:t>
             </a:fld>
+            <a:endParaRPr lang="en-US" sz="1350" dirty="0">
+              <a:solidFill>
+                <a:schemeClr val="accent5"/>
+              </a:solidFill>
+              <a:latin typeface="Consolas" panose="020B0609020204030204"/>
+              <a:ea typeface="Consolas" panose="020B0609020204030204"/>
+              <a:cs typeface="Consolas" panose="020B0609020204030204"/>
+            </a:endParaRPr>
           </a:p>
         </p:txBody>
       </p:sp>
@@ -17440,14 +18217,23 @@
   <p:clrMapOvr>
     <a:masterClrMapping/>
   </p:clrMapOvr>
-  <p:transition p14:dur="400">
-    <p:fade/>
-  </p:transition>
+  <mc:AlternateContent xmlns:mc="http://schemas.openxmlformats.org/markup-compatibility/2006">
+    <mc:Choice xmlns:p14="http://schemas.microsoft.com/office/powerpoint/2010/main" Requires="p14">
+      <p:transition p14:dur="400">
+        <p:fade/>
+      </p:transition>
+    </mc:Choice>
+    <mc:Fallback>
+      <p:transition>
+        <p:fade/>
+      </p:transition>
+    </mc:Fallback>
+  </mc:AlternateContent>
 </p:sld>
 </file>
 
 <file path=ppt/slides/slide5.xml><?xml version="1.0" encoding="utf-8"?>
-<p:sld xmlns:a="http://schemas.openxmlformats.org/drawingml/2006/main" xmlns:p="http://schemas.openxmlformats.org/presentationml/2006/main" xmlns:p14="http://schemas.microsoft.com/office/powerpoint/2010/main">
+<p:sld xmlns:a="http://schemas.openxmlformats.org/drawingml/2006/main" xmlns:r="http://schemas.openxmlformats.org/officeDocument/2006/relationships" xmlns:p="http://schemas.openxmlformats.org/presentationml/2006/main">
   <p:cSld>
     <p:spTree>
       <p:nvGrpSpPr>
@@ -17514,6 +18300,14 @@
                 </a:rPr>
                 <a:t>先问：这件事何时发生、会发生几次？</a:t>
               </a:r>
+              <a:endParaRPr lang="zh-CN" sz="4200" b="1" dirty="0">
+                <a:solidFill>
+                  <a:schemeClr val="dk1"/>
+                </a:solidFill>
+                <a:latin typeface="+mj-lt"/>
+                <a:ea typeface="+mj-ea"/>
+                <a:cs typeface="+mj-cs"/>
+              </a:endParaRPr>
             </a:p>
           </p:txBody>
         </p:sp>
@@ -17554,6 +18348,14 @@
                 </a:rPr>
                 <a:t>选择生命周期函数，本质上是在选择责任与次数</a:t>
               </a:r>
+              <a:endParaRPr lang="zh-CN" sz="1800" dirty="0">
+                <a:solidFill>
+                  <a:schemeClr val="dk2"/>
+                </a:solidFill>
+                <a:latin typeface="+mn-lt"/>
+                <a:ea typeface="+mn-ea"/>
+                <a:cs typeface="+mn-cs"/>
+              </a:endParaRPr>
             </a:p>
           </p:txBody>
         </p:sp>
@@ -17677,12 +18479,20 @@
                     <a:solidFill>
                       <a:srgbClr val="FFFFFF"/>
                     </a:solidFill>
-                    <a:latin typeface="Consolas"/>
-                    <a:ea typeface="Consolas"/>
-                    <a:cs typeface="Consolas"/>
+                    <a:latin typeface="Consolas" panose="020B0609020204030204"/>
+                    <a:ea typeface="Consolas" panose="020B0609020204030204"/>
+                    <a:cs typeface="Consolas" panose="020B0609020204030204"/>
                   </a:rPr>
                   <a:t>1</a:t>
                 </a:r>
+                <a:endParaRPr lang="en-US" sz="1800" b="1" dirty="0">
+                  <a:solidFill>
+                    <a:srgbClr val="FFFFFF"/>
+                  </a:solidFill>
+                  <a:latin typeface="Consolas" panose="020B0609020204030204"/>
+                  <a:ea typeface="Consolas" panose="020B0609020204030204"/>
+                  <a:cs typeface="Consolas" panose="020B0609020204030204"/>
+                </a:endParaRPr>
               </a:p>
             </p:txBody>
           </p:sp>
@@ -17723,6 +18533,14 @@
                   </a:rPr>
                   <a:t>获取自身必要组件 → Awake</a:t>
                 </a:r>
+                <a:endParaRPr lang="zh-CN" sz="2250" b="1" dirty="0">
+                  <a:solidFill>
+                    <a:schemeClr val="dk1"/>
+                  </a:solidFill>
+                  <a:latin typeface="+mn-lt"/>
+                  <a:ea typeface="+mn-ea"/>
+                  <a:cs typeface="+mn-cs"/>
+                </a:endParaRPr>
               </a:p>
             </p:txBody>
           </p:sp>
@@ -17763,6 +18581,14 @@
                   </a:rPr>
                   <a:t>只依赖当前对象，加载时即可建立引用</a:t>
                 </a:r>
+                <a:endParaRPr lang="zh-CN" sz="1650" dirty="0">
+                  <a:solidFill>
+                    <a:schemeClr val="dk2"/>
+                  </a:solidFill>
+                  <a:latin typeface="+mn-lt"/>
+                  <a:ea typeface="+mn-ea"/>
+                  <a:cs typeface="+mn-cs"/>
+                </a:endParaRPr>
               </a:p>
             </p:txBody>
           </p:sp>
@@ -17834,12 +18660,20 @@
                     <a:solidFill>
                       <a:srgbClr val="FFFFFF"/>
                     </a:solidFill>
-                    <a:latin typeface="Consolas"/>
-                    <a:ea typeface="Consolas"/>
-                    <a:cs typeface="Consolas"/>
+                    <a:latin typeface="Consolas" panose="020B0609020204030204"/>
+                    <a:ea typeface="Consolas" panose="020B0609020204030204"/>
+                    <a:cs typeface="Consolas" panose="020B0609020204030204"/>
                   </a:rPr>
                   <a:t>2</a:t>
                 </a:r>
+                <a:endParaRPr lang="en-US" sz="1800" b="1" dirty="0">
+                  <a:solidFill>
+                    <a:srgbClr val="FFFFFF"/>
+                  </a:solidFill>
+                  <a:latin typeface="Consolas" panose="020B0609020204030204"/>
+                  <a:ea typeface="Consolas" panose="020B0609020204030204"/>
+                  <a:cs typeface="Consolas" panose="020B0609020204030204"/>
+                </a:endParaRPr>
               </a:p>
             </p:txBody>
           </p:sp>
@@ -17880,6 +18714,14 @@
                   </a:rPr>
                   <a:t>订阅 / 取消订阅 → OnEnable / OnDisable</a:t>
                 </a:r>
+                <a:endParaRPr lang="zh-CN" sz="2250" b="1" dirty="0">
+                  <a:solidFill>
+                    <a:schemeClr val="dk1"/>
+                  </a:solidFill>
+                  <a:latin typeface="+mn-lt"/>
+                  <a:ea typeface="+mn-ea"/>
+                  <a:cs typeface="+mn-cs"/>
+                </a:endParaRPr>
               </a:p>
             </p:txBody>
           </p:sp>
@@ -17920,6 +18762,14 @@
                   </a:rPr>
                   <a:t>组件每次开始工作时订阅，停止工作时成对解除</a:t>
                 </a:r>
+                <a:endParaRPr lang="zh-CN" sz="1650" dirty="0">
+                  <a:solidFill>
+                    <a:schemeClr val="dk2"/>
+                  </a:solidFill>
+                  <a:latin typeface="+mn-lt"/>
+                  <a:ea typeface="+mn-ea"/>
+                  <a:cs typeface="+mn-cs"/>
+                </a:endParaRPr>
               </a:p>
             </p:txBody>
           </p:sp>
@@ -17991,12 +18841,20 @@
                     <a:solidFill>
                       <a:srgbClr val="FFFFFF"/>
                     </a:solidFill>
-                    <a:latin typeface="Consolas"/>
-                    <a:ea typeface="Consolas"/>
-                    <a:cs typeface="Consolas"/>
+                    <a:latin typeface="Consolas" panose="020B0609020204030204"/>
+                    <a:ea typeface="Consolas" panose="020B0609020204030204"/>
+                    <a:cs typeface="Consolas" panose="020B0609020204030204"/>
                   </a:rPr>
                   <a:t>3</a:t>
                 </a:r>
+                <a:endParaRPr lang="en-US" sz="1800" b="1" dirty="0">
+                  <a:solidFill>
+                    <a:srgbClr val="FFFFFF"/>
+                  </a:solidFill>
+                  <a:latin typeface="Consolas" panose="020B0609020204030204"/>
+                  <a:ea typeface="Consolas" panose="020B0609020204030204"/>
+                  <a:cs typeface="Consolas" panose="020B0609020204030204"/>
+                </a:endParaRPr>
               </a:p>
             </p:txBody>
           </p:sp>
@@ -18037,6 +18895,14 @@
                   </a:rPr>
                   <a:t>依赖其他对象初始化后的启动 → Start</a:t>
                 </a:r>
+                <a:endParaRPr lang="zh-CN" sz="2250" b="1" dirty="0">
+                  <a:solidFill>
+                    <a:schemeClr val="dk1"/>
+                  </a:solidFill>
+                  <a:latin typeface="+mn-lt"/>
+                  <a:ea typeface="+mn-ea"/>
+                  <a:cs typeface="+mn-cs"/>
+                </a:endParaRPr>
               </a:p>
             </p:txBody>
           </p:sp>
@@ -18077,6 +18943,14 @@
                   </a:rPr>
                   <a:t>第一次帧更新前建立初始游戏状态</a:t>
                 </a:r>
+                <a:endParaRPr lang="zh-CN" sz="1650" dirty="0">
+                  <a:solidFill>
+                    <a:schemeClr val="dk2"/>
+                  </a:solidFill>
+                  <a:latin typeface="+mn-lt"/>
+                  <a:ea typeface="+mn-ea"/>
+                  <a:cs typeface="+mn-cs"/>
+                </a:endParaRPr>
               </a:p>
             </p:txBody>
           </p:sp>
@@ -18148,12 +19022,20 @@
                     <a:solidFill>
                       <a:srgbClr val="FFFFFF"/>
                     </a:solidFill>
-                    <a:latin typeface="Consolas"/>
-                    <a:ea typeface="Consolas"/>
-                    <a:cs typeface="Consolas"/>
+                    <a:latin typeface="Consolas" panose="020B0609020204030204"/>
+                    <a:ea typeface="Consolas" panose="020B0609020204030204"/>
+                    <a:cs typeface="Consolas" panose="020B0609020204030204"/>
                   </a:rPr>
                   <a:t>4</a:t>
                 </a:r>
+                <a:endParaRPr lang="en-US" sz="1800" b="1" dirty="0">
+                  <a:solidFill>
+                    <a:srgbClr val="FFFFFF"/>
+                  </a:solidFill>
+                  <a:latin typeface="Consolas" panose="020B0609020204030204"/>
+                  <a:ea typeface="Consolas" panose="020B0609020204030204"/>
+                  <a:cs typeface="Consolas" panose="020B0609020204030204"/>
+                </a:endParaRPr>
               </a:p>
             </p:txBody>
           </p:sp>
@@ -18194,6 +19076,14 @@
                   </a:rPr>
                   <a:t>持续逻辑 → 对应的更新循环</a:t>
                 </a:r>
+                <a:endParaRPr lang="zh-CN" sz="2250" b="1" dirty="0">
+                  <a:solidFill>
+                    <a:schemeClr val="dk1"/>
+                  </a:solidFill>
+                  <a:latin typeface="+mn-lt"/>
+                  <a:ea typeface="+mn-ea"/>
+                  <a:cs typeface="+mn-cs"/>
+                </a:endParaRPr>
               </a:p>
             </p:txBody>
           </p:sp>
@@ -18234,6 +19124,14 @@
                   </a:rPr>
                   <a:t>输入、物理和跟随不要挤进同一个函数</a:t>
                 </a:r>
+                <a:endParaRPr lang="zh-CN" sz="1650" dirty="0">
+                  <a:solidFill>
+                    <a:schemeClr val="dk2"/>
+                  </a:solidFill>
+                  <a:latin typeface="+mn-lt"/>
+                  <a:ea typeface="+mn-ea"/>
+                  <a:cs typeface="+mn-cs"/>
+                </a:endParaRPr>
               </a:p>
             </p:txBody>
           </p:sp>
@@ -18305,12 +19203,20 @@
                     <a:solidFill>
                       <a:srgbClr val="FFFFFF"/>
                     </a:solidFill>
-                    <a:latin typeface="Consolas"/>
-                    <a:ea typeface="Consolas"/>
-                    <a:cs typeface="Consolas"/>
+                    <a:latin typeface="Consolas" panose="020B0609020204030204"/>
+                    <a:ea typeface="Consolas" panose="020B0609020204030204"/>
+                    <a:cs typeface="Consolas" panose="020B0609020204030204"/>
                   </a:rPr>
                   <a:t>5</a:t>
                 </a:r>
+                <a:endParaRPr lang="en-US" sz="1800" b="1" dirty="0">
+                  <a:solidFill>
+                    <a:srgbClr val="FFFFFF"/>
+                  </a:solidFill>
+                  <a:latin typeface="Consolas" panose="020B0609020204030204"/>
+                  <a:ea typeface="Consolas" panose="020B0609020204030204"/>
+                  <a:cs typeface="Consolas" panose="020B0609020204030204"/>
+                </a:endParaRPr>
               </a:p>
             </p:txBody>
           </p:sp>
@@ -18351,6 +19257,14 @@
                   </a:rPr>
                   <a:t>实例寿命结束 → OnDestroy</a:t>
                 </a:r>
+                <a:endParaRPr lang="zh-CN" sz="2250" b="1" dirty="0">
+                  <a:solidFill>
+                    <a:schemeClr val="dk1"/>
+                  </a:solidFill>
+                  <a:latin typeface="+mn-lt"/>
+                  <a:ea typeface="+mn-ea"/>
+                  <a:cs typeface="+mn-cs"/>
+                </a:endParaRPr>
               </a:p>
             </p:txBody>
           </p:sp>
@@ -18391,6 +19305,14 @@
                   </a:rPr>
                   <a:t>释放与该实例同寿命的资源</a:t>
                 </a:r>
+                <a:endParaRPr lang="zh-CN" sz="1650" dirty="0">
+                  <a:solidFill>
+                    <a:schemeClr val="dk2"/>
+                  </a:solidFill>
+                  <a:latin typeface="+mn-lt"/>
+                  <a:ea typeface="+mn-ea"/>
+                  <a:cs typeface="+mn-cs"/>
+                </a:endParaRPr>
               </a:p>
             </p:txBody>
           </p:sp>
@@ -18632,6 +19554,14 @@
                 </a:rPr>
                 <a:t>不要赌 Awake 顺序</a:t>
               </a:r>
+              <a:endParaRPr lang="zh-CN" sz="2700" b="1" dirty="0">
+                <a:solidFill>
+                  <a:srgbClr val="D85C45"/>
+                </a:solidFill>
+                <a:latin typeface="+mj-lt"/>
+                <a:ea typeface="+mj-ea"/>
+                <a:cs typeface="+mj-cs"/>
+              </a:endParaRPr>
             </a:p>
           </p:txBody>
         </p:sp>
@@ -18672,6 +19602,14 @@
                 </a:rPr>
                 <a:t>不同 GameObject 的 Awake</a:t>
               </a:r>
+              <a:endParaRPr lang="zh-CN" sz="1800" dirty="0">
+                <a:solidFill>
+                  <a:schemeClr val="dk1"/>
+                </a:solidFill>
+                <a:latin typeface="+mn-lt"/>
+                <a:ea typeface="+mn-ea"/>
+                <a:cs typeface="+mn-cs"/>
+              </a:endParaRPr>
             </a:p>
           </p:txBody>
         </p:sp>
@@ -18712,6 +19650,14 @@
                 </a:rPr>
                 <a:t>谁先执行，不应成为逻辑前提</a:t>
               </a:r>
+              <a:endParaRPr lang="zh-CN" sz="1800" dirty="0">
+                <a:solidFill>
+                  <a:schemeClr val="dk1"/>
+                </a:solidFill>
+                <a:latin typeface="+mn-lt"/>
+                <a:ea typeface="+mn-ea"/>
+                <a:cs typeface="+mn-cs"/>
+              </a:endParaRPr>
             </a:p>
           </p:txBody>
         </p:sp>
@@ -18790,6 +19736,14 @@
                 </a:rPr>
                 <a:t>跨对象依赖怎么办？</a:t>
               </a:r>
+              <a:endParaRPr lang="zh-CN" sz="1800" b="1" dirty="0">
+                <a:solidFill>
+                  <a:schemeClr val="accent1"/>
+                </a:solidFill>
+                <a:latin typeface="+mn-lt"/>
+                <a:ea typeface="+mn-ea"/>
+                <a:cs typeface="+mn-cs"/>
+              </a:endParaRPr>
             </a:p>
           </p:txBody>
         </p:sp>
@@ -18830,6 +19784,14 @@
                 </a:rPr>
                 <a:t>使用明确的启动流程、事件</a:t>
               </a:r>
+              <a:endParaRPr lang="zh-CN" sz="1650" dirty="0">
+                <a:solidFill>
+                  <a:schemeClr val="dk2"/>
+                </a:solidFill>
+                <a:latin typeface="+mn-lt"/>
+                <a:ea typeface="+mn-ea"/>
+                <a:cs typeface="+mn-cs"/>
+              </a:endParaRPr>
             </a:p>
           </p:txBody>
         </p:sp>
@@ -18870,6 +19832,14 @@
                 </a:rPr>
                 <a:t>或由上层统一编排</a:t>
               </a:r>
+              <a:endParaRPr lang="zh-CN" sz="1650" dirty="0">
+                <a:solidFill>
+                  <a:schemeClr val="dk2"/>
+                </a:solidFill>
+                <a:latin typeface="+mn-lt"/>
+                <a:ea typeface="+mn-ea"/>
+                <a:cs typeface="+mn-cs"/>
+              </a:endParaRPr>
             </a:p>
           </p:txBody>
         </p:sp>
@@ -18912,46 +19882,6 @@
       </p:sp>
       <p:sp>
         <p:nvSpPr>
-          <p:cNvPr id="46" name="TextBox 46"/>
-          <p:cNvSpPr txBox="1"/>
-          <p:nvPr/>
-        </p:nvSpPr>
-        <p:spPr>
-          <a:xfrm>
-            <a:off x="564642" y="6521768"/>
-            <a:ext cx="2945237" cy="264033"/>
-          </a:xfrm>
-          <a:prstGeom prst="rect">
-            <a:avLst/>
-          </a:prstGeom>
-          <a:noFill/>
-          <a:ln>
-            <a:noFill/>
-          </a:ln>
-        </p:spPr>
-        <p:txBody>
-          <a:bodyPr wrap="none" lIns="0" tIns="0" rIns="0" bIns="0" anchor="t" anchorCtr="0">
-            <a:spAutoFit/>
-          </a:bodyPr>
-          <a:lstStyle/>
-          <a:p>
-            <a:pPr algn="l"/>
-            <a:r>
-              <a:rPr lang="zh-CN" sz="1350" dirty="0">
-                <a:solidFill>
-                  <a:schemeClr val="accent5"/>
-                </a:solidFill>
-                <a:latin typeface="+mn-lt"/>
-                <a:ea typeface="+mn-ea"/>
-                <a:cs typeface="+mn-cs"/>
-              </a:rPr>
-              <a:t>Unity 语法基础 · 生命周期函数选择</a:t>
-            </a:r>
-          </a:p>
-        </p:txBody>
-      </p:sp>
-      <p:sp>
-        <p:nvSpPr>
           <p:cNvPr id="47" name="TextBox 47"/>
           <p:cNvSpPr txBox="1"/>
           <p:nvPr/>
@@ -18981,12 +19911,19 @@
                 <a:solidFill>
                   <a:schemeClr val="accent5"/>
                 </a:solidFill>
-                <a:latin typeface="Consolas"/>
-                <a:ea typeface="Consolas"/>
-                <a:cs typeface="Consolas"/>
+                <a:latin typeface="Consolas" panose="020B0609020204030204"/>
+                <a:ea typeface="Consolas" panose="020B0609020204030204"/>
+                <a:cs typeface="Consolas" panose="020B0609020204030204"/>
               </a:rPr>
-              <a:t>5</a:t>
             </a:fld>
+            <a:endParaRPr lang="en-US" sz="1350" dirty="0">
+              <a:solidFill>
+                <a:schemeClr val="accent5"/>
+              </a:solidFill>
+              <a:latin typeface="Consolas" panose="020B0609020204030204"/>
+              <a:ea typeface="Consolas" panose="020B0609020204030204"/>
+              <a:cs typeface="Consolas" panose="020B0609020204030204"/>
+            </a:endParaRPr>
           </a:p>
         </p:txBody>
       </p:sp>
@@ -18995,14 +19932,23 @@
   <p:clrMapOvr>
     <a:masterClrMapping/>
   </p:clrMapOvr>
-  <p:transition p14:dur="400">
-    <p:fade/>
-  </p:transition>
+  <mc:AlternateContent xmlns:mc="http://schemas.openxmlformats.org/markup-compatibility/2006">
+    <mc:Choice xmlns:p14="http://schemas.microsoft.com/office/powerpoint/2010/main" Requires="p14">
+      <p:transition p14:dur="400">
+        <p:fade/>
+      </p:transition>
+    </mc:Choice>
+    <mc:Fallback>
+      <p:transition>
+        <p:fade/>
+      </p:transition>
+    </mc:Fallback>
+  </mc:AlternateContent>
 </p:sld>
 </file>
 
 <file path=ppt/slides/slide6.xml><?xml version="1.0" encoding="utf-8"?>
-<p:sld xmlns:a="http://schemas.openxmlformats.org/drawingml/2006/main" xmlns:p="http://schemas.openxmlformats.org/presentationml/2006/main" xmlns:p14="http://schemas.microsoft.com/office/powerpoint/2010/main">
+<p:sld xmlns:a="http://schemas.openxmlformats.org/drawingml/2006/main" xmlns:r="http://schemas.openxmlformats.org/officeDocument/2006/relationships" xmlns:p="http://schemas.openxmlformats.org/presentationml/2006/main">
   <p:cSld>
     <p:spTree>
       <p:nvGrpSpPr>
@@ -19027,9 +19973,9 @@
         <p:grpSpPr>
           <a:xfrm>
             <a:off x="552450" y="346710"/>
-            <a:ext cx="14972802" cy="973074"/>
+            <a:ext cx="11205845" cy="973074"/>
             <a:chOff x="552450" y="346710"/>
-            <a:chExt cx="14972802" cy="973074"/>
+            <a:chExt cx="11205845" cy="973074"/>
           </a:xfrm>
         </p:grpSpPr>
         <p:sp>
@@ -19041,7 +19987,7 @@
           <p:spPr>
             <a:xfrm>
               <a:off x="552450" y="346710"/>
-              <a:ext cx="14972802" cy="819150"/>
+              <a:ext cx="11205845" cy="645795"/>
             </a:xfrm>
             <a:prstGeom prst="rect">
               <a:avLst/>
@@ -19067,8 +20013,16 @@
                   <a:ea typeface="+mj-ea"/>
                   <a:cs typeface="+mj-cs"/>
                 </a:rPr>
-                <a:t>Update、FixedUpdate、LateUpdate 各管一段节奏</a:t>
+                <a:t>Update、FixedUpdate、LateUpdate 各管节奏</a:t>
               </a:r>
+              <a:endParaRPr lang="zh-CN" sz="4200" b="1" dirty="0">
+                <a:solidFill>
+                  <a:schemeClr val="dk1"/>
+                </a:solidFill>
+                <a:latin typeface="+mj-lt"/>
+                <a:ea typeface="+mj-ea"/>
+                <a:cs typeface="+mj-cs"/>
+              </a:endParaRPr>
             </a:p>
           </p:txBody>
         </p:sp>
@@ -19109,6 +20063,14 @@
                 </a:rPr>
                 <a:t>输入与普通逻辑、物理时间步、跟随收尾应分开放置</a:t>
               </a:r>
+              <a:endParaRPr lang="zh-CN" sz="1800" dirty="0">
+                <a:solidFill>
+                  <a:schemeClr val="dk2"/>
+                </a:solidFill>
+                <a:latin typeface="+mn-lt"/>
+                <a:ea typeface="+mn-ea"/>
+                <a:cs typeface="+mn-cs"/>
+              </a:endParaRPr>
             </a:p>
           </p:txBody>
         </p:sp>
@@ -19313,12 +20275,20 @@
                   <a:solidFill>
                     <a:schemeClr val="accent1"/>
                   </a:solidFill>
-                  <a:latin typeface="Consolas"/>
-                  <a:ea typeface="Consolas"/>
-                  <a:cs typeface="Consolas"/>
+                  <a:latin typeface="Consolas" panose="020B0609020204030204"/>
+                  <a:ea typeface="Consolas" panose="020B0609020204030204"/>
+                  <a:cs typeface="Consolas" panose="020B0609020204030204"/>
                 </a:rPr>
                 <a:t>Update</a:t>
               </a:r>
+              <a:endParaRPr lang="en-US" sz="2550" b="1" dirty="0">
+                <a:solidFill>
+                  <a:schemeClr val="accent1"/>
+                </a:solidFill>
+                <a:latin typeface="Consolas" panose="020B0609020204030204"/>
+                <a:ea typeface="Consolas" panose="020B0609020204030204"/>
+                <a:cs typeface="Consolas" panose="020B0609020204030204"/>
+              </a:endParaRPr>
             </a:p>
           </p:txBody>
         </p:sp>
@@ -19359,6 +20329,14 @@
                 </a:rPr>
                 <a:t>适合</a:t>
               </a:r>
+              <a:endParaRPr lang="zh-CN" sz="1950" b="1" dirty="0">
+                <a:solidFill>
+                  <a:schemeClr val="dk1"/>
+                </a:solidFill>
+                <a:latin typeface="+mn-lt"/>
+                <a:ea typeface="+mn-ea"/>
+                <a:cs typeface="+mn-cs"/>
+              </a:endParaRPr>
             </a:p>
           </p:txBody>
         </p:sp>
@@ -19387,7 +20365,7 @@
             </a:bodyPr>
             <a:lstStyle/>
             <a:p>
-              <a:pPr algn="l" marL="194310" indent="-194310">
+              <a:pPr marL="194310" indent="-194310" algn="l">
                 <a:buClr>
                   <a:schemeClr val="dk1"/>
                 </a:buClr>
@@ -19406,6 +20384,14 @@
                 </a:rPr>
                 <a:t>读取玩家输入</a:t>
               </a:r>
+              <a:endParaRPr lang="zh-CN" sz="1800" dirty="0">
+                <a:solidFill>
+                  <a:schemeClr val="dk1"/>
+                </a:solidFill>
+                <a:latin typeface="+mn-lt"/>
+                <a:ea typeface="+mn-ea"/>
+                <a:cs typeface="+mn-cs"/>
+              </a:endParaRPr>
             </a:p>
           </p:txBody>
         </p:sp>
@@ -19434,7 +20420,7 @@
             </a:bodyPr>
             <a:lstStyle/>
             <a:p>
-              <a:pPr algn="l" marL="194310" indent="-194310">
+              <a:pPr marL="194310" indent="-194310" algn="l">
                 <a:buClr>
                   <a:schemeClr val="dk1"/>
                 </a:buClr>
@@ -19453,6 +20439,14 @@
                 </a:rPr>
                 <a:t>普通游戏逻辑</a:t>
               </a:r>
+              <a:endParaRPr lang="zh-CN" sz="1800" dirty="0">
+                <a:solidFill>
+                  <a:schemeClr val="dk1"/>
+                </a:solidFill>
+                <a:latin typeface="+mn-lt"/>
+                <a:ea typeface="+mn-ea"/>
+                <a:cs typeface="+mn-cs"/>
+              </a:endParaRPr>
             </a:p>
           </p:txBody>
         </p:sp>
@@ -19481,7 +20475,7 @@
             </a:bodyPr>
             <a:lstStyle/>
             <a:p>
-              <a:pPr algn="l" marL="194310" indent="-194310">
+              <a:pPr marL="194310" indent="-194310" algn="l">
                 <a:buClr>
                   <a:schemeClr val="dk1"/>
                 </a:buClr>
@@ -19500,6 +20494,14 @@
                 </a:rPr>
                 <a:t>CharacterController.Move</a:t>
               </a:r>
+              <a:endParaRPr lang="en-US" sz="1800" dirty="0">
+                <a:solidFill>
+                  <a:schemeClr val="dk1"/>
+                </a:solidFill>
+                <a:latin typeface="+mn-lt"/>
+                <a:ea typeface="+mn-ea"/>
+                <a:cs typeface="+mn-cs"/>
+              </a:endParaRPr>
             </a:p>
           </p:txBody>
         </p:sp>
@@ -19558,12 +20560,20 @@
                   <a:solidFill>
                     <a:schemeClr val="accent1"/>
                   </a:solidFill>
-                  <a:latin typeface="Consolas"/>
-                  <a:ea typeface="Consolas"/>
-                  <a:cs typeface="Consolas"/>
+                  <a:latin typeface="Consolas" panose="020B0609020204030204"/>
+                  <a:ea typeface="Consolas" panose="020B0609020204030204"/>
+                  <a:cs typeface="Consolas" panose="020B0609020204030204"/>
                 </a:rPr>
                 <a:t>speed × Time.deltaTime</a:t>
               </a:r>
+              <a:endParaRPr lang="en-US" sz="1580" b="1" dirty="0">
+                <a:solidFill>
+                  <a:schemeClr val="accent1"/>
+                </a:solidFill>
+                <a:latin typeface="Consolas" panose="020B0609020204030204"/>
+                <a:ea typeface="Consolas" panose="020B0609020204030204"/>
+                <a:cs typeface="Consolas" panose="020B0609020204030204"/>
+              </a:endParaRPr>
             </a:p>
           </p:txBody>
         </p:sp>
@@ -19782,12 +20792,20 @@
                   <a:solidFill>
                     <a:srgbClr val="8C5A00"/>
                   </a:solidFill>
-                  <a:latin typeface="Consolas"/>
-                  <a:ea typeface="Consolas"/>
-                  <a:cs typeface="Consolas"/>
+                  <a:latin typeface="Consolas" panose="020B0609020204030204"/>
+                  <a:ea typeface="Consolas" panose="020B0609020204030204"/>
+                  <a:cs typeface="Consolas" panose="020B0609020204030204"/>
                 </a:rPr>
                 <a:t>FixedUpdate</a:t>
               </a:r>
+              <a:endParaRPr lang="en-US" sz="2400" b="1" dirty="0">
+                <a:solidFill>
+                  <a:srgbClr val="8C5A00"/>
+                </a:solidFill>
+                <a:latin typeface="Consolas" panose="020B0609020204030204"/>
+                <a:ea typeface="Consolas" panose="020B0609020204030204"/>
+                <a:cs typeface="Consolas" panose="020B0609020204030204"/>
+              </a:endParaRPr>
             </a:p>
           </p:txBody>
         </p:sp>
@@ -19828,6 +20846,14 @@
                 </a:rPr>
                 <a:t>适合</a:t>
               </a:r>
+              <a:endParaRPr lang="zh-CN" sz="1950" b="1" dirty="0">
+                <a:solidFill>
+                  <a:schemeClr val="dk1"/>
+                </a:solidFill>
+                <a:latin typeface="+mn-lt"/>
+                <a:ea typeface="+mn-ea"/>
+                <a:cs typeface="+mn-cs"/>
+              </a:endParaRPr>
             </a:p>
           </p:txBody>
         </p:sp>
@@ -19856,7 +20882,7 @@
             </a:bodyPr>
             <a:lstStyle/>
             <a:p>
-              <a:pPr algn="l" marL="194310" indent="-194310">
+              <a:pPr marL="194310" indent="-194310" algn="l">
                 <a:buClr>
                   <a:schemeClr val="dk1"/>
                 </a:buClr>
@@ -19875,6 +20901,14 @@
                 </a:rPr>
                 <a:t>Rigidbody 施力</a:t>
               </a:r>
+              <a:endParaRPr lang="zh-CN" sz="1800" dirty="0">
+                <a:solidFill>
+                  <a:schemeClr val="dk1"/>
+                </a:solidFill>
+                <a:latin typeface="+mn-lt"/>
+                <a:ea typeface="+mn-ea"/>
+                <a:cs typeface="+mn-cs"/>
+              </a:endParaRPr>
             </a:p>
           </p:txBody>
         </p:sp>
@@ -19903,7 +20937,7 @@
             </a:bodyPr>
             <a:lstStyle/>
             <a:p>
-              <a:pPr algn="l" marL="194310" indent="-194310">
+              <a:pPr marL="194310" indent="-194310" algn="l">
                 <a:buClr>
                   <a:schemeClr val="dk1"/>
                 </a:buClr>
@@ -19922,6 +20956,14 @@
                 </a:rPr>
                 <a:t>物理速度与移动</a:t>
               </a:r>
+              <a:endParaRPr lang="zh-CN" sz="1800" dirty="0">
+                <a:solidFill>
+                  <a:schemeClr val="dk1"/>
+                </a:solidFill>
+                <a:latin typeface="+mn-lt"/>
+                <a:ea typeface="+mn-ea"/>
+                <a:cs typeface="+mn-cs"/>
+              </a:endParaRPr>
             </a:p>
           </p:txBody>
         </p:sp>
@@ -19950,7 +20992,7 @@
             </a:bodyPr>
             <a:lstStyle/>
             <a:p>
-              <a:pPr algn="l" marL="194310" indent="-194310">
+              <a:pPr marL="194310" indent="-194310" algn="l">
                 <a:buClr>
                   <a:schemeClr val="dk1"/>
                 </a:buClr>
@@ -19969,6 +21011,14 @@
                 </a:rPr>
                 <a:t>固定物理时间步</a:t>
               </a:r>
+              <a:endParaRPr lang="zh-CN" sz="1800" dirty="0">
+                <a:solidFill>
+                  <a:schemeClr val="dk1"/>
+                </a:solidFill>
+                <a:latin typeface="+mn-lt"/>
+                <a:ea typeface="+mn-ea"/>
+                <a:cs typeface="+mn-cs"/>
+              </a:endParaRPr>
             </a:p>
           </p:txBody>
         </p:sp>
@@ -20027,12 +21077,20 @@
                   <a:solidFill>
                     <a:srgbClr val="8C5A00"/>
                   </a:solidFill>
-                  <a:latin typeface="Consolas"/>
-                  <a:ea typeface="Consolas"/>
-                  <a:cs typeface="Consolas"/>
+                  <a:latin typeface="Consolas" panose="020B0609020204030204"/>
+                  <a:ea typeface="Consolas" panose="020B0609020204030204"/>
+                  <a:cs typeface="Consolas" panose="020B0609020204030204"/>
                 </a:rPr>
                 <a:t>body.AddForce(...)</a:t>
               </a:r>
+              <a:endParaRPr lang="en-US" sz="1580" b="1" dirty="0">
+                <a:solidFill>
+                  <a:srgbClr val="8C5A00"/>
+                </a:solidFill>
+                <a:latin typeface="Consolas" panose="020B0609020204030204"/>
+                <a:ea typeface="Consolas" panose="020B0609020204030204"/>
+                <a:cs typeface="Consolas" panose="020B0609020204030204"/>
+              </a:endParaRPr>
             </a:p>
           </p:txBody>
         </p:sp>
@@ -20289,12 +21347,20 @@
                   <a:solidFill>
                     <a:srgbClr val="2F8F6A"/>
                   </a:solidFill>
-                  <a:latin typeface="Consolas"/>
-                  <a:ea typeface="Consolas"/>
-                  <a:cs typeface="Consolas"/>
+                  <a:latin typeface="Consolas" panose="020B0609020204030204"/>
+                  <a:ea typeface="Consolas" panose="020B0609020204030204"/>
+                  <a:cs typeface="Consolas" panose="020B0609020204030204"/>
                 </a:rPr>
                 <a:t>LateUpdate</a:t>
               </a:r>
+              <a:endParaRPr lang="en-US" sz="2400" b="1" dirty="0">
+                <a:solidFill>
+                  <a:srgbClr val="2F8F6A"/>
+                </a:solidFill>
+                <a:latin typeface="Consolas" panose="020B0609020204030204"/>
+                <a:ea typeface="Consolas" panose="020B0609020204030204"/>
+                <a:cs typeface="Consolas" panose="020B0609020204030204"/>
+              </a:endParaRPr>
             </a:p>
           </p:txBody>
         </p:sp>
@@ -20335,6 +21401,14 @@
                 </a:rPr>
                 <a:t>适合</a:t>
               </a:r>
+              <a:endParaRPr lang="zh-CN" sz="1950" b="1" dirty="0">
+                <a:solidFill>
+                  <a:schemeClr val="dk1"/>
+                </a:solidFill>
+                <a:latin typeface="+mn-lt"/>
+                <a:ea typeface="+mn-ea"/>
+                <a:cs typeface="+mn-cs"/>
+              </a:endParaRPr>
             </a:p>
           </p:txBody>
         </p:sp>
@@ -20363,7 +21437,7 @@
             </a:bodyPr>
             <a:lstStyle/>
             <a:p>
-              <a:pPr algn="l" marL="194310" indent="-194310">
+              <a:pPr marL="194310" indent="-194310" algn="l">
                 <a:buClr>
                   <a:schemeClr val="dk1"/>
                 </a:buClr>
@@ -20382,6 +21456,14 @@
                 </a:rPr>
                 <a:t>摄像机跟随</a:t>
               </a:r>
+              <a:endParaRPr lang="zh-CN" sz="1800" dirty="0">
+                <a:solidFill>
+                  <a:schemeClr val="dk1"/>
+                </a:solidFill>
+                <a:latin typeface="+mn-lt"/>
+                <a:ea typeface="+mn-ea"/>
+                <a:cs typeface="+mn-cs"/>
+              </a:endParaRPr>
             </a:p>
           </p:txBody>
         </p:sp>
@@ -20410,7 +21492,7 @@
             </a:bodyPr>
             <a:lstStyle/>
             <a:p>
-              <a:pPr algn="l" marL="194310" indent="-194310">
+              <a:pPr marL="194310" indent="-194310" algn="l">
                 <a:buClr>
                   <a:schemeClr val="dk1"/>
                 </a:buClr>
@@ -20429,6 +21511,14 @@
                 </a:rPr>
                 <a:t>对齐与收尾</a:t>
               </a:r>
+              <a:endParaRPr lang="zh-CN" sz="1800" dirty="0">
+                <a:solidFill>
+                  <a:schemeClr val="dk1"/>
+                </a:solidFill>
+                <a:latin typeface="+mn-lt"/>
+                <a:ea typeface="+mn-ea"/>
+                <a:cs typeface="+mn-cs"/>
+              </a:endParaRPr>
             </a:p>
           </p:txBody>
         </p:sp>
@@ -20457,7 +21547,7 @@
             </a:bodyPr>
             <a:lstStyle/>
             <a:p>
-              <a:pPr algn="l" marL="194310" indent="-194310">
+              <a:pPr marL="194310" indent="-194310" algn="l">
                 <a:buClr>
                   <a:schemeClr val="dk1"/>
                 </a:buClr>
@@ -20476,6 +21566,14 @@
                 </a:rPr>
                 <a:t>等其他 Update 完成</a:t>
               </a:r>
+              <a:endParaRPr lang="zh-CN" sz="1800" dirty="0">
+                <a:solidFill>
+                  <a:schemeClr val="dk1"/>
+                </a:solidFill>
+                <a:latin typeface="+mn-lt"/>
+                <a:ea typeface="+mn-ea"/>
+                <a:cs typeface="+mn-cs"/>
+              </a:endParaRPr>
             </a:p>
           </p:txBody>
         </p:sp>
@@ -20534,12 +21632,20 @@
                   <a:solidFill>
                     <a:srgbClr val="2F8F6A"/>
                   </a:solidFill>
-                  <a:latin typeface="Consolas"/>
-                  <a:ea typeface="Consolas"/>
-                  <a:cs typeface="Consolas"/>
+                  <a:latin typeface="Consolas" panose="020B0609020204030204"/>
+                  <a:ea typeface="Consolas" panose="020B0609020204030204"/>
+                  <a:cs typeface="Consolas" panose="020B0609020204030204"/>
                 </a:rPr>
                 <a:t>Camera follows last</a:t>
               </a:r>
+              <a:endParaRPr lang="en-US" sz="1580" b="1" dirty="0">
+                <a:solidFill>
+                  <a:srgbClr val="2F8F6A"/>
+                </a:solidFill>
+                <a:latin typeface="Consolas" panose="020B0609020204030204"/>
+                <a:ea typeface="Consolas" panose="020B0609020204030204"/>
+                <a:cs typeface="Consolas" panose="020B0609020204030204"/>
+              </a:endParaRPr>
             </a:p>
           </p:txBody>
         </p:sp>
@@ -20621,6 +21727,14 @@
                 </a:rPr>
                 <a:t>连续变化要乘 deltaTime；按键触发一次创建对象，不要乘 deltaTime</a:t>
               </a:r>
+              <a:endParaRPr lang="zh-CN" sz="1800" b="1" dirty="0">
+                <a:solidFill>
+                  <a:srgbClr val="D85C45"/>
+                </a:solidFill>
+                <a:latin typeface="+mn-lt"/>
+                <a:ea typeface="+mn-ea"/>
+                <a:cs typeface="+mn-cs"/>
+              </a:endParaRPr>
             </a:p>
           </p:txBody>
         </p:sp>
@@ -20663,46 +21777,6 @@
       </p:sp>
       <p:sp>
         <p:nvSpPr>
-          <p:cNvPr id="48" name="TextBox 48"/>
-          <p:cNvSpPr txBox="1"/>
-          <p:nvPr/>
-        </p:nvSpPr>
-        <p:spPr>
-          <a:xfrm>
-            <a:off x="564642" y="6521768"/>
-            <a:ext cx="2210059" cy="264033"/>
-          </a:xfrm>
-          <a:prstGeom prst="rect">
-            <a:avLst/>
-          </a:prstGeom>
-          <a:noFill/>
-          <a:ln>
-            <a:noFill/>
-          </a:ln>
-        </p:spPr>
-        <p:txBody>
-          <a:bodyPr wrap="none" lIns="0" tIns="0" rIns="0" bIns="0" anchor="t" anchorCtr="0">
-            <a:spAutoFit/>
-          </a:bodyPr>
-          <a:lstStyle/>
-          <a:p>
-            <a:pPr algn="l"/>
-            <a:r>
-              <a:rPr lang="zh-CN" sz="1350" dirty="0">
-                <a:solidFill>
-                  <a:schemeClr val="accent5"/>
-                </a:solidFill>
-                <a:latin typeface="+mn-lt"/>
-                <a:ea typeface="+mn-ea"/>
-                <a:cs typeface="+mn-cs"/>
-              </a:rPr>
-              <a:t>Unity 语法基础 · 更新循环</a:t>
-            </a:r>
-          </a:p>
-        </p:txBody>
-      </p:sp>
-      <p:sp>
-        <p:nvSpPr>
           <p:cNvPr id="49" name="TextBox 49"/>
           <p:cNvSpPr txBox="1"/>
           <p:nvPr/>
@@ -20732,12 +21806,19 @@
                 <a:solidFill>
                   <a:schemeClr val="accent5"/>
                 </a:solidFill>
-                <a:latin typeface="Consolas"/>
-                <a:ea typeface="Consolas"/>
-                <a:cs typeface="Consolas"/>
+                <a:latin typeface="Consolas" panose="020B0609020204030204"/>
+                <a:ea typeface="Consolas" panose="020B0609020204030204"/>
+                <a:cs typeface="Consolas" panose="020B0609020204030204"/>
               </a:rPr>
-              <a:t>6</a:t>
             </a:fld>
+            <a:endParaRPr lang="en-US" sz="1350" dirty="0">
+              <a:solidFill>
+                <a:schemeClr val="accent5"/>
+              </a:solidFill>
+              <a:latin typeface="Consolas" panose="020B0609020204030204"/>
+              <a:ea typeface="Consolas" panose="020B0609020204030204"/>
+              <a:cs typeface="Consolas" panose="020B0609020204030204"/>
+            </a:endParaRPr>
           </a:p>
         </p:txBody>
       </p:sp>
@@ -20746,14 +21827,23 @@
   <p:clrMapOvr>
     <a:masterClrMapping/>
   </p:clrMapOvr>
-  <p:transition p14:dur="400">
-    <p:fade/>
-  </p:transition>
+  <mc:AlternateContent xmlns:mc="http://schemas.openxmlformats.org/markup-compatibility/2006">
+    <mc:Choice xmlns:p14="http://schemas.microsoft.com/office/powerpoint/2010/main" Requires="p14">
+      <p:transition p14:dur="400">
+        <p:fade/>
+      </p:transition>
+    </mc:Choice>
+    <mc:Fallback>
+      <p:transition>
+        <p:fade/>
+      </p:transition>
+    </mc:Fallback>
+  </mc:AlternateContent>
 </p:sld>
 </file>
 
 <file path=ppt/slides/slide7.xml><?xml version="1.0" encoding="utf-8"?>
-<p:sld xmlns:a="http://schemas.openxmlformats.org/drawingml/2006/main" xmlns:p="http://schemas.openxmlformats.org/presentationml/2006/main" xmlns:p14="http://schemas.microsoft.com/office/powerpoint/2010/main">
+<p:sld xmlns:a="http://schemas.openxmlformats.org/drawingml/2006/main" xmlns:r="http://schemas.openxmlformats.org/officeDocument/2006/relationships" xmlns:p="http://schemas.openxmlformats.org/presentationml/2006/main">
   <p:cSld>
     <p:spTree>
       <p:nvGrpSpPr>
@@ -20820,6 +21910,14 @@
                 </a:rPr>
                 <a:t>Transform 同时保存空间状态与父子层级</a:t>
               </a:r>
+              <a:endParaRPr lang="zh-CN" sz="4200" b="1" dirty="0">
+                <a:solidFill>
+                  <a:schemeClr val="dk1"/>
+                </a:solidFill>
+                <a:latin typeface="+mj-lt"/>
+                <a:ea typeface="+mj-ea"/>
+                <a:cs typeface="+mj-cs"/>
+              </a:endParaRPr>
             </a:p>
           </p:txBody>
         </p:sp>
@@ -20860,6 +21958,14 @@
                 </a:rPr>
                 <a:t>世界 / 局部、方向向量、父子关系和坐标转换属于同一套空间语义</a:t>
               </a:r>
+              <a:endParaRPr lang="zh-CN" sz="1800" dirty="0">
+                <a:solidFill>
+                  <a:schemeClr val="dk2"/>
+                </a:solidFill>
+                <a:latin typeface="+mn-lt"/>
+                <a:ea typeface="+mn-ea"/>
+                <a:cs typeface="+mn-cs"/>
+              </a:endParaRPr>
             </a:p>
           </p:txBody>
         </p:sp>
@@ -20872,7 +21978,7 @@
         </p:nvGrpSpPr>
         <p:grpSpPr>
           <a:xfrm>
-            <a:off x="628650" y="1524000"/>
+            <a:off x="628650" y="1497330"/>
             <a:ext cx="4095750" cy="4000500"/>
             <a:chOff x="628650" y="1524000"/>
             <a:chExt cx="4095750" cy="4000500"/>
@@ -21168,6 +22274,14 @@
                 </a:rPr>
                 <a:t>空间三要素</a:t>
               </a:r>
+              <a:endParaRPr lang="zh-CN" sz="2700" b="1" dirty="0">
+                <a:solidFill>
+                  <a:schemeClr val="accent1"/>
+                </a:solidFill>
+                <a:latin typeface="+mj-lt"/>
+                <a:ea typeface="+mj-ea"/>
+                <a:cs typeface="+mj-cs"/>
+              </a:endParaRPr>
             </a:p>
           </p:txBody>
         </p:sp>
@@ -21179,10 +22293,10 @@
           </p:nvGrpSpPr>
           <p:grpSpPr>
             <a:xfrm>
-              <a:off x="1752600" y="2857500"/>
-              <a:ext cx="2247900" cy="2076450"/>
-              <a:chOff x="1752600" y="2857500"/>
-              <a:chExt cx="2247900" cy="2076450"/>
+              <a:off x="1947896" y="2857500"/>
+              <a:ext cx="1456228" cy="1524000"/>
+              <a:chOff x="1947896" y="2857500"/>
+              <a:chExt cx="1456228" cy="1524000"/>
             </a:xfrm>
           </p:grpSpPr>
           <p:sp>
@@ -21193,7 +22307,7 @@
             </p:nvSpPr>
             <p:spPr>
               <a:xfrm>
-                <a:off x="2676525" y="4267200"/>
+                <a:off x="1947896" y="4267200"/>
                 <a:ext cx="1304925" cy="9525"/>
               </a:xfrm>
               <a:custGeom>
@@ -21229,7 +22343,7 @@
             </p:nvSpPr>
             <p:spPr>
               <a:xfrm>
-                <a:off x="2676525" y="2876550"/>
+                <a:off x="2072723" y="2865120"/>
                 <a:ext cx="9525" cy="1390650"/>
               </a:xfrm>
               <a:custGeom>
@@ -21264,9 +22378,9 @@
               <p:nvPr/>
             </p:nvSpPr>
             <p:spPr>
-              <a:xfrm>
-                <a:off x="1771650" y="4267200"/>
-                <a:ext cx="904875" cy="647700"/>
+              <a:xfrm rot="720000">
+                <a:off x="1954297" y="3789680"/>
+                <a:ext cx="665480" cy="487045"/>
               </a:xfrm>
               <a:custGeom>
                 <a:avLst/>
@@ -21301,7 +22415,7 @@
             </p:nvSpPr>
             <p:spPr>
               <a:xfrm>
-                <a:off x="3848100" y="4152900"/>
+                <a:off x="3251724" y="4152900"/>
                 <a:ext cx="152400" cy="228600"/>
               </a:xfrm>
               <a:custGeom>
@@ -21340,7 +22454,7 @@
             </p:nvSpPr>
             <p:spPr>
               <a:xfrm>
-                <a:off x="2562225" y="2857500"/>
+                <a:off x="1963000" y="2857500"/>
                 <a:ext cx="228600" cy="171450"/>
               </a:xfrm>
               <a:custGeom>
@@ -21378,8 +22492,8 @@
               <p:nvPr/>
             </p:nvSpPr>
             <p:spPr>
-              <a:xfrm>
-                <a:off x="1752600" y="4743450"/>
+              <a:xfrm rot="11280000">
+                <a:off x="2557669" y="3785870"/>
                 <a:ext cx="238125" cy="190500"/>
               </a:xfrm>
               <a:custGeom>
@@ -21409,6 +22523,12 @@
                 </a:solidFill>
               </a:ln>
             </p:spPr>
+            <p:txBody>
+              <a:bodyPr/>
+              <a:p>
+                <a:endParaRPr lang="zh-CN" altLang="en-US"/>
+              </a:p>
+            </p:txBody>
           </p:sp>
         </p:grpSp>
         <p:sp>
@@ -21419,7 +22539,7 @@
           </p:nvSpPr>
           <p:spPr>
             <a:xfrm>
-              <a:off x="2276475" y="3867150"/>
+              <a:off x="1685925" y="3867150"/>
               <a:ext cx="800100" cy="800100"/>
             </a:xfrm>
             <a:prstGeom prst="ellipse">
@@ -21443,7 +22563,7 @@
           </p:nvSpPr>
           <p:spPr>
             <a:xfrm>
-              <a:off x="2437527" y="4174808"/>
+              <a:off x="1846977" y="4174808"/>
               <a:ext cx="477997" cy="322707"/>
             </a:xfrm>
             <a:prstGeom prst="rect">
@@ -21466,12 +22586,20 @@
                   <a:solidFill>
                     <a:srgbClr val="FFFFFF"/>
                   </a:solidFill>
-                  <a:latin typeface="Consolas"/>
-                  <a:ea typeface="Consolas"/>
-                  <a:cs typeface="Consolas"/>
+                  <a:latin typeface="Consolas" panose="020B0609020204030204"/>
+                  <a:ea typeface="Consolas" panose="020B0609020204030204"/>
+                  <a:cs typeface="Consolas" panose="020B0609020204030204"/>
                 </a:rPr>
                 <a:t>Self</a:t>
               </a:r>
+              <a:endParaRPr lang="en-US" sz="1650" b="1" dirty="0">
+                <a:solidFill>
+                  <a:srgbClr val="FFFFFF"/>
+                </a:solidFill>
+                <a:latin typeface="Consolas" panose="020B0609020204030204"/>
+                <a:ea typeface="Consolas" panose="020B0609020204030204"/>
+                <a:cs typeface="Consolas" panose="020B0609020204030204"/>
+              </a:endParaRPr>
             </a:p>
           </p:txBody>
         </p:sp>
@@ -21483,7 +22611,7 @@
           </p:nvSpPr>
           <p:spPr>
             <a:xfrm>
-              <a:off x="4106418" y="4165282"/>
+              <a:off x="3515868" y="4165282"/>
               <a:ext cx="599837" cy="322707"/>
             </a:xfrm>
             <a:prstGeom prst="rect">
@@ -21506,12 +22634,20 @@
                   <a:solidFill>
                     <a:srgbClr val="D85C45"/>
                   </a:solidFill>
-                  <a:latin typeface="Consolas"/>
-                  <a:ea typeface="Consolas"/>
-                  <a:cs typeface="Consolas"/>
+                  <a:latin typeface="Consolas" panose="020B0609020204030204"/>
+                  <a:ea typeface="Consolas" panose="020B0609020204030204"/>
+                  <a:cs typeface="Consolas" panose="020B0609020204030204"/>
                 </a:rPr>
                 <a:t>right</a:t>
               </a:r>
+              <a:endParaRPr lang="en-US" sz="1650" b="1" dirty="0">
+                <a:solidFill>
+                  <a:srgbClr val="D85C45"/>
+                </a:solidFill>
+                <a:latin typeface="Consolas" panose="020B0609020204030204"/>
+                <a:ea typeface="Consolas" panose="020B0609020204030204"/>
+                <a:cs typeface="Consolas" panose="020B0609020204030204"/>
+              </a:endParaRPr>
             </a:p>
           </p:txBody>
         </p:sp>
@@ -21523,7 +22659,7 @@
           </p:nvSpPr>
           <p:spPr>
             <a:xfrm>
-              <a:off x="2791968" y="2698432"/>
+              <a:off x="2201418" y="2698432"/>
               <a:ext cx="273316" cy="322707"/>
             </a:xfrm>
             <a:prstGeom prst="rect">
@@ -21546,12 +22682,20 @@
                   <a:solidFill>
                     <a:srgbClr val="2F8F6A"/>
                   </a:solidFill>
-                  <a:latin typeface="Consolas"/>
-                  <a:ea typeface="Consolas"/>
-                  <a:cs typeface="Consolas"/>
+                  <a:latin typeface="Consolas" panose="020B0609020204030204"/>
+                  <a:ea typeface="Consolas" panose="020B0609020204030204"/>
+                  <a:cs typeface="Consolas" panose="020B0609020204030204"/>
                 </a:rPr>
                 <a:t>up</a:t>
               </a:r>
+              <a:endParaRPr lang="en-US" sz="1650" b="1" dirty="0">
+                <a:solidFill>
+                  <a:srgbClr val="2F8F6A"/>
+                </a:solidFill>
+                <a:latin typeface="Consolas" panose="020B0609020204030204"/>
+                <a:ea typeface="Consolas" panose="020B0609020204030204"/>
+                <a:cs typeface="Consolas" panose="020B0609020204030204"/>
+              </a:endParaRPr>
             </a:p>
           </p:txBody>
         </p:sp>
@@ -21563,7 +22707,7 @@
           </p:nvSpPr>
           <p:spPr>
             <a:xfrm>
-              <a:off x="1134618" y="5003482"/>
+              <a:off x="2758313" y="3421062"/>
               <a:ext cx="961342" cy="322707"/>
             </a:xfrm>
             <a:prstGeom prst="rect">
@@ -21586,12 +22730,20 @@
                   <a:solidFill>
                     <a:schemeClr val="accent1"/>
                   </a:solidFill>
-                  <a:latin typeface="Consolas"/>
-                  <a:ea typeface="Consolas"/>
-                  <a:cs typeface="Consolas"/>
+                  <a:latin typeface="Consolas" panose="020B0609020204030204"/>
+                  <a:ea typeface="Consolas" panose="020B0609020204030204"/>
+                  <a:cs typeface="Consolas" panose="020B0609020204030204"/>
                 </a:rPr>
                 <a:t>forward</a:t>
               </a:r>
+              <a:endParaRPr lang="en-US" sz="1650" b="1" dirty="0">
+                <a:solidFill>
+                  <a:schemeClr val="accent1"/>
+                </a:solidFill>
+                <a:latin typeface="Consolas" panose="020B0609020204030204"/>
+                <a:ea typeface="Consolas" panose="020B0609020204030204"/>
+                <a:cs typeface="Consolas" panose="020B0609020204030204"/>
+              </a:endParaRPr>
             </a:p>
           </p:txBody>
         </p:sp>
@@ -21632,6 +22784,14 @@
                 </a:rPr>
                 <a:t>Space.Self 随物体朝向变化</a:t>
               </a:r>
+              <a:endParaRPr lang="zh-CN" sz="1650" dirty="0">
+                <a:solidFill>
+                  <a:schemeClr val="dk2"/>
+                </a:solidFill>
+                <a:latin typeface="+mn-lt"/>
+                <a:ea typeface="+mn-ea"/>
+                <a:cs typeface="+mn-cs"/>
+              </a:endParaRPr>
             </a:p>
           </p:txBody>
         </p:sp>
@@ -21645,9 +22805,9 @@
         <p:grpSpPr>
           <a:xfrm>
             <a:off x="5067300" y="1524000"/>
-            <a:ext cx="7963110" cy="1162050"/>
+            <a:ext cx="6553200" cy="1162050"/>
             <a:chOff x="5067300" y="1524000"/>
-            <a:chExt cx="7963110" cy="1162050"/>
+            <a:chExt cx="6553200" cy="1162050"/>
           </a:xfrm>
         </p:grpSpPr>
         <p:sp>
@@ -21713,6 +22873,14 @@
                 </a:rPr>
                 <a:t>1. 世界坐标 vs 局部坐标</a:t>
               </a:r>
+              <a:endParaRPr lang="zh-CN" sz="2550" b="1" dirty="0">
+                <a:solidFill>
+                  <a:schemeClr val="accent1"/>
+                </a:solidFill>
+                <a:latin typeface="+mj-lt"/>
+                <a:ea typeface="+mj-ea"/>
+                <a:cs typeface="+mj-cs"/>
+              </a:endParaRPr>
             </a:p>
           </p:txBody>
         </p:sp>
@@ -21747,12 +22915,20 @@
                   <a:solidFill>
                     <a:schemeClr val="dk1"/>
                   </a:solidFill>
-                  <a:latin typeface="Consolas"/>
-                  <a:ea typeface="Consolas"/>
-                  <a:cs typeface="Consolas"/>
+                  <a:latin typeface="Consolas" panose="020B0609020204030204"/>
+                  <a:ea typeface="Consolas" panose="020B0609020204030204"/>
+                  <a:cs typeface="Consolas" panose="020B0609020204030204"/>
                 </a:rPr>
                 <a:t>position / rotation</a:t>
               </a:r>
+              <a:endParaRPr lang="en-US" sz="1720" dirty="0">
+                <a:solidFill>
+                  <a:schemeClr val="dk1"/>
+                </a:solidFill>
+                <a:latin typeface="Consolas" panose="020B0609020204030204"/>
+                <a:ea typeface="Consolas" panose="020B0609020204030204"/>
+                <a:cs typeface="Consolas" panose="020B0609020204030204"/>
+              </a:endParaRPr>
             </a:p>
           </p:txBody>
         </p:sp>
@@ -21764,8 +22940,8 @@
           </p:nvSpPr>
           <p:spPr>
             <a:xfrm>
-              <a:off x="8439912" y="2099786"/>
-              <a:ext cx="4590498" cy="337376"/>
+              <a:off x="7929372" y="2101056"/>
+              <a:ext cx="3480435" cy="264160"/>
             </a:xfrm>
             <a:prstGeom prst="rect">
               <a:avLst/>
@@ -21787,12 +22963,20 @@
                   <a:solidFill>
                     <a:schemeClr val="dk1"/>
                   </a:solidFill>
-                  <a:latin typeface="Consolas"/>
-                  <a:ea typeface="Consolas"/>
-                  <a:cs typeface="Consolas"/>
+                  <a:latin typeface="Consolas" panose="020B0609020204030204"/>
+                  <a:ea typeface="Consolas" panose="020B0609020204030204"/>
+                  <a:cs typeface="Consolas" panose="020B0609020204030204"/>
                 </a:rPr>
-                <a:t>localPosition / localRotation / localScale</a:t>
+                <a:t>localPosition / localRotation</a:t>
               </a:r>
+              <a:endParaRPr lang="en-US" sz="1720" dirty="0">
+                <a:solidFill>
+                  <a:schemeClr val="dk1"/>
+                </a:solidFill>
+                <a:latin typeface="Consolas" panose="020B0609020204030204"/>
+                <a:ea typeface="Consolas" panose="020B0609020204030204"/>
+                <a:cs typeface="Consolas" panose="020B0609020204030204"/>
+              </a:endParaRPr>
             </a:p>
           </p:txBody>
         </p:sp>
@@ -21833,6 +23017,14 @@
                 </a:rPr>
                 <a:t>存在旋转或缩放的父物体时，两套数值会明显不同</a:t>
               </a:r>
+              <a:endParaRPr lang="zh-CN" sz="1500" dirty="0">
+                <a:solidFill>
+                  <a:schemeClr val="dk2"/>
+                </a:solidFill>
+                <a:latin typeface="+mn-lt"/>
+                <a:ea typeface="+mn-ea"/>
+                <a:cs typeface="+mn-cs"/>
+              </a:endParaRPr>
             </a:p>
           </p:txBody>
         </p:sp>
@@ -21914,6 +23106,14 @@
                 </a:rPr>
                 <a:t>2. 移动与朝向</a:t>
               </a:r>
+              <a:endParaRPr lang="zh-CN" sz="2550" b="1" dirty="0">
+                <a:solidFill>
+                  <a:srgbClr val="8C5A00"/>
+                </a:solidFill>
+                <a:latin typeface="+mj-lt"/>
+                <a:ea typeface="+mj-ea"/>
+                <a:cs typeface="+mj-cs"/>
+              </a:endParaRPr>
             </a:p>
           </p:txBody>
         </p:sp>
@@ -21948,12 +23148,20 @@
                   <a:solidFill>
                     <a:schemeClr val="dk1"/>
                   </a:solidFill>
-                  <a:latin typeface="Consolas"/>
-                  <a:ea typeface="Consolas"/>
-                  <a:cs typeface="Consolas"/>
+                  <a:latin typeface="Consolas" panose="020B0609020204030204"/>
+                  <a:ea typeface="Consolas" panose="020B0609020204030204"/>
+                  <a:cs typeface="Consolas" panose="020B0609020204030204"/>
                 </a:rPr>
                 <a:t>Translate(..., Space.Self) · Rotate · LookRotation</a:t>
               </a:r>
+              <a:endParaRPr lang="en-US" sz="1720" dirty="0">
+                <a:solidFill>
+                  <a:schemeClr val="dk1"/>
+                </a:solidFill>
+                <a:latin typeface="Consolas" panose="020B0609020204030204"/>
+                <a:ea typeface="Consolas" panose="020B0609020204030204"/>
+                <a:cs typeface="Consolas" panose="020B0609020204030204"/>
+              </a:endParaRPr>
             </a:p>
           </p:txBody>
         </p:sp>
@@ -21994,6 +23202,14 @@
                 </a:rPr>
                 <a:t>水平朝向目标时，先把 direction.y 设为 0；复杂旋转优先 Quaternion</a:t>
               </a:r>
+              <a:endParaRPr lang="zh-CN" sz="1500" dirty="0">
+                <a:solidFill>
+                  <a:schemeClr val="dk2"/>
+                </a:solidFill>
+                <a:latin typeface="+mn-lt"/>
+                <a:ea typeface="+mn-ea"/>
+                <a:cs typeface="+mn-cs"/>
+              </a:endParaRPr>
             </a:p>
           </p:txBody>
         </p:sp>
@@ -22006,10 +23222,10 @@
         </p:nvGrpSpPr>
         <p:grpSpPr>
           <a:xfrm>
-            <a:off x="5067300" y="4229100"/>
-            <a:ext cx="6553200" cy="1375601"/>
-            <a:chOff x="5067300" y="4229100"/>
-            <a:chExt cx="6553200" cy="1375601"/>
+            <a:off x="5067300" y="4221480"/>
+            <a:ext cx="6553200" cy="1809481"/>
+            <a:chOff x="5067300" y="4223645"/>
+            <a:chExt cx="6553200" cy="1295400"/>
           </a:xfrm>
         </p:grpSpPr>
         <p:sp>
@@ -22020,7 +23236,7 @@
           </p:nvSpPr>
           <p:spPr>
             <a:xfrm>
-              <a:off x="5067300" y="4229100"/>
+              <a:off x="5067300" y="4223645"/>
               <a:ext cx="6553200" cy="1295400"/>
             </a:xfrm>
             <a:prstGeom prst="roundRect">
@@ -22047,7 +23263,7 @@
           <p:spPr>
             <a:xfrm>
               <a:off x="5282946" y="4353878"/>
-              <a:ext cx="3986723" cy="498729"/>
+              <a:ext cx="3986723" cy="280484"/>
             </a:xfrm>
             <a:prstGeom prst="rect">
               <a:avLst/>
@@ -22058,7 +23274,7 @@
             </a:ln>
           </p:spPr>
           <p:txBody>
-            <a:bodyPr wrap="none" lIns="0" tIns="0" rIns="0" bIns="0" anchor="t" anchorCtr="0">
+            <a:bodyPr wrap="square" lIns="0" tIns="0" rIns="0" bIns="0" anchor="t" anchorCtr="0">
               <a:spAutoFit/>
             </a:bodyPr>
             <a:lstStyle/>
@@ -22075,6 +23291,14 @@
                 </a:rPr>
                 <a:t>3. 父子关系与坐标转换</a:t>
               </a:r>
+              <a:endParaRPr lang="zh-CN" sz="2550" b="1" dirty="0">
+                <a:solidFill>
+                  <a:srgbClr val="2F8F6A"/>
+                </a:solidFill>
+                <a:latin typeface="+mj-lt"/>
+                <a:ea typeface="+mj-ea"/>
+                <a:cs typeface="+mj-cs"/>
+              </a:endParaRPr>
             </a:p>
           </p:txBody>
         </p:sp>
@@ -22086,8 +23310,8 @@
           </p:nvSpPr>
           <p:spPr>
             <a:xfrm>
-              <a:off x="5287518" y="4803458"/>
-              <a:ext cx="4616625" cy="322707"/>
+              <a:off x="5287518" y="4683448"/>
+              <a:ext cx="4616625" cy="181383"/>
             </a:xfrm>
             <a:prstGeom prst="rect">
               <a:avLst/>
@@ -22098,7 +23322,7 @@
             </a:ln>
           </p:spPr>
           <p:txBody>
-            <a:bodyPr wrap="none" lIns="0" tIns="0" rIns="0" bIns="0" anchor="t" anchorCtr="0">
+            <a:bodyPr wrap="square" lIns="0" tIns="0" rIns="0" bIns="0" anchor="t" anchorCtr="0">
               <a:spAutoFit/>
             </a:bodyPr>
             <a:lstStyle/>
@@ -22109,12 +23333,20 @@
                   <a:solidFill>
                     <a:schemeClr val="dk1"/>
                   </a:solidFill>
-                  <a:latin typeface="Consolas"/>
-                  <a:ea typeface="Microsoft YaHei"/>
-                  <a:cs typeface="Consolas"/>
+                  <a:latin typeface="Consolas" panose="020B0609020204030204"/>
+                  <a:ea typeface="微软雅黑" panose="020B0503020204020204" charset="-122"/>
+                  <a:cs typeface="Consolas" panose="020B0609020204030204"/>
                 </a:rPr>
                 <a:t>SetParent(newParent, true) 保持世界变换</a:t>
               </a:r>
+              <a:endParaRPr lang="zh-CN" sz="1650" dirty="0">
+                <a:solidFill>
+                  <a:schemeClr val="dk1"/>
+                </a:solidFill>
+                <a:latin typeface="Consolas" panose="020B0609020204030204"/>
+                <a:ea typeface="微软雅黑" panose="020B0503020204020204" charset="-122"/>
+                <a:cs typeface="Consolas" panose="020B0609020204030204"/>
+              </a:endParaRPr>
             </a:p>
           </p:txBody>
         </p:sp>
@@ -22126,8 +23358,8 @@
           </p:nvSpPr>
           <p:spPr>
             <a:xfrm>
-              <a:off x="5287518" y="5089208"/>
-              <a:ext cx="4506343" cy="322707"/>
+              <a:off x="5287645" y="4920083"/>
+              <a:ext cx="6121400" cy="545058"/>
             </a:xfrm>
             <a:prstGeom prst="rect">
               <a:avLst/>
@@ -22138,7 +23370,7 @@
             </a:ln>
           </p:spPr>
           <p:txBody>
-            <a:bodyPr wrap="none" lIns="0" tIns="0" rIns="0" bIns="0" anchor="t" anchorCtr="0">
+            <a:bodyPr wrap="square" lIns="0" tIns="0" rIns="0" bIns="0" anchor="t" anchorCtr="0">
               <a:spAutoFit/>
             </a:bodyPr>
             <a:lstStyle/>
@@ -22149,52 +23381,78 @@
                   <a:solidFill>
                     <a:schemeClr val="dk1"/>
                   </a:solidFill>
-                  <a:latin typeface="Consolas"/>
-                  <a:ea typeface="Consolas"/>
-                  <a:cs typeface="Consolas"/>
+                  <a:latin typeface="Consolas" panose="020B0609020204030204"/>
+                  <a:ea typeface="Consolas" panose="020B0609020204030204"/>
+                  <a:cs typeface="Consolas" panose="020B0609020204030204"/>
                 </a:rPr>
                 <a:t>TransformPoint ↔ InverseTransformPoint</a:t>
               </a:r>
+              <a:endParaRPr lang="en-US" sz="1650" dirty="0">
+                <a:solidFill>
+                  <a:schemeClr val="dk1"/>
+                </a:solidFill>
+                <a:latin typeface="Consolas" panose="020B0609020204030204"/>
+                <a:ea typeface="Consolas" panose="020B0609020204030204"/>
+                <a:cs typeface="Consolas" panose="020B0609020204030204"/>
+              </a:endParaRPr>
             </a:p>
-          </p:txBody>
-        </p:sp>
-        <p:sp>
-          <p:nvSpPr>
-            <p:cNvPr id="41" name="TextBox 41"/>
-            <p:cNvSpPr txBox="1"/>
-            <p:nvPr/>
-          </p:nvSpPr>
-          <p:spPr>
-            <a:xfrm>
-              <a:off x="8983218" y="5089208"/>
-              <a:ext cx="2263140" cy="322707"/>
-            </a:xfrm>
-            <a:prstGeom prst="rect">
-              <a:avLst/>
-            </a:prstGeom>
-            <a:noFill/>
-            <a:ln>
-              <a:noFill/>
-            </a:ln>
-          </p:spPr>
-          <p:txBody>
-            <a:bodyPr wrap="none" lIns="0" tIns="0" rIns="0" bIns="0" anchor="t" anchorCtr="0">
-              <a:spAutoFit/>
-            </a:bodyPr>
-            <a:lstStyle/>
             <a:p>
               <a:pPr algn="l"/>
               <a:r>
+                <a:rPr lang="en-US" altLang="zh-CN" sz="1650" dirty="0">
+                  <a:solidFill>
+                    <a:schemeClr val="dk1"/>
+                  </a:solidFill>
+                  <a:latin typeface="Consolas" panose="020B0609020204030204"/>
+                  <a:ea typeface="Consolas" panose="020B0609020204030204"/>
+                  <a:cs typeface="Consolas" panose="020B0609020204030204"/>
+                </a:rPr>
+                <a:t>TransformDirection</a:t>
+              </a:r>
+              <a:r>
                 <a:rPr lang="en-US" sz="1650" dirty="0">
                   <a:solidFill>
                     <a:schemeClr val="dk1"/>
                   </a:solidFill>
-                  <a:latin typeface="Consolas"/>
-                  <a:ea typeface="Consolas"/>
-                  <a:cs typeface="Consolas"/>
+                  <a:latin typeface="Consolas" panose="020B0609020204030204"/>
+                  <a:ea typeface="Consolas" panose="020B0609020204030204"/>
+                  <a:cs typeface="Consolas" panose="020B0609020204030204"/>
+                  <a:sym typeface="+mn-ea"/>
                 </a:rPr>
-                <a:t>Direction ↔ Direction</a:t>
+                <a:t> ↔ </a:t>
               </a:r>
+              <a:r>
+                <a:rPr lang="en-US" altLang="zh-CN" sz="1650" dirty="0">
+                  <a:solidFill>
+                    <a:schemeClr val="dk1"/>
+                  </a:solidFill>
+                  <a:latin typeface="Consolas" panose="020B0609020204030204"/>
+                  <a:ea typeface="Consolas" panose="020B0609020204030204"/>
+                  <a:cs typeface="Consolas" panose="020B0609020204030204"/>
+                  <a:sym typeface="+mn-ea"/>
+                </a:rPr>
+                <a:t>InverseTransformDirection</a:t>
+              </a:r>
+              <a:endParaRPr lang="en-US" altLang="zh-CN" sz="1650" dirty="0">
+                <a:solidFill>
+                  <a:schemeClr val="dk1"/>
+                </a:solidFill>
+                <a:latin typeface="Consolas" panose="020B0609020204030204"/>
+                <a:ea typeface="Consolas" panose="020B0609020204030204"/>
+                <a:cs typeface="Consolas" panose="020B0609020204030204"/>
+                <a:sym typeface="+mn-ea"/>
+              </a:endParaRPr>
+            </a:p>
+            <a:p>
+              <a:pPr algn="l"/>
+              <a:endParaRPr lang="en-US" sz="1650" dirty="0">
+                <a:solidFill>
+                  <a:schemeClr val="dk1"/>
+                </a:solidFill>
+                <a:latin typeface="Consolas" panose="020B0609020204030204"/>
+                <a:ea typeface="Consolas" panose="020B0609020204030204"/>
+                <a:cs typeface="Consolas" panose="020B0609020204030204"/>
+              </a:endParaRPr>
             </a:p>
           </p:txBody>
         </p:sp>
@@ -22207,7 +23465,7 @@
           <p:spPr>
             <a:xfrm>
               <a:off x="5289042" y="5340668"/>
-              <a:ext cx="4011930" cy="264033"/>
+              <a:ext cx="4011930" cy="148652"/>
             </a:xfrm>
             <a:prstGeom prst="rect">
               <a:avLst/>
@@ -22218,7 +23476,7 @@
             </a:ln>
           </p:spPr>
           <p:txBody>
-            <a:bodyPr wrap="none" lIns="0" tIns="0" rIns="0" bIns="0" anchor="t" anchorCtr="0">
+            <a:bodyPr wrap="square" lIns="0" tIns="0" rIns="0" bIns="0" anchor="t" anchorCtr="0">
               <a:spAutoFit/>
             </a:bodyPr>
             <a:lstStyle/>
@@ -22235,6 +23493,14 @@
                 </a:rPr>
                 <a:t>点含位置信息；方向不含位置，转换函数不要混用</a:t>
               </a:r>
+              <a:endParaRPr lang="zh-CN" sz="1350" dirty="0">
+                <a:solidFill>
+                  <a:schemeClr val="dk2"/>
+                </a:solidFill>
+                <a:latin typeface="+mn-lt"/>
+                <a:ea typeface="+mn-ea"/>
+                <a:cs typeface="+mn-cs"/>
+              </a:endParaRPr>
             </a:p>
           </p:txBody>
         </p:sp>
@@ -22277,46 +23543,6 @@
       </p:sp>
       <p:sp>
         <p:nvSpPr>
-          <p:cNvPr id="45" name="TextBox 45"/>
-          <p:cNvSpPr txBox="1"/>
-          <p:nvPr/>
-        </p:nvSpPr>
-        <p:spPr>
-          <a:xfrm>
-            <a:off x="564642" y="6521768"/>
-            <a:ext cx="2413722" cy="264033"/>
-          </a:xfrm>
-          <a:prstGeom prst="rect">
-            <a:avLst/>
-          </a:prstGeom>
-          <a:noFill/>
-          <a:ln>
-            <a:noFill/>
-          </a:ln>
-        </p:spPr>
-        <p:txBody>
-          <a:bodyPr wrap="none" lIns="0" tIns="0" rIns="0" bIns="0" anchor="t" anchorCtr="0">
-            <a:spAutoFit/>
-          </a:bodyPr>
-          <a:lstStyle/>
-          <a:p>
-            <a:pPr algn="l"/>
-            <a:r>
-              <a:rPr lang="zh-CN" sz="1350" dirty="0">
-                <a:solidFill>
-                  <a:schemeClr val="accent5"/>
-                </a:solidFill>
-                <a:latin typeface="+mn-lt"/>
-                <a:ea typeface="+mn-ea"/>
-                <a:cs typeface="+mn-cs"/>
-              </a:rPr>
-              <a:t>Unity 语法基础 · Transform</a:t>
-            </a:r>
-          </a:p>
-        </p:txBody>
-      </p:sp>
-      <p:sp>
-        <p:nvSpPr>
           <p:cNvPr id="46" name="TextBox 46"/>
           <p:cNvSpPr txBox="1"/>
           <p:nvPr/>
@@ -22346,12 +23572,19 @@
                 <a:solidFill>
                   <a:schemeClr val="accent5"/>
                 </a:solidFill>
-                <a:latin typeface="Consolas"/>
-                <a:ea typeface="Consolas"/>
-                <a:cs typeface="Consolas"/>
+                <a:latin typeface="Consolas" panose="020B0609020204030204"/>
+                <a:ea typeface="Consolas" panose="020B0609020204030204"/>
+                <a:cs typeface="Consolas" panose="020B0609020204030204"/>
               </a:rPr>
-              <a:t>7</a:t>
             </a:fld>
+            <a:endParaRPr lang="en-US" sz="1350" dirty="0">
+              <a:solidFill>
+                <a:schemeClr val="accent5"/>
+              </a:solidFill>
+              <a:latin typeface="Consolas" panose="020B0609020204030204"/>
+              <a:ea typeface="Consolas" panose="020B0609020204030204"/>
+              <a:cs typeface="Consolas" panose="020B0609020204030204"/>
+            </a:endParaRPr>
           </a:p>
         </p:txBody>
       </p:sp>
@@ -22360,14 +23593,23 @@
   <p:clrMapOvr>
     <a:masterClrMapping/>
   </p:clrMapOvr>
-  <p:transition p14:dur="400">
-    <p:fade/>
-  </p:transition>
+  <mc:AlternateContent xmlns:mc="http://schemas.openxmlformats.org/markup-compatibility/2006">
+    <mc:Choice xmlns:p14="http://schemas.microsoft.com/office/powerpoint/2010/main" Requires="p14">
+      <p:transition p14:dur="400">
+        <p:fade/>
+      </p:transition>
+    </mc:Choice>
+    <mc:Fallback>
+      <p:transition>
+        <p:fade/>
+      </p:transition>
+    </mc:Fallback>
+  </mc:AlternateContent>
 </p:sld>
 </file>
 
 <file path=ppt/slides/slide8.xml><?xml version="1.0" encoding="utf-8"?>
-<p:sld xmlns:a="http://schemas.openxmlformats.org/drawingml/2006/main" xmlns:p="http://schemas.openxmlformats.org/presentationml/2006/main" xmlns:p14="http://schemas.microsoft.com/office/powerpoint/2010/main">
+<p:sld xmlns:a="http://schemas.openxmlformats.org/drawingml/2006/main" xmlns:r="http://schemas.openxmlformats.org/officeDocument/2006/relationships" xmlns:p="http://schemas.openxmlformats.org/presentationml/2006/main">
   <p:cSld>
     <p:spTree>
       <p:nvGrpSpPr>
@@ -22434,6 +23676,14 @@
                 </a:rPr>
                 <a:t>引用先连好，运行时只做必要查找</a:t>
               </a:r>
+              <a:endParaRPr lang="zh-CN" sz="4200" b="1" dirty="0">
+                <a:solidFill>
+                  <a:schemeClr val="dk1"/>
+                </a:solidFill>
+                <a:latin typeface="+mj-lt"/>
+                <a:ea typeface="+mj-ea"/>
+                <a:cs typeface="+mj-cs"/>
+              </a:endParaRPr>
             </a:p>
           </p:txBody>
         </p:sp>
@@ -22474,6 +23724,14 @@
                 </a:rPr>
                 <a:t>GameObject 管对象状态；Component 提供能力；引用应在初始化阶段建立并缓存</a:t>
               </a:r>
+              <a:endParaRPr lang="zh-CN" sz="1800" dirty="0">
+                <a:solidFill>
+                  <a:schemeClr val="dk2"/>
+                </a:solidFill>
+                <a:latin typeface="+mn-lt"/>
+                <a:ea typeface="+mn-ea"/>
+                <a:cs typeface="+mn-cs"/>
+              </a:endParaRPr>
             </a:p>
           </p:txBody>
         </p:sp>
@@ -22762,6 +24020,14 @@
                 </a:rPr>
                 <a:t>GameObject：对象身份 + 激活状态 + 组件容器</a:t>
               </a:r>
+              <a:endParaRPr lang="zh-CN" sz="2550" b="1" dirty="0">
+                <a:solidFill>
+                  <a:schemeClr val="accent1"/>
+                </a:solidFill>
+                <a:latin typeface="+mn-lt"/>
+                <a:ea typeface="+mn-ea"/>
+                <a:cs typeface="+mn-cs"/>
+              </a:endParaRPr>
             </a:p>
           </p:txBody>
         </p:sp>
@@ -22774,9 +24040,9 @@
           <p:grpSpPr>
             <a:xfrm>
               <a:off x="819150" y="2343150"/>
-              <a:ext cx="3848100" cy="2800350"/>
+              <a:ext cx="3389183" cy="2800350"/>
               <a:chOff x="819150" y="2343150"/>
-              <a:chExt cx="3848100" cy="2800350"/>
+              <a:chExt cx="3389183" cy="2800350"/>
             </a:xfrm>
           </p:grpSpPr>
           <p:sp>
@@ -22884,6 +24150,14 @@
                   </a:rPr>
                   <a:t>对象状态</a:t>
                 </a:r>
+                <a:endParaRPr lang="zh-CN" sz="2550" b="1" dirty="0">
+                  <a:solidFill>
+                    <a:schemeClr val="accent1"/>
+                  </a:solidFill>
+                  <a:latin typeface="+mj-lt"/>
+                  <a:ea typeface="+mj-ea"/>
+                  <a:cs typeface="+mj-cs"/>
+                </a:endParaRPr>
               </a:p>
             </p:txBody>
           </p:sp>
@@ -22918,12 +24192,20 @@
                     <a:solidFill>
                       <a:schemeClr val="dk1"/>
                     </a:solidFill>
-                    <a:latin typeface="Consolas"/>
-                    <a:ea typeface="Consolas"/>
-                    <a:cs typeface="Consolas"/>
+                    <a:latin typeface="Consolas" panose="020B0609020204030204"/>
+                    <a:ea typeface="Consolas" panose="020B0609020204030204"/>
+                    <a:cs typeface="Consolas" panose="020B0609020204030204"/>
                   </a:rPr>
                   <a:t>name · tag · layer</a:t>
                 </a:r>
+                <a:endParaRPr lang="en-US" sz="1720" dirty="0">
+                  <a:solidFill>
+                    <a:schemeClr val="dk1"/>
+                  </a:solidFill>
+                  <a:latin typeface="Consolas" panose="020B0609020204030204"/>
+                  <a:ea typeface="Consolas" panose="020B0609020204030204"/>
+                  <a:cs typeface="Consolas" panose="020B0609020204030204"/>
+                </a:endParaRPr>
               </a:p>
             </p:txBody>
           </p:sp>
@@ -22958,12 +24240,20 @@
                     <a:solidFill>
                       <a:schemeClr val="dk1"/>
                     </a:solidFill>
-                    <a:latin typeface="Consolas"/>
-                    <a:ea typeface="Consolas"/>
-                    <a:cs typeface="Consolas"/>
+                    <a:latin typeface="Consolas" panose="020B0609020204030204"/>
+                    <a:ea typeface="Consolas" panose="020B0609020204030204"/>
+                    <a:cs typeface="Consolas" panose="020B0609020204030204"/>
                   </a:rPr>
                   <a:t>SetActive(false)</a:t>
                 </a:r>
+                <a:endParaRPr lang="en-US" sz="1720" dirty="0">
+                  <a:solidFill>
+                    <a:schemeClr val="dk1"/>
+                  </a:solidFill>
+                  <a:latin typeface="Consolas" panose="020B0609020204030204"/>
+                  <a:ea typeface="Consolas" panose="020B0609020204030204"/>
+                  <a:cs typeface="Consolas" panose="020B0609020204030204"/>
+                </a:endParaRPr>
               </a:p>
             </p:txBody>
           </p:sp>
@@ -22999,7 +24289,7 @@
             </p:nvSpPr>
             <p:spPr>
               <a:xfrm>
-                <a:off x="1173099" y="4249579"/>
+                <a:off x="1089279" y="4249579"/>
                 <a:ext cx="1135442" cy="308039"/>
               </a:xfrm>
               <a:prstGeom prst="rect">
@@ -23022,12 +24312,20 @@
                     <a:solidFill>
                       <a:schemeClr val="accent1"/>
                     </a:solidFill>
-                    <a:latin typeface="Consolas"/>
-                    <a:ea typeface="Consolas"/>
-                    <a:cs typeface="Consolas"/>
+                    <a:latin typeface="Consolas" panose="020B0609020204030204"/>
+                    <a:ea typeface="Consolas" panose="020B0609020204030204"/>
+                    <a:cs typeface="Consolas" panose="020B0609020204030204"/>
                   </a:rPr>
                   <a:t>activeSelf</a:t>
                 </a:r>
+                <a:endParaRPr lang="en-US" sz="1580" b="1" dirty="0">
+                  <a:solidFill>
+                    <a:schemeClr val="accent1"/>
+                  </a:solidFill>
+                  <a:latin typeface="Consolas" panose="020B0609020204030204"/>
+                  <a:ea typeface="Consolas" panose="020B0609020204030204"/>
+                  <a:cs typeface="Consolas" panose="020B0609020204030204"/>
+                </a:endParaRPr>
               </a:p>
             </p:txBody>
           </p:sp>
@@ -23068,6 +24366,14 @@
                   </a:rPr>
                   <a:t>自身开关</a:t>
                 </a:r>
+                <a:endParaRPr lang="zh-CN" sz="1500" dirty="0">
+                  <a:solidFill>
+                    <a:schemeClr val="dk2"/>
+                  </a:solidFill>
+                  <a:latin typeface="+mn-lt"/>
+                  <a:ea typeface="+mn-ea"/>
+                  <a:cs typeface="+mn-cs"/>
+                </a:endParaRPr>
               </a:p>
             </p:txBody>
           </p:sp>
@@ -23079,7 +24385,7 @@
             </p:nvSpPr>
             <p:spPr>
               <a:xfrm>
-                <a:off x="2430399" y="4249579"/>
+                <a:off x="2264982" y="4249579"/>
                 <a:ext cx="1943351" cy="308039"/>
               </a:xfrm>
               <a:prstGeom prst="rect">
@@ -23102,12 +24408,20 @@
                     <a:solidFill>
                       <a:schemeClr val="accent1"/>
                     </a:solidFill>
-                    <a:latin typeface="Consolas"/>
-                    <a:ea typeface="Consolas"/>
-                    <a:cs typeface="Consolas"/>
+                    <a:latin typeface="Consolas" panose="020B0609020204030204"/>
+                    <a:ea typeface="Consolas" panose="020B0609020204030204"/>
+                    <a:cs typeface="Consolas" panose="020B0609020204030204"/>
                   </a:rPr>
                   <a:t>activeInHierarchy</a:t>
                 </a:r>
+                <a:endParaRPr lang="en-US" sz="1580" b="1" dirty="0">
+                  <a:solidFill>
+                    <a:schemeClr val="accent1"/>
+                  </a:solidFill>
+                  <a:latin typeface="Consolas" panose="020B0609020204030204"/>
+                  <a:ea typeface="Consolas" panose="020B0609020204030204"/>
+                  <a:cs typeface="Consolas" panose="020B0609020204030204"/>
+                </a:endParaRPr>
               </a:p>
             </p:txBody>
           </p:sp>
@@ -23120,7 +24434,7 @@
             <p:spPr>
               <a:xfrm>
                 <a:off x="2430780" y="4543425"/>
-                <a:ext cx="2236470" cy="293370"/>
+                <a:ext cx="696337" cy="230505"/>
               </a:xfrm>
               <a:prstGeom prst="rect">
                 <a:avLst/>
@@ -23146,8 +24460,16 @@
                     <a:ea typeface="+mn-ea"/>
                     <a:cs typeface="+mn-cs"/>
                   </a:rPr>
-                  <a:t>考虑父对象后的真实状态</a:t>
+                  <a:t>真实状态</a:t>
                 </a:r>
+                <a:endParaRPr lang="zh-CN" sz="1500" dirty="0">
+                  <a:solidFill>
+                    <a:schemeClr val="dk2"/>
+                  </a:solidFill>
+                  <a:latin typeface="+mn-lt"/>
+                  <a:ea typeface="+mn-ea"/>
+                  <a:cs typeface="+mn-cs"/>
+                </a:endParaRPr>
               </a:p>
             </p:txBody>
           </p:sp>
@@ -23424,6 +24746,14 @@
                   </a:rPr>
                   <a:t>获取组件</a:t>
                 </a:r>
+                <a:endParaRPr lang="zh-CN" sz="2550" b="1" dirty="0">
+                  <a:solidFill>
+                    <a:srgbClr val="2F8F6A"/>
+                  </a:solidFill>
+                  <a:latin typeface="+mj-lt"/>
+                  <a:ea typeface="+mj-ea"/>
+                  <a:cs typeface="+mj-cs"/>
+                </a:endParaRPr>
               </a:p>
             </p:txBody>
           </p:sp>
@@ -23458,12 +24788,20 @@
                     <a:solidFill>
                       <a:schemeClr val="dk1"/>
                     </a:solidFill>
-                    <a:latin typeface="Consolas"/>
-                    <a:ea typeface="Consolas"/>
-                    <a:cs typeface="Consolas"/>
+                    <a:latin typeface="Consolas" panose="020B0609020204030204"/>
+                    <a:ea typeface="Consolas" panose="020B0609020204030204"/>
+                    <a:cs typeface="Consolas" panose="020B0609020204030204"/>
                   </a:rPr>
                   <a:t>GetComponent&lt;T&gt;()</a:t>
                 </a:r>
+                <a:endParaRPr lang="en-US" sz="1580" dirty="0">
+                  <a:solidFill>
+                    <a:schemeClr val="dk1"/>
+                  </a:solidFill>
+                  <a:latin typeface="Consolas" panose="020B0609020204030204"/>
+                  <a:ea typeface="Consolas" panose="020B0609020204030204"/>
+                  <a:cs typeface="Consolas" panose="020B0609020204030204"/>
+                </a:endParaRPr>
               </a:p>
             </p:txBody>
           </p:sp>
@@ -23498,12 +24836,20 @@
                     <a:solidFill>
                       <a:schemeClr val="dk1"/>
                     </a:solidFill>
-                    <a:latin typeface="Consolas"/>
-                    <a:ea typeface="Consolas"/>
-                    <a:cs typeface="Consolas"/>
+                    <a:latin typeface="Consolas" panose="020B0609020204030204"/>
+                    <a:ea typeface="Consolas" panose="020B0609020204030204"/>
+                    <a:cs typeface="Consolas" panose="020B0609020204030204"/>
                   </a:rPr>
                   <a:t>TryGetComponent(out T)</a:t>
                 </a:r>
+                <a:endParaRPr lang="en-US" sz="1580" dirty="0">
+                  <a:solidFill>
+                    <a:schemeClr val="dk1"/>
+                  </a:solidFill>
+                  <a:latin typeface="Consolas" panose="020B0609020204030204"/>
+                  <a:ea typeface="Consolas" panose="020B0609020204030204"/>
+                  <a:cs typeface="Consolas" panose="020B0609020204030204"/>
+                </a:endParaRPr>
               </a:p>
             </p:txBody>
           </p:sp>
@@ -23538,12 +24884,20 @@
                     <a:solidFill>
                       <a:schemeClr val="dk1"/>
                     </a:solidFill>
-                    <a:latin typeface="Consolas"/>
-                    <a:ea typeface="Consolas"/>
-                    <a:cs typeface="Consolas"/>
+                    <a:latin typeface="Consolas" panose="020B0609020204030204"/>
+                    <a:ea typeface="Consolas" panose="020B0609020204030204"/>
+                    <a:cs typeface="Consolas" panose="020B0609020204030204"/>
                   </a:rPr>
                   <a:t>GetComponentInChildren&lt;T&gt;()</a:t>
                 </a:r>
+                <a:endParaRPr lang="en-US" sz="1580" dirty="0">
+                  <a:solidFill>
+                    <a:schemeClr val="dk1"/>
+                  </a:solidFill>
+                  <a:latin typeface="Consolas" panose="020B0609020204030204"/>
+                  <a:ea typeface="Consolas" panose="020B0609020204030204"/>
+                  <a:cs typeface="Consolas" panose="020B0609020204030204"/>
+                </a:endParaRPr>
               </a:p>
             </p:txBody>
           </p:sp>
@@ -23578,12 +24932,20 @@
                     <a:solidFill>
                       <a:schemeClr val="dk1"/>
                     </a:solidFill>
-                    <a:latin typeface="Consolas"/>
-                    <a:ea typeface="Consolas"/>
-                    <a:cs typeface="Consolas"/>
+                    <a:latin typeface="Consolas" panose="020B0609020204030204"/>
+                    <a:ea typeface="Consolas" panose="020B0609020204030204"/>
+                    <a:cs typeface="Consolas" panose="020B0609020204030204"/>
                   </a:rPr>
                   <a:t>GetComponentInParent&lt;T&gt;()</a:t>
                 </a:r>
+                <a:endParaRPr lang="en-US" sz="1580" dirty="0">
+                  <a:solidFill>
+                    <a:schemeClr val="dk1"/>
+                  </a:solidFill>
+                  <a:latin typeface="Consolas" panose="020B0609020204030204"/>
+                  <a:ea typeface="Consolas" panose="020B0609020204030204"/>
+                  <a:cs typeface="Consolas" panose="020B0609020204030204"/>
+                </a:endParaRPr>
               </a:p>
             </p:txBody>
           </p:sp>
@@ -23648,6 +25010,14 @@
                   </a:rPr>
                   <a:t>需要反复使用 → Awake 缓存</a:t>
                 </a:r>
+                <a:endParaRPr lang="zh-CN" sz="1350" b="1" dirty="0">
+                  <a:solidFill>
+                    <a:srgbClr val="2F8F6A"/>
+                  </a:solidFill>
+                  <a:latin typeface="+mn-lt"/>
+                  <a:ea typeface="+mn-ea"/>
+                  <a:cs typeface="+mn-cs"/>
+                </a:endParaRPr>
               </a:p>
             </p:txBody>
           </p:sp>
@@ -23833,6 +25203,14 @@
                   </a:rPr>
                   <a:t>引用策略</a:t>
                 </a:r>
+                <a:endParaRPr lang="zh-CN" sz="2550" b="1" dirty="0">
+                  <a:solidFill>
+                    <a:srgbClr val="8C5A00"/>
+                  </a:solidFill>
+                  <a:latin typeface="+mj-lt"/>
+                  <a:ea typeface="+mj-ea"/>
+                  <a:cs typeface="+mj-cs"/>
+                </a:endParaRPr>
               </a:p>
             </p:txBody>
           </p:sp>
@@ -23873,6 +25251,14 @@
                   </a:rPr>
                   <a:t>优先 1：Inspector SerializeField</a:t>
                 </a:r>
+                <a:endParaRPr lang="zh-CN" sz="1720" b="1" dirty="0">
+                  <a:solidFill>
+                    <a:schemeClr val="dk1"/>
+                  </a:solidFill>
+                  <a:latin typeface="+mn-lt"/>
+                  <a:ea typeface="+mn-ea"/>
+                  <a:cs typeface="+mn-cs"/>
+                </a:endParaRPr>
               </a:p>
             </p:txBody>
           </p:sp>
@@ -23913,6 +25299,14 @@
                   </a:rPr>
                   <a:t>优先 2：创建对象时传入引用</a:t>
                 </a:r>
+                <a:endParaRPr lang="zh-CN" sz="1720" b="1" dirty="0">
+                  <a:solidFill>
+                    <a:schemeClr val="dk1"/>
+                  </a:solidFill>
+                  <a:latin typeface="+mn-lt"/>
+                  <a:ea typeface="+mn-ea"/>
+                  <a:cs typeface="+mn-cs"/>
+                </a:endParaRPr>
               </a:p>
             </p:txBody>
           </p:sp>
@@ -23953,6 +25347,14 @@
                   </a:rPr>
                   <a:t>必要时：初始化查找一次并缓存</a:t>
                 </a:r>
+                <a:endParaRPr lang="zh-CN" sz="1720" b="1" dirty="0">
+                  <a:solidFill>
+                    <a:schemeClr val="dk1"/>
+                  </a:solidFill>
+                  <a:latin typeface="+mn-lt"/>
+                  <a:ea typeface="+mn-ea"/>
+                  <a:cs typeface="+mn-cs"/>
+                </a:endParaRPr>
               </a:p>
             </p:txBody>
           </p:sp>
@@ -24011,12 +25413,20 @@
                     <a:solidFill>
                       <a:srgbClr val="8C5A00"/>
                     </a:solidFill>
-                    <a:latin typeface="Consolas"/>
-                    <a:ea typeface="Consolas"/>
-                    <a:cs typeface="Consolas"/>
+                    <a:latin typeface="Consolas" panose="020B0609020204030204"/>
+                    <a:ea typeface="Consolas" panose="020B0609020204030204"/>
+                    <a:cs typeface="Consolas" panose="020B0609020204030204"/>
                   </a:rPr>
                   <a:t>GameObject.Find(...)</a:t>
                 </a:r>
+                <a:endParaRPr lang="en-US" sz="1500" dirty="0">
+                  <a:solidFill>
+                    <a:srgbClr val="8C5A00"/>
+                  </a:solidFill>
+                  <a:latin typeface="Consolas" panose="020B0609020204030204"/>
+                  <a:ea typeface="Consolas" panose="020B0609020204030204"/>
+                  <a:cs typeface="Consolas" panose="020B0609020204030204"/>
+                </a:endParaRPr>
               </a:p>
             </p:txBody>
           </p:sp>
@@ -24057,6 +25467,14 @@
                   </a:rPr>
                   <a:t>不要每帧按名称查找</a:t>
                 </a:r>
+                <a:endParaRPr lang="zh-CN" sz="1350" b="1" dirty="0">
+                  <a:solidFill>
+                    <a:srgbClr val="D85C45"/>
+                  </a:solidFill>
+                  <a:latin typeface="+mn-lt"/>
+                  <a:ea typeface="+mn-ea"/>
+                  <a:cs typeface="+mn-cs"/>
+                </a:endParaRPr>
               </a:p>
             </p:txBody>
           </p:sp>
@@ -24137,6 +25555,14 @@
                 </a:rPr>
                 <a:t>稳定的引用关系，比运行时“到处找对象”更可靠、更易维护</a:t>
               </a:r>
+              <a:endParaRPr lang="zh-CN" sz="1800" b="1" dirty="0">
+                <a:solidFill>
+                  <a:srgbClr val="FFFFFF"/>
+                </a:solidFill>
+                <a:latin typeface="+mn-lt"/>
+                <a:ea typeface="+mn-ea"/>
+                <a:cs typeface="+mn-cs"/>
+              </a:endParaRPr>
             </a:p>
           </p:txBody>
         </p:sp>
@@ -24179,46 +25605,6 @@
       </p:sp>
       <p:sp>
         <p:nvSpPr>
-          <p:cNvPr id="54" name="TextBox 54"/>
-          <p:cNvSpPr txBox="1"/>
-          <p:nvPr/>
-        </p:nvSpPr>
-        <p:spPr>
-          <a:xfrm>
-            <a:off x="564642" y="6521768"/>
-            <a:ext cx="2513320" cy="264033"/>
-          </a:xfrm>
-          <a:prstGeom prst="rect">
-            <a:avLst/>
-          </a:prstGeom>
-          <a:noFill/>
-          <a:ln>
-            <a:noFill/>
-          </a:ln>
-        </p:spPr>
-        <p:txBody>
-          <a:bodyPr wrap="none" lIns="0" tIns="0" rIns="0" bIns="0" anchor="t" anchorCtr="0">
-            <a:spAutoFit/>
-          </a:bodyPr>
-          <a:lstStyle/>
-          <a:p>
-            <a:pPr algn="l"/>
-            <a:r>
-              <a:rPr lang="zh-CN" sz="1350" dirty="0">
-                <a:solidFill>
-                  <a:schemeClr val="accent5"/>
-                </a:solidFill>
-                <a:latin typeface="+mn-lt"/>
-                <a:ea typeface="+mn-ea"/>
-                <a:cs typeface="+mn-cs"/>
-              </a:rPr>
-              <a:t>Unity 语法基础 · GameObject</a:t>
-            </a:r>
-          </a:p>
-        </p:txBody>
-      </p:sp>
-      <p:sp>
-        <p:nvSpPr>
           <p:cNvPr id="55" name="TextBox 55"/>
           <p:cNvSpPr txBox="1"/>
           <p:nvPr/>
@@ -24248,12 +25634,19 @@
                 <a:solidFill>
                   <a:schemeClr val="accent5"/>
                 </a:solidFill>
-                <a:latin typeface="Consolas"/>
-                <a:ea typeface="Consolas"/>
-                <a:cs typeface="Consolas"/>
+                <a:latin typeface="Consolas" panose="020B0609020204030204"/>
+                <a:ea typeface="Consolas" panose="020B0609020204030204"/>
+                <a:cs typeface="Consolas" panose="020B0609020204030204"/>
               </a:rPr>
-              <a:t>8</a:t>
             </a:fld>
+            <a:endParaRPr lang="en-US" sz="1350" dirty="0">
+              <a:solidFill>
+                <a:schemeClr val="accent5"/>
+              </a:solidFill>
+              <a:latin typeface="Consolas" panose="020B0609020204030204"/>
+              <a:ea typeface="Consolas" panose="020B0609020204030204"/>
+              <a:cs typeface="Consolas" panose="020B0609020204030204"/>
+            </a:endParaRPr>
           </a:p>
         </p:txBody>
       </p:sp>
@@ -24262,14 +25655,23 @@
   <p:clrMapOvr>
     <a:masterClrMapping/>
   </p:clrMapOvr>
-  <p:transition p14:dur="400">
-    <p:fade/>
-  </p:transition>
+  <mc:AlternateContent xmlns:mc="http://schemas.openxmlformats.org/markup-compatibility/2006">
+    <mc:Choice xmlns:p14="http://schemas.microsoft.com/office/powerpoint/2010/main" Requires="p14">
+      <p:transition p14:dur="400">
+        <p:fade/>
+      </p:transition>
+    </mc:Choice>
+    <mc:Fallback>
+      <p:transition>
+        <p:fade/>
+      </p:transition>
+    </mc:Fallback>
+  </mc:AlternateContent>
 </p:sld>
 </file>
 
 <file path=ppt/slides/slide9.xml><?xml version="1.0" encoding="utf-8"?>
-<p:sld xmlns:a="http://schemas.openxmlformats.org/drawingml/2006/main" xmlns:p="http://schemas.openxmlformats.org/presentationml/2006/main" xmlns:p14="http://schemas.microsoft.com/office/powerpoint/2010/main">
+<p:sld xmlns:a="http://schemas.openxmlformats.org/drawingml/2006/main" xmlns:r="http://schemas.openxmlformats.org/officeDocument/2006/relationships" xmlns:p="http://schemas.openxmlformats.org/presentationml/2006/main">
   <p:cSld>
     <p:spTree>
       <p:nvGrpSpPr>
@@ -24336,6 +25738,14 @@
                 </a:rPr>
                 <a:t>创建对象容易，维护引用更重要</a:t>
               </a:r>
+              <a:endParaRPr lang="zh-CN" sz="4200" b="1" dirty="0">
+                <a:solidFill>
+                  <a:schemeClr val="dk1"/>
+                </a:solidFill>
+                <a:latin typeface="+mj-lt"/>
+                <a:ea typeface="+mj-ea"/>
+                <a:cs typeface="+mj-cs"/>
+              </a:endParaRPr>
             </a:p>
           </p:txBody>
         </p:sp>
@@ -24376,6 +25786,14 @@
                 </a:rPr>
                 <a:t>先获得稳定引用，再创建、使用并在合适时机销毁</a:t>
               </a:r>
+              <a:endParaRPr lang="zh-CN" sz="1800" dirty="0">
+                <a:solidFill>
+                  <a:schemeClr val="dk2"/>
+                </a:solidFill>
+                <a:latin typeface="+mn-lt"/>
+                <a:ea typeface="+mn-ea"/>
+                <a:cs typeface="+mn-cs"/>
+              </a:endParaRPr>
             </a:p>
           </p:txBody>
         </p:sp>
@@ -24597,6 +26015,14 @@
                   </a:rPr>
                   <a:t>1. 建立引用</a:t>
                 </a:r>
+                <a:endParaRPr lang="zh-CN" sz="2550" b="1" dirty="0">
+                  <a:solidFill>
+                    <a:schemeClr val="accent1"/>
+                  </a:solidFill>
+                  <a:latin typeface="+mj-lt"/>
+                  <a:ea typeface="+mj-ea"/>
+                  <a:cs typeface="+mj-cs"/>
+                </a:endParaRPr>
               </a:p>
             </p:txBody>
           </p:sp>
@@ -24625,7 +26051,7 @@
               </a:bodyPr>
               <a:lstStyle/>
               <a:p>
-                <a:pPr algn="l" marL="186214" indent="-186214">
+                <a:pPr marL="186055" indent="-186055" algn="l">
                   <a:buClr>
                     <a:schemeClr val="dk1"/>
                   </a:buClr>
@@ -24644,6 +26070,14 @@
                   </a:rPr>
                   <a:t>Inspector 直接连接</a:t>
                 </a:r>
+                <a:endParaRPr lang="zh-CN" sz="1720" dirty="0">
+                  <a:solidFill>
+                    <a:schemeClr val="dk1"/>
+                  </a:solidFill>
+                  <a:latin typeface="+mn-lt"/>
+                  <a:ea typeface="+mn-ea"/>
+                  <a:cs typeface="+mn-cs"/>
+                </a:endParaRPr>
               </a:p>
             </p:txBody>
           </p:sp>
@@ -24672,7 +26106,7 @@
               </a:bodyPr>
               <a:lstStyle/>
               <a:p>
-                <a:pPr algn="l" marL="186214" indent="-186214">
+                <a:pPr marL="186055" indent="-186055" algn="l">
                   <a:buClr>
                     <a:schemeClr val="dk1"/>
                   </a:buClr>
@@ -24691,6 +26125,14 @@
                   </a:rPr>
                   <a:t>Awake 查找组件</a:t>
                 </a:r>
+                <a:endParaRPr lang="zh-CN" sz="1720" dirty="0">
+                  <a:solidFill>
+                    <a:schemeClr val="dk1"/>
+                  </a:solidFill>
+                  <a:latin typeface="+mn-lt"/>
+                  <a:ea typeface="+mn-ea"/>
+                  <a:cs typeface="+mn-cs"/>
+                </a:endParaRPr>
               </a:p>
             </p:txBody>
           </p:sp>
@@ -24719,7 +26161,7 @@
               </a:bodyPr>
               <a:lstStyle/>
               <a:p>
-                <a:pPr algn="l" marL="186214" indent="-186214">
+                <a:pPr marL="186055" indent="-186055" algn="l">
                   <a:buClr>
                     <a:schemeClr val="dk1"/>
                   </a:buClr>
@@ -24738,6 +26180,14 @@
                   </a:rPr>
                   <a:t>必要时按 Tag 查找</a:t>
                 </a:r>
+                <a:endParaRPr lang="zh-CN" sz="1720" dirty="0">
+                  <a:solidFill>
+                    <a:schemeClr val="dk1"/>
+                  </a:solidFill>
+                  <a:latin typeface="+mn-lt"/>
+                  <a:ea typeface="+mn-ea"/>
+                  <a:cs typeface="+mn-cs"/>
+                </a:endParaRPr>
               </a:p>
             </p:txBody>
           </p:sp>
@@ -24796,12 +26246,20 @@
                     <a:solidFill>
                       <a:schemeClr val="accent1"/>
                     </a:solidFill>
-                    <a:latin typeface="Consolas"/>
-                    <a:ea typeface="Consolas"/>
-                    <a:cs typeface="Consolas"/>
+                    <a:latin typeface="Consolas" panose="020B0609020204030204"/>
+                    <a:ea typeface="Consolas" panose="020B0609020204030204"/>
+                    <a:cs typeface="Consolas" panose="020B0609020204030204"/>
                   </a:rPr>
                   <a:t>cached reference</a:t>
                 </a:r>
+                <a:endParaRPr lang="en-US" sz="1500" b="1" dirty="0">
+                  <a:solidFill>
+                    <a:schemeClr val="accent1"/>
+                  </a:solidFill>
+                  <a:latin typeface="Consolas" panose="020B0609020204030204"/>
+                  <a:ea typeface="Consolas" panose="020B0609020204030204"/>
+                  <a:cs typeface="Consolas" panose="020B0609020204030204"/>
+                </a:endParaRPr>
               </a:p>
             </p:txBody>
           </p:sp>
@@ -24891,9 +26349,9 @@
           <p:grpSpPr>
             <a:xfrm>
               <a:off x="3429000" y="1695450"/>
-              <a:ext cx="3025531" cy="3467100"/>
+              <a:ext cx="2562535" cy="3467100"/>
               <a:chOff x="3429000" y="1695450"/>
-              <a:chExt cx="3025531" cy="3467100"/>
+              <a:chExt cx="2562535" cy="3467100"/>
             </a:xfrm>
           </p:grpSpPr>
           <p:sp>
@@ -25068,6 +26526,14 @@
                   </a:rPr>
                   <a:t>2. 创建能力</a:t>
                 </a:r>
+                <a:endParaRPr lang="zh-CN" sz="2550" b="1" dirty="0">
+                  <a:solidFill>
+                    <a:srgbClr val="8C5A00"/>
+                  </a:solidFill>
+                  <a:latin typeface="+mj-lt"/>
+                  <a:ea typeface="+mj-ea"/>
+                  <a:cs typeface="+mj-cs"/>
+                </a:endParaRPr>
               </a:p>
             </p:txBody>
           </p:sp>
@@ -25096,7 +26562,7 @@
               </a:bodyPr>
               <a:lstStyle/>
               <a:p>
-                <a:pPr algn="l" marL="186214" indent="-186214">
+                <a:pPr marL="186055" indent="-186055" algn="l">
                   <a:buClr>
                     <a:schemeClr val="dk1"/>
                   </a:buClr>
@@ -25115,6 +26581,14 @@
                   </a:rPr>
                   <a:t>Instantiate Prefab</a:t>
                 </a:r>
+                <a:endParaRPr lang="en-US" sz="1720" dirty="0">
+                  <a:solidFill>
+                    <a:schemeClr val="dk1"/>
+                  </a:solidFill>
+                  <a:latin typeface="+mn-lt"/>
+                  <a:ea typeface="+mn-ea"/>
+                  <a:cs typeface="+mn-cs"/>
+                </a:endParaRPr>
               </a:p>
             </p:txBody>
           </p:sp>
@@ -25143,7 +26617,7 @@
               </a:bodyPr>
               <a:lstStyle/>
               <a:p>
-                <a:pPr algn="l" marL="186214" indent="-186214">
+                <a:pPr marL="186055" indent="-186055" algn="l">
                   <a:buClr>
                     <a:schemeClr val="dk1"/>
                   </a:buClr>
@@ -25162,6 +26636,14 @@
                   </a:rPr>
                   <a:t>指定位置与旋转</a:t>
                 </a:r>
+                <a:endParaRPr lang="zh-CN" sz="1720" dirty="0">
+                  <a:solidFill>
+                    <a:schemeClr val="dk1"/>
+                  </a:solidFill>
+                  <a:latin typeface="+mn-lt"/>
+                  <a:ea typeface="+mn-ea"/>
+                  <a:cs typeface="+mn-cs"/>
+                </a:endParaRPr>
               </a:p>
             </p:txBody>
           </p:sp>
@@ -25174,7 +26656,7 @@
             <p:spPr>
               <a:xfrm>
                 <a:off x="3648837" y="3947636"/>
-                <a:ext cx="2805694" cy="337376"/>
+                <a:ext cx="1763395" cy="264160"/>
               </a:xfrm>
               <a:prstGeom prst="rect">
                 <a:avLst/>
@@ -25190,7 +26672,7 @@
               </a:bodyPr>
               <a:lstStyle/>
               <a:p>
-                <a:pPr algn="l" marL="186214" indent="-186214">
+                <a:pPr marL="186055" indent="-186055" algn="l">
                   <a:buClr>
                     <a:schemeClr val="dk1"/>
                   </a:buClr>
@@ -25207,8 +26689,16 @@
                     <a:ea typeface="+mn-ea"/>
                     <a:cs typeface="+mn-cs"/>
                   </a:rPr>
-                  <a:t>AddComponent 动态添加</a:t>
+                  <a:t>AddComponent </a:t>
                 </a:r>
+                <a:endParaRPr lang="zh-CN" sz="1720" dirty="0">
+                  <a:solidFill>
+                    <a:schemeClr val="dk1"/>
+                  </a:solidFill>
+                  <a:latin typeface="+mn-lt"/>
+                  <a:ea typeface="+mn-ea"/>
+                  <a:cs typeface="+mn-cs"/>
+                </a:endParaRPr>
               </a:p>
             </p:txBody>
           </p:sp>
@@ -25267,12 +26757,20 @@
                     <a:solidFill>
                       <a:srgbClr val="8C5A00"/>
                     </a:solidFill>
-                    <a:latin typeface="Consolas"/>
-                    <a:ea typeface="Consolas"/>
-                    <a:cs typeface="Consolas"/>
+                    <a:latin typeface="Consolas" panose="020B0609020204030204"/>
+                    <a:ea typeface="Consolas" panose="020B0609020204030204"/>
+                    <a:cs typeface="Consolas" panose="020B0609020204030204"/>
                   </a:rPr>
                   <a:t>runtime instance</a:t>
                 </a:r>
+                <a:endParaRPr lang="en-US" sz="1500" b="1" dirty="0">
+                  <a:solidFill>
+                    <a:srgbClr val="8C5A00"/>
+                  </a:solidFill>
+                  <a:latin typeface="Consolas" panose="020B0609020204030204"/>
+                  <a:ea typeface="Consolas" panose="020B0609020204030204"/>
+                  <a:cs typeface="Consolas" panose="020B0609020204030204"/>
+                </a:endParaRPr>
               </a:p>
             </p:txBody>
           </p:sp>
@@ -25647,6 +27145,14 @@
                   </a:rPr>
                   <a:t>3. 运行交互</a:t>
                 </a:r>
+                <a:endParaRPr lang="zh-CN" sz="2550" b="1" dirty="0">
+                  <a:solidFill>
+                    <a:srgbClr val="2F8F6A"/>
+                  </a:solidFill>
+                  <a:latin typeface="+mj-lt"/>
+                  <a:ea typeface="+mj-ea"/>
+                  <a:cs typeface="+mj-cs"/>
+                </a:endParaRPr>
               </a:p>
             </p:txBody>
           </p:sp>
@@ -25675,7 +27181,7 @@
               </a:bodyPr>
               <a:lstStyle/>
               <a:p>
-                <a:pPr algn="l" marL="186214" indent="-186214">
+                <a:pPr marL="186055" indent="-186055" algn="l">
                   <a:buClr>
                     <a:schemeClr val="dk1"/>
                   </a:buClr>
@@ -25694,6 +27200,14 @@
                   </a:rPr>
                   <a:t>调用组件方法</a:t>
                 </a:r>
+                <a:endParaRPr lang="zh-CN" sz="1720" dirty="0">
+                  <a:solidFill>
+                    <a:schemeClr val="dk1"/>
+                  </a:solidFill>
+                  <a:latin typeface="+mn-lt"/>
+                  <a:ea typeface="+mn-ea"/>
+                  <a:cs typeface="+mn-cs"/>
+                </a:endParaRPr>
               </a:p>
             </p:txBody>
           </p:sp>
@@ -25722,7 +27236,7 @@
               </a:bodyPr>
               <a:lstStyle/>
               <a:p>
-                <a:pPr algn="l" marL="186214" indent="-186214">
+                <a:pPr marL="186055" indent="-186055" algn="l">
                   <a:buClr>
                     <a:schemeClr val="dk1"/>
                   </a:buClr>
@@ -25741,6 +27255,14 @@
                   </a:rPr>
                   <a:t>CompareTag 判断身份</a:t>
                 </a:r>
+                <a:endParaRPr lang="zh-CN" sz="1720" dirty="0">
+                  <a:solidFill>
+                    <a:schemeClr val="dk1"/>
+                  </a:solidFill>
+                  <a:latin typeface="+mn-lt"/>
+                  <a:ea typeface="+mn-ea"/>
+                  <a:cs typeface="+mn-cs"/>
+                </a:endParaRPr>
               </a:p>
             </p:txBody>
           </p:sp>
@@ -25769,7 +27291,7 @@
               </a:bodyPr>
               <a:lstStyle/>
               <a:p>
-                <a:pPr algn="l" marL="186214" indent="-186214">
+                <a:pPr marL="186055" indent="-186055" algn="l">
                   <a:buClr>
                     <a:schemeClr val="dk1"/>
                   </a:buClr>
@@ -25788,6 +27310,14 @@
                   </a:rPr>
                   <a:t>更新状态与表现</a:t>
                 </a:r>
+                <a:endParaRPr lang="zh-CN" sz="1720" dirty="0">
+                  <a:solidFill>
+                    <a:schemeClr val="dk1"/>
+                  </a:solidFill>
+                  <a:latin typeface="+mn-lt"/>
+                  <a:ea typeface="+mn-ea"/>
+                  <a:cs typeface="+mn-cs"/>
+                </a:endParaRPr>
               </a:p>
             </p:txBody>
           </p:sp>
@@ -25846,12 +27376,20 @@
                     <a:solidFill>
                       <a:srgbClr val="2F8F6A"/>
                     </a:solidFill>
-                    <a:latin typeface="Consolas"/>
-                    <a:ea typeface="Consolas"/>
-                    <a:cs typeface="Consolas"/>
+                    <a:latin typeface="Consolas" panose="020B0609020204030204"/>
+                    <a:ea typeface="Consolas" panose="020B0609020204030204"/>
+                    <a:cs typeface="Consolas" panose="020B0609020204030204"/>
                   </a:rPr>
                   <a:t>controlled behavior</a:t>
                 </a:r>
+                <a:endParaRPr lang="en-US" sz="1500" b="1" dirty="0">
+                  <a:solidFill>
+                    <a:srgbClr val="2F8F6A"/>
+                  </a:solidFill>
+                  <a:latin typeface="Consolas" panose="020B0609020204030204"/>
+                  <a:ea typeface="Consolas" panose="020B0609020204030204"/>
+                  <a:cs typeface="Consolas" panose="020B0609020204030204"/>
+                </a:endParaRPr>
               </a:p>
             </p:txBody>
           </p:sp>
@@ -26258,6 +27796,14 @@
                   </a:rPr>
                   <a:t>4. 结束寿命</a:t>
                 </a:r>
+                <a:endParaRPr lang="zh-CN" sz="2550" b="1" dirty="0">
+                  <a:solidFill>
+                    <a:srgbClr val="D85C45"/>
+                  </a:solidFill>
+                  <a:latin typeface="+mj-lt"/>
+                  <a:ea typeface="+mj-ea"/>
+                  <a:cs typeface="+mj-cs"/>
+                </a:endParaRPr>
               </a:p>
             </p:txBody>
           </p:sp>
@@ -26286,7 +27832,7 @@
               </a:bodyPr>
               <a:lstStyle/>
               <a:p>
-                <a:pPr algn="l" marL="186214" indent="-186214">
+                <a:pPr marL="186055" indent="-186055" algn="l">
                   <a:buClr>
                     <a:schemeClr val="dk1"/>
                   </a:buClr>
@@ -26305,6 +27851,14 @@
                   </a:rPr>
                   <a:t>Destroy(gameObject)</a:t>
                 </a:r>
+                <a:endParaRPr lang="en-US" sz="1720" dirty="0">
+                  <a:solidFill>
+                    <a:schemeClr val="dk1"/>
+                  </a:solidFill>
+                  <a:latin typeface="+mn-lt"/>
+                  <a:ea typeface="+mn-ea"/>
+                  <a:cs typeface="+mn-cs"/>
+                </a:endParaRPr>
               </a:p>
             </p:txBody>
           </p:sp>
@@ -26333,7 +27887,7 @@
               </a:bodyPr>
               <a:lstStyle/>
               <a:p>
-                <a:pPr algn="l" marL="186214" indent="-186214">
+                <a:pPr marL="186055" indent="-186055" algn="l">
                   <a:buClr>
                     <a:schemeClr val="dk1"/>
                   </a:buClr>
@@ -26352,6 +27906,14 @@
                   </a:rPr>
                   <a:t>可延迟若干秒</a:t>
                 </a:r>
+                <a:endParaRPr lang="zh-CN" sz="1720" dirty="0">
+                  <a:solidFill>
+                    <a:schemeClr val="dk1"/>
+                  </a:solidFill>
+                  <a:latin typeface="+mn-lt"/>
+                  <a:ea typeface="+mn-ea"/>
+                  <a:cs typeface="+mn-cs"/>
+                </a:endParaRPr>
               </a:p>
             </p:txBody>
           </p:sp>
@@ -26380,7 +27942,7 @@
               </a:bodyPr>
               <a:lstStyle/>
               <a:p>
-                <a:pPr algn="l" marL="186214" indent="-186214">
+                <a:pPr marL="186055" indent="-186055" algn="l">
                   <a:buClr>
                     <a:schemeClr val="dk1"/>
                   </a:buClr>
@@ -26399,6 +27961,14 @@
                   </a:rPr>
                   <a:t>OnDestroy 清理资源</a:t>
                 </a:r>
+                <a:endParaRPr lang="zh-CN" sz="1720" dirty="0">
+                  <a:solidFill>
+                    <a:schemeClr val="dk1"/>
+                  </a:solidFill>
+                  <a:latin typeface="+mn-lt"/>
+                  <a:ea typeface="+mn-ea"/>
+                  <a:cs typeface="+mn-cs"/>
+                </a:endParaRPr>
               </a:p>
             </p:txBody>
           </p:sp>
@@ -26457,12 +28027,20 @@
                     <a:solidFill>
                       <a:srgbClr val="D85C45"/>
                     </a:solidFill>
-                    <a:latin typeface="Consolas"/>
-                    <a:ea typeface="Consolas"/>
-                    <a:cs typeface="Consolas"/>
+                    <a:latin typeface="Consolas" panose="020B0609020204030204"/>
+                    <a:ea typeface="Consolas" panose="020B0609020204030204"/>
+                    <a:cs typeface="Consolas" panose="020B0609020204030204"/>
                   </a:rPr>
                   <a:t>reference invalid</a:t>
                 </a:r>
+                <a:endParaRPr lang="en-US" sz="1500" b="1" dirty="0">
+                  <a:solidFill>
+                    <a:srgbClr val="D85C45"/>
+                  </a:solidFill>
+                  <a:latin typeface="Consolas" panose="020B0609020204030204"/>
+                  <a:ea typeface="Consolas" panose="020B0609020204030204"/>
+                  <a:cs typeface="Consolas" panose="020B0609020204030204"/>
+                </a:endParaRPr>
               </a:p>
             </p:txBody>
           </p:sp>
@@ -26543,6 +28121,14 @@
                 </a:rPr>
                 <a:t>固定配置尽量放 Inspector / Prefab；名称查找不要放进 Update</a:t>
               </a:r>
+              <a:endParaRPr lang="zh-CN" sz="1800" b="1" dirty="0">
+                <a:solidFill>
+                  <a:srgbClr val="FFFFFF"/>
+                </a:solidFill>
+                <a:latin typeface="+mn-lt"/>
+                <a:ea typeface="+mn-ea"/>
+                <a:cs typeface="+mn-cs"/>
+              </a:endParaRPr>
             </a:p>
           </p:txBody>
         </p:sp>
@@ -26585,46 +28171,6 @@
       </p:sp>
       <p:sp>
         <p:nvSpPr>
-          <p:cNvPr id="69" name="TextBox 69"/>
-          <p:cNvSpPr txBox="1"/>
-          <p:nvPr/>
-        </p:nvSpPr>
-        <p:spPr>
-          <a:xfrm>
-            <a:off x="564642" y="6521768"/>
-            <a:ext cx="2577648" cy="264033"/>
-          </a:xfrm>
-          <a:prstGeom prst="rect">
-            <a:avLst/>
-          </a:prstGeom>
-          <a:noFill/>
-          <a:ln>
-            <a:noFill/>
-          </a:ln>
-        </p:spPr>
-        <p:txBody>
-          <a:bodyPr wrap="none" lIns="0" tIns="0" rIns="0" bIns="0" anchor="t" anchorCtr="0">
-            <a:spAutoFit/>
-          </a:bodyPr>
-          <a:lstStyle/>
-          <a:p>
-            <a:pPr algn="l"/>
-            <a:r>
-              <a:rPr lang="zh-CN" sz="1350" dirty="0">
-                <a:solidFill>
-                  <a:schemeClr val="accent5"/>
-                </a:solidFill>
-                <a:latin typeface="+mn-lt"/>
-                <a:ea typeface="+mn-ea"/>
-                <a:cs typeface="+mn-cs"/>
-              </a:rPr>
-              <a:t>Unity 语法基础 · 对象生命周期</a:t>
-            </a:r>
-          </a:p>
-        </p:txBody>
-      </p:sp>
-      <p:sp>
-        <p:nvSpPr>
           <p:cNvPr id="70" name="TextBox 70"/>
           <p:cNvSpPr txBox="1"/>
           <p:nvPr/>
@@ -26654,12 +28200,19 @@
                 <a:solidFill>
                   <a:schemeClr val="accent5"/>
                 </a:solidFill>
-                <a:latin typeface="Consolas"/>
-                <a:ea typeface="Consolas"/>
-                <a:cs typeface="Consolas"/>
+                <a:latin typeface="Consolas" panose="020B0609020204030204"/>
+                <a:ea typeface="Consolas" panose="020B0609020204030204"/>
+                <a:cs typeface="Consolas" panose="020B0609020204030204"/>
               </a:rPr>
-              <a:t>9</a:t>
             </a:fld>
+            <a:endParaRPr lang="en-US" sz="1350" dirty="0">
+              <a:solidFill>
+                <a:schemeClr val="accent5"/>
+              </a:solidFill>
+              <a:latin typeface="Consolas" panose="020B0609020204030204"/>
+              <a:ea typeface="Consolas" panose="020B0609020204030204"/>
+              <a:cs typeface="Consolas" panose="020B0609020204030204"/>
+            </a:endParaRPr>
           </a:p>
         </p:txBody>
       </p:sp>
@@ -26668,9 +28221,18 @@
   <p:clrMapOvr>
     <a:masterClrMapping/>
   </p:clrMapOvr>
-  <p:transition p14:dur="400">
-    <p:fade/>
-  </p:transition>
+  <mc:AlternateContent xmlns:mc="http://schemas.openxmlformats.org/markup-compatibility/2006">
+    <mc:Choice xmlns:p14="http://schemas.microsoft.com/office/powerpoint/2010/main" Requires="p14">
+      <p:transition p14:dur="400">
+        <p:fade/>
+      </p:transition>
+    </mc:Choice>
+    <mc:Fallback>
+      <p:transition>
+        <p:fade/>
+      </p:transition>
+    </mc:Fallback>
+  </mc:AlternateContent>
 </p:sld>
 </file>
 
@@ -26990,7 +28552,11 @@
       </a:style>
     </a:lnDef>
   </a:objectDefaults>
-  <a:extraClrSchemeLst/>
+  <a:extLst>
+    <a:ext uri="{05A4C25C-085E-4340-85A3-A5531E510DB2}">
+      <thm15:themeFamily xmlns:thm15="http://schemas.microsoft.com/office/thememl/2012/main" name="Office Theme" id="{62F939B6-93AF-4DB8-9C6B-D6C7DFDC589F}" vid="{4A3C46E8-61CC-4603-A589-7422A47A8E4A}"/>
+    </a:ext>
+  </a:extLst>
 </a:theme>
 </file>
 
@@ -27310,6 +28876,10 @@
       </a:style>
     </a:lnDef>
   </a:objectDefaults>
-  <a:extraClrSchemeLst/>
+  <a:extLst>
+    <a:ext uri="{05A4C25C-085E-4340-85A3-A5531E510DB2}">
+      <thm15:themeFamily xmlns:thm15="http://schemas.microsoft.com/office/thememl/2012/main" name="Office Theme" id="{62F939B6-93AF-4DB8-9C6B-D6C7DFDC589F}" vid="{4A3C46E8-61CC-4603-A589-7422A47A8E4A}"/>
+    </a:ext>
+  </a:extLst>
 </a:theme>
 </file>